--- a/docs/apresentacoes/02-servicos-odata.pptx
+++ b/docs/apresentacoes/02-servicos-odata.pptx
@@ -119,23 +119,23 @@
   <p:extLst>
     <p:ext uri="{521415D9-36F7-43E2-AB2F-B90AF26B5E84}">
       <p14:sectionLst xmlns:p14="http://schemas.microsoft.com/office/powerpoint/2010/main">
-        <p14:section name="Abertura" id="{557ade92-68f9-72d4-4d55-78e0bc37a7e7}">
+        <p14:section name="Abertura" id="{d32c4d33-2dea-62a5-172c-474a9320dc69}">
           <p14:sldIdLst>
             <p14:sldId id="256"/>
           </p14:sldIdLst>
         </p14:section>
-        <p14:section name="Contexto" id="{d014409a-930f-3517-a953-f5f73f64f018}">
+        <p14:section name="Contexto" id="{8cd9cb1f-7662-c4a2-3526-2bf20f4857ba}">
           <p14:sldIdLst>
             <p14:sldId id="257"/>
           </p14:sldIdLst>
         </p14:section>
-        <p14:section name="Arquitetura" id="{dac40833-8288-a849-2146-3a228dbbab07}">
+        <p14:section name="Arquitetura" id="{3d108641-687f-1c2c-5d11-226d0d0c264b}">
           <p14:sldIdLst>
             <p14:sldId id="258"/>
             <p14:sldId id="259"/>
           </p14:sldIdLst>
         </p14:section>
-        <p14:section name="Definição dos serviços" id="{1146a1fe-e09f-4539-269e-cfd2bd1d12a1}">
+        <p14:section name="Definição dos serviços" id="{4ebe0e56-3761-70cd-75a5-b15af7fa7d3e}">
           <p14:sldIdLst>
             <p14:sldId id="260"/>
             <p14:sldId id="261"/>
@@ -144,18 +144,18 @@
             <p14:sldId id="264"/>
           </p14:sldIdLst>
         </p14:section>
-        <p14:section name="Autorização e validação" id="{d3d88367-a92e-8b4c-d868-a2ea94f9aae5}">
+        <p14:section name="Autorização e validação" id="{fc48948e-0038-a821-c6c1-fe4d3b616432}">
           <p14:sldIdLst>
             <p14:sldId id="265"/>
             <p14:sldId id="266"/>
           </p14:sldIdLst>
         </p14:section>
-        <p14:section name="Publicação local" id="{776c18b2-b6dd-f70d-addb-96b8bf9b95a3}">
+        <p14:section name="Publicação local" id="{dc1af244-ed3e-c8f3-e265-1aa6526a1c18}">
           <p14:sldIdLst>
             <p14:sldId id="267"/>
           </p14:sldIdLst>
         </p14:section>
-        <p14:section name="Encerramento" id="{4f51aae2-a127-c4b3-3acd-99a022a98814}">
+        <p14:section name="Encerramento" id="{8b72fe52-55ff-12bf-fc38-b1479f82e08f}">
           <p14:sldIdLst>
             <p14:sldId id="268"/>
           </p14:sldIdLst>
@@ -3875,9 +3875,14 @@
             </a:avLst>
           </a:prstGeom>
           <a:solidFill>
-            <a:srgbClr val="1D2D3E"/>
+            <a:srgbClr val="1F1F1F"/>
           </a:solidFill>
-          <a:ln/>
+          <a:ln w="9525">
+            <a:solidFill>
+              <a:srgbClr val="2B2B2B"/>
+            </a:solidFill>
+            <a:prstDash val="solid"/>
+          </a:ln>
           <a:effectLst>
             <a:outerShdw sx="100000" sy="100000" kx="0" ky="0" algn="bl" rotWithShape="0" blurRad="101600" dist="25400" dir="5400000">
               <a:srgbClr val="223649">
@@ -3914,7 +3919,7 @@
             <a:r>
               <a:rPr lang="en-US" sz="1300" dirty="0">
                 <a:solidFill>
-                  <a:srgbClr val="A9B4BE"/>
+                  <a:srgbClr val="6A9955"/>
                 </a:solidFill>
                 <a:latin typeface="Courier New" pitchFamily="34" charset="0"/>
                 <a:ea typeface="Courier New" pitchFamily="34" charset="-122"/>
@@ -3931,13 +3936,41 @@
             <a:r>
               <a:rPr lang="en-US" sz="1300" dirty="0">
                 <a:solidFill>
-                  <a:srgbClr val="89D1FF"/>
-                </a:solidFill>
-                <a:latin typeface="Courier New" pitchFamily="34" charset="0"/>
-                <a:ea typeface="Courier New" pitchFamily="34" charset="-122"/>
-                <a:cs typeface="Courier New" pitchFamily="34" charset="-120"/>
-              </a:rPr>
-              <a:t>@restrict: [</a:t>
+                  <a:srgbClr val="DCDCAA"/>
+                </a:solidFill>
+                <a:latin typeface="Courier New" pitchFamily="34" charset="0"/>
+                <a:ea typeface="Courier New" pitchFamily="34" charset="-122"/>
+                <a:cs typeface="Courier New" pitchFamily="34" charset="-120"/>
+              </a:rPr>
+              <a:t>@restrict</a:t>
+            </a:r>
+            <a:pPr indent="0" marL="0">
+              <a:buNone/>
+            </a:pPr>
+            <a:r>
+              <a:rPr lang="en-US" sz="1300" dirty="0">
+                <a:solidFill>
+                  <a:srgbClr val="CCCCCC"/>
+                </a:solidFill>
+                <a:latin typeface="Courier New" pitchFamily="34" charset="0"/>
+                <a:ea typeface="Courier New" pitchFamily="34" charset="-122"/>
+                <a:cs typeface="Courier New" pitchFamily="34" charset="-120"/>
+              </a:rPr>
+              <a:t>: </a:t>
+            </a:r>
+            <a:pPr indent="0" marL="0">
+              <a:buNone/>
+            </a:pPr>
+            <a:r>
+              <a:rPr lang="en-US" sz="1300" dirty="0">
+                <a:solidFill>
+                  <a:srgbClr val="FFD700"/>
+                </a:solidFill>
+                <a:latin typeface="Courier New" pitchFamily="34" charset="0"/>
+                <a:ea typeface="Courier New" pitchFamily="34" charset="-122"/>
+                <a:cs typeface="Courier New" pitchFamily="34" charset="-120"/>
+              </a:rPr>
+              <a:t>[</a:t>
             </a:r>
             <a:endParaRPr lang="en-US" sz="1300" dirty="0"/>
           </a:p>
@@ -3948,13 +3981,181 @@
             <a:r>
               <a:rPr lang="en-US" sz="1300" dirty="0">
                 <a:solidFill>
-                  <a:srgbClr val="EAECEE"/>
-                </a:solidFill>
-                <a:latin typeface="Courier New" pitchFamily="34" charset="0"/>
-                <a:ea typeface="Courier New" pitchFamily="34" charset="-122"/>
-                <a:cs typeface="Courier New" pitchFamily="34" charset="-120"/>
-              </a:rPr>
-              <a:t>  { grant: 'READ', to: 'Comum' },</a:t>
+                  <a:srgbClr val="CCCCCC"/>
+                </a:solidFill>
+                <a:latin typeface="Courier New" pitchFamily="34" charset="0"/>
+                <a:ea typeface="Courier New" pitchFamily="34" charset="-122"/>
+                <a:cs typeface="Courier New" pitchFamily="34" charset="-120"/>
+              </a:rPr>
+              <a:t>  </a:t>
+            </a:r>
+            <a:pPr indent="0" marL="0">
+              <a:buNone/>
+            </a:pPr>
+            <a:r>
+              <a:rPr lang="en-US" sz="1300" dirty="0">
+                <a:solidFill>
+                  <a:srgbClr val="DA70D6"/>
+                </a:solidFill>
+                <a:latin typeface="Courier New" pitchFamily="34" charset="0"/>
+                <a:ea typeface="Courier New" pitchFamily="34" charset="-122"/>
+                <a:cs typeface="Courier New" pitchFamily="34" charset="-120"/>
+              </a:rPr>
+              <a:t>{</a:t>
+            </a:r>
+            <a:pPr indent="0" marL="0">
+              <a:buNone/>
+            </a:pPr>
+            <a:r>
+              <a:rPr lang="en-US" sz="1300" dirty="0">
+                <a:solidFill>
+                  <a:srgbClr val="CCCCCC"/>
+                </a:solidFill>
+                <a:latin typeface="Courier New" pitchFamily="34" charset="0"/>
+                <a:ea typeface="Courier New" pitchFamily="34" charset="-122"/>
+                <a:cs typeface="Courier New" pitchFamily="34" charset="-120"/>
+              </a:rPr>
+              <a:t> </a:t>
+            </a:r>
+            <a:pPr indent="0" marL="0">
+              <a:buNone/>
+            </a:pPr>
+            <a:r>
+              <a:rPr lang="en-US" sz="1300" dirty="0">
+                <a:solidFill>
+                  <a:srgbClr val="9CDCFE"/>
+                </a:solidFill>
+                <a:latin typeface="Courier New" pitchFamily="34" charset="0"/>
+                <a:ea typeface="Courier New" pitchFamily="34" charset="-122"/>
+                <a:cs typeface="Courier New" pitchFamily="34" charset="-120"/>
+              </a:rPr>
+              <a:t>grant</a:t>
+            </a:r>
+            <a:pPr indent="0" marL="0">
+              <a:buNone/>
+            </a:pPr>
+            <a:r>
+              <a:rPr lang="en-US" sz="1300" dirty="0">
+                <a:solidFill>
+                  <a:srgbClr val="CCCCCC"/>
+                </a:solidFill>
+                <a:latin typeface="Courier New" pitchFamily="34" charset="0"/>
+                <a:ea typeface="Courier New" pitchFamily="34" charset="-122"/>
+                <a:cs typeface="Courier New" pitchFamily="34" charset="-120"/>
+              </a:rPr>
+              <a:t>: </a:t>
+            </a:r>
+            <a:pPr indent="0" marL="0">
+              <a:buNone/>
+            </a:pPr>
+            <a:r>
+              <a:rPr lang="en-US" sz="1300" dirty="0">
+                <a:solidFill>
+                  <a:srgbClr val="CE9178"/>
+                </a:solidFill>
+                <a:latin typeface="Courier New" pitchFamily="34" charset="0"/>
+                <a:ea typeface="Courier New" pitchFamily="34" charset="-122"/>
+                <a:cs typeface="Courier New" pitchFamily="34" charset="-120"/>
+              </a:rPr>
+              <a:t>'READ'</a:t>
+            </a:r>
+            <a:pPr indent="0" marL="0">
+              <a:buNone/>
+            </a:pPr>
+            <a:r>
+              <a:rPr lang="en-US" sz="1300" dirty="0">
+                <a:solidFill>
+                  <a:srgbClr val="CCCCCC"/>
+                </a:solidFill>
+                <a:latin typeface="Courier New" pitchFamily="34" charset="0"/>
+                <a:ea typeface="Courier New" pitchFamily="34" charset="-122"/>
+                <a:cs typeface="Courier New" pitchFamily="34" charset="-120"/>
+              </a:rPr>
+              <a:t>, </a:t>
+            </a:r>
+            <a:pPr indent="0" marL="0">
+              <a:buNone/>
+            </a:pPr>
+            <a:r>
+              <a:rPr lang="en-US" sz="1300" dirty="0">
+                <a:solidFill>
+                  <a:srgbClr val="569CD6"/>
+                </a:solidFill>
+                <a:latin typeface="Courier New" pitchFamily="34" charset="0"/>
+                <a:ea typeface="Courier New" pitchFamily="34" charset="-122"/>
+                <a:cs typeface="Courier New" pitchFamily="34" charset="-120"/>
+              </a:rPr>
+              <a:t>to</a:t>
+            </a:r>
+            <a:pPr indent="0" marL="0">
+              <a:buNone/>
+            </a:pPr>
+            <a:r>
+              <a:rPr lang="en-US" sz="1300" dirty="0">
+                <a:solidFill>
+                  <a:srgbClr val="CCCCCC"/>
+                </a:solidFill>
+                <a:latin typeface="Courier New" pitchFamily="34" charset="0"/>
+                <a:ea typeface="Courier New" pitchFamily="34" charset="-122"/>
+                <a:cs typeface="Courier New" pitchFamily="34" charset="-120"/>
+              </a:rPr>
+              <a:t>: </a:t>
+            </a:r>
+            <a:pPr indent="0" marL="0">
+              <a:buNone/>
+            </a:pPr>
+            <a:r>
+              <a:rPr lang="en-US" sz="1300" dirty="0">
+                <a:solidFill>
+                  <a:srgbClr val="CE9178"/>
+                </a:solidFill>
+                <a:latin typeface="Courier New" pitchFamily="34" charset="0"/>
+                <a:ea typeface="Courier New" pitchFamily="34" charset="-122"/>
+                <a:cs typeface="Courier New" pitchFamily="34" charset="-120"/>
+              </a:rPr>
+              <a:t>'Comum'</a:t>
+            </a:r>
+            <a:pPr indent="0" marL="0">
+              <a:buNone/>
+            </a:pPr>
+            <a:r>
+              <a:rPr lang="en-US" sz="1300" dirty="0">
+                <a:solidFill>
+                  <a:srgbClr val="CCCCCC"/>
+                </a:solidFill>
+                <a:latin typeface="Courier New" pitchFamily="34" charset="0"/>
+                <a:ea typeface="Courier New" pitchFamily="34" charset="-122"/>
+                <a:cs typeface="Courier New" pitchFamily="34" charset="-120"/>
+              </a:rPr>
+              <a:t> </a:t>
+            </a:r>
+            <a:pPr indent="0" marL="0">
+              <a:buNone/>
+            </a:pPr>
+            <a:r>
+              <a:rPr lang="en-US" sz="1300" dirty="0">
+                <a:solidFill>
+                  <a:srgbClr val="DA70D6"/>
+                </a:solidFill>
+                <a:latin typeface="Courier New" pitchFamily="34" charset="0"/>
+                <a:ea typeface="Courier New" pitchFamily="34" charset="-122"/>
+                <a:cs typeface="Courier New" pitchFamily="34" charset="-120"/>
+              </a:rPr>
+              <a:t>}</a:t>
+            </a:r>
+            <a:pPr indent="0" marL="0">
+              <a:buNone/>
+            </a:pPr>
+            <a:r>
+              <a:rPr lang="en-US" sz="1300" dirty="0">
+                <a:solidFill>
+                  <a:srgbClr val="CCCCCC"/>
+                </a:solidFill>
+                <a:latin typeface="Courier New" pitchFamily="34" charset="0"/>
+                <a:ea typeface="Courier New" pitchFamily="34" charset="-122"/>
+                <a:cs typeface="Courier New" pitchFamily="34" charset="-120"/>
+              </a:rPr>
+              <a:t>,</a:t>
             </a:r>
             <a:endParaRPr lang="en-US" sz="1300" dirty="0"/>
           </a:p>
@@ -3965,13 +4166,167 @@
             <a:r>
               <a:rPr lang="en-US" sz="1300" dirty="0">
                 <a:solidFill>
-                  <a:srgbClr val="EAECEE"/>
-                </a:solidFill>
-                <a:latin typeface="Courier New" pitchFamily="34" charset="0"/>
-                <a:ea typeface="Courier New" pitchFamily="34" charset="-122"/>
-                <a:cs typeface="Courier New" pitchFamily="34" charset="-120"/>
-              </a:rPr>
-              <a:t>  { grant: '*',    to: 'Admin' }</a:t>
+                  <a:srgbClr val="CCCCCC"/>
+                </a:solidFill>
+                <a:latin typeface="Courier New" pitchFamily="34" charset="0"/>
+                <a:ea typeface="Courier New" pitchFamily="34" charset="-122"/>
+                <a:cs typeface="Courier New" pitchFamily="34" charset="-120"/>
+              </a:rPr>
+              <a:t>  </a:t>
+            </a:r>
+            <a:pPr indent="0" marL="0">
+              <a:buNone/>
+            </a:pPr>
+            <a:r>
+              <a:rPr lang="en-US" sz="1300" dirty="0">
+                <a:solidFill>
+                  <a:srgbClr val="DA70D6"/>
+                </a:solidFill>
+                <a:latin typeface="Courier New" pitchFamily="34" charset="0"/>
+                <a:ea typeface="Courier New" pitchFamily="34" charset="-122"/>
+                <a:cs typeface="Courier New" pitchFamily="34" charset="-120"/>
+              </a:rPr>
+              <a:t>{</a:t>
+            </a:r>
+            <a:pPr indent="0" marL="0">
+              <a:buNone/>
+            </a:pPr>
+            <a:r>
+              <a:rPr lang="en-US" sz="1300" dirty="0">
+                <a:solidFill>
+                  <a:srgbClr val="CCCCCC"/>
+                </a:solidFill>
+                <a:latin typeface="Courier New" pitchFamily="34" charset="0"/>
+                <a:ea typeface="Courier New" pitchFamily="34" charset="-122"/>
+                <a:cs typeface="Courier New" pitchFamily="34" charset="-120"/>
+              </a:rPr>
+              <a:t> </a:t>
+            </a:r>
+            <a:pPr indent="0" marL="0">
+              <a:buNone/>
+            </a:pPr>
+            <a:r>
+              <a:rPr lang="en-US" sz="1300" dirty="0">
+                <a:solidFill>
+                  <a:srgbClr val="9CDCFE"/>
+                </a:solidFill>
+                <a:latin typeface="Courier New" pitchFamily="34" charset="0"/>
+                <a:ea typeface="Courier New" pitchFamily="34" charset="-122"/>
+                <a:cs typeface="Courier New" pitchFamily="34" charset="-120"/>
+              </a:rPr>
+              <a:t>grant</a:t>
+            </a:r>
+            <a:pPr indent="0" marL="0">
+              <a:buNone/>
+            </a:pPr>
+            <a:r>
+              <a:rPr lang="en-US" sz="1300" dirty="0">
+                <a:solidFill>
+                  <a:srgbClr val="CCCCCC"/>
+                </a:solidFill>
+                <a:latin typeface="Courier New" pitchFamily="34" charset="0"/>
+                <a:ea typeface="Courier New" pitchFamily="34" charset="-122"/>
+                <a:cs typeface="Courier New" pitchFamily="34" charset="-120"/>
+              </a:rPr>
+              <a:t>: </a:t>
+            </a:r>
+            <a:pPr indent="0" marL="0">
+              <a:buNone/>
+            </a:pPr>
+            <a:r>
+              <a:rPr lang="en-US" sz="1300" dirty="0">
+                <a:solidFill>
+                  <a:srgbClr val="CE9178"/>
+                </a:solidFill>
+                <a:latin typeface="Courier New" pitchFamily="34" charset="0"/>
+                <a:ea typeface="Courier New" pitchFamily="34" charset="-122"/>
+                <a:cs typeface="Courier New" pitchFamily="34" charset="-120"/>
+              </a:rPr>
+              <a:t>'*'</a:t>
+            </a:r>
+            <a:pPr indent="0" marL="0">
+              <a:buNone/>
+            </a:pPr>
+            <a:r>
+              <a:rPr lang="en-US" sz="1300" dirty="0">
+                <a:solidFill>
+                  <a:srgbClr val="CCCCCC"/>
+                </a:solidFill>
+                <a:latin typeface="Courier New" pitchFamily="34" charset="0"/>
+                <a:ea typeface="Courier New" pitchFamily="34" charset="-122"/>
+                <a:cs typeface="Courier New" pitchFamily="34" charset="-120"/>
+              </a:rPr>
+              <a:t>,    </a:t>
+            </a:r>
+            <a:pPr indent="0" marL="0">
+              <a:buNone/>
+            </a:pPr>
+            <a:r>
+              <a:rPr lang="en-US" sz="1300" dirty="0">
+                <a:solidFill>
+                  <a:srgbClr val="569CD6"/>
+                </a:solidFill>
+                <a:latin typeface="Courier New" pitchFamily="34" charset="0"/>
+                <a:ea typeface="Courier New" pitchFamily="34" charset="-122"/>
+                <a:cs typeface="Courier New" pitchFamily="34" charset="-120"/>
+              </a:rPr>
+              <a:t>to</a:t>
+            </a:r>
+            <a:pPr indent="0" marL="0">
+              <a:buNone/>
+            </a:pPr>
+            <a:r>
+              <a:rPr lang="en-US" sz="1300" dirty="0">
+                <a:solidFill>
+                  <a:srgbClr val="CCCCCC"/>
+                </a:solidFill>
+                <a:latin typeface="Courier New" pitchFamily="34" charset="0"/>
+                <a:ea typeface="Courier New" pitchFamily="34" charset="-122"/>
+                <a:cs typeface="Courier New" pitchFamily="34" charset="-120"/>
+              </a:rPr>
+              <a:t>: </a:t>
+            </a:r>
+            <a:pPr indent="0" marL="0">
+              <a:buNone/>
+            </a:pPr>
+            <a:r>
+              <a:rPr lang="en-US" sz="1300" dirty="0">
+                <a:solidFill>
+                  <a:srgbClr val="CE9178"/>
+                </a:solidFill>
+                <a:latin typeface="Courier New" pitchFamily="34" charset="0"/>
+                <a:ea typeface="Courier New" pitchFamily="34" charset="-122"/>
+                <a:cs typeface="Courier New" pitchFamily="34" charset="-120"/>
+              </a:rPr>
+              <a:t>'Admin'</a:t>
+            </a:r>
+            <a:pPr indent="0" marL="0">
+              <a:buNone/>
+            </a:pPr>
+            <a:r>
+              <a:rPr lang="en-US" sz="1300" dirty="0">
+                <a:solidFill>
+                  <a:srgbClr val="CCCCCC"/>
+                </a:solidFill>
+                <a:latin typeface="Courier New" pitchFamily="34" charset="0"/>
+                <a:ea typeface="Courier New" pitchFamily="34" charset="-122"/>
+                <a:cs typeface="Courier New" pitchFamily="34" charset="-120"/>
+              </a:rPr>
+              <a:t> </a:t>
+            </a:r>
+            <a:pPr indent="0" marL="0">
+              <a:buNone/>
+            </a:pPr>
+            <a:r>
+              <a:rPr lang="en-US" sz="1300" dirty="0">
+                <a:solidFill>
+                  <a:srgbClr val="DA70D6"/>
+                </a:solidFill>
+                <a:latin typeface="Courier New" pitchFamily="34" charset="0"/>
+                <a:ea typeface="Courier New" pitchFamily="34" charset="-122"/>
+                <a:cs typeface="Courier New" pitchFamily="34" charset="-120"/>
+              </a:rPr>
+              <a:t>}</a:t>
             </a:r>
             <a:endParaRPr lang="en-US" sz="1300" dirty="0"/>
           </a:p>
@@ -3982,7 +4337,7 @@
             <a:r>
               <a:rPr lang="en-US" sz="1300" dirty="0">
                 <a:solidFill>
-                  <a:srgbClr val="EAECEE"/>
+                  <a:srgbClr val="FFD700"/>
                 </a:solidFill>
                 <a:latin typeface="Courier New" pitchFamily="34" charset="0"/>
                 <a:ea typeface="Courier New" pitchFamily="34" charset="-122"/>
@@ -3999,13 +4354,97 @@
             <a:r>
               <a:rPr lang="en-US" sz="1300" dirty="0">
                 <a:solidFill>
-                  <a:srgbClr val="EAECEE"/>
-                </a:solidFill>
-                <a:latin typeface="Courier New" pitchFamily="34" charset="0"/>
-                <a:ea typeface="Courier New" pitchFamily="34" charset="-122"/>
-                <a:cs typeface="Courier New" pitchFamily="34" charset="-120"/>
-              </a:rPr>
-              <a:t>entity Clientes as projection</a:t>
+                  <a:srgbClr val="569CD6"/>
+                </a:solidFill>
+                <a:latin typeface="Courier New" pitchFamily="34" charset="0"/>
+                <a:ea typeface="Courier New" pitchFamily="34" charset="-122"/>
+                <a:cs typeface="Courier New" pitchFamily="34" charset="-120"/>
+              </a:rPr>
+              <a:t>entity</a:t>
+            </a:r>
+            <a:pPr indent="0" marL="0">
+              <a:buNone/>
+            </a:pPr>
+            <a:r>
+              <a:rPr lang="en-US" sz="1300" dirty="0">
+                <a:solidFill>
+                  <a:srgbClr val="CCCCCC"/>
+                </a:solidFill>
+                <a:latin typeface="Courier New" pitchFamily="34" charset="0"/>
+                <a:ea typeface="Courier New" pitchFamily="34" charset="-122"/>
+                <a:cs typeface="Courier New" pitchFamily="34" charset="-120"/>
+              </a:rPr>
+              <a:t> </a:t>
+            </a:r>
+            <a:pPr indent="0" marL="0">
+              <a:buNone/>
+            </a:pPr>
+            <a:r>
+              <a:rPr lang="en-US" sz="1300" dirty="0">
+                <a:solidFill>
+                  <a:srgbClr val="4EC9B0"/>
+                </a:solidFill>
+                <a:latin typeface="Courier New" pitchFamily="34" charset="0"/>
+                <a:ea typeface="Courier New" pitchFamily="34" charset="-122"/>
+                <a:cs typeface="Courier New" pitchFamily="34" charset="-120"/>
+              </a:rPr>
+              <a:t>Clientes</a:t>
+            </a:r>
+            <a:pPr indent="0" marL="0">
+              <a:buNone/>
+            </a:pPr>
+            <a:r>
+              <a:rPr lang="en-US" sz="1300" dirty="0">
+                <a:solidFill>
+                  <a:srgbClr val="CCCCCC"/>
+                </a:solidFill>
+                <a:latin typeface="Courier New" pitchFamily="34" charset="0"/>
+                <a:ea typeface="Courier New" pitchFamily="34" charset="-122"/>
+                <a:cs typeface="Courier New" pitchFamily="34" charset="-120"/>
+              </a:rPr>
+              <a:t> </a:t>
+            </a:r>
+            <a:pPr indent="0" marL="0">
+              <a:buNone/>
+            </a:pPr>
+            <a:r>
+              <a:rPr lang="en-US" sz="1300" dirty="0">
+                <a:solidFill>
+                  <a:srgbClr val="569CD6"/>
+                </a:solidFill>
+                <a:latin typeface="Courier New" pitchFamily="34" charset="0"/>
+                <a:ea typeface="Courier New" pitchFamily="34" charset="-122"/>
+                <a:cs typeface="Courier New" pitchFamily="34" charset="-120"/>
+              </a:rPr>
+              <a:t>as</a:t>
+            </a:r>
+            <a:pPr indent="0" marL="0">
+              <a:buNone/>
+            </a:pPr>
+            <a:r>
+              <a:rPr lang="en-US" sz="1300" dirty="0">
+                <a:solidFill>
+                  <a:srgbClr val="CCCCCC"/>
+                </a:solidFill>
+                <a:latin typeface="Courier New" pitchFamily="34" charset="0"/>
+                <a:ea typeface="Courier New" pitchFamily="34" charset="-122"/>
+                <a:cs typeface="Courier New" pitchFamily="34" charset="-120"/>
+              </a:rPr>
+              <a:t> </a:t>
+            </a:r>
+            <a:pPr indent="0" marL="0">
+              <a:buNone/>
+            </a:pPr>
+            <a:r>
+              <a:rPr lang="en-US" sz="1300" dirty="0">
+                <a:solidFill>
+                  <a:srgbClr val="569CD6"/>
+                </a:solidFill>
+                <a:latin typeface="Courier New" pitchFamily="34" charset="0"/>
+                <a:ea typeface="Courier New" pitchFamily="34" charset="-122"/>
+                <a:cs typeface="Courier New" pitchFamily="34" charset="-120"/>
+              </a:rPr>
+              <a:t>projection</a:t>
             </a:r>
             <a:endParaRPr lang="en-US" sz="1300" dirty="0"/>
           </a:p>
@@ -4016,13 +4455,97 @@
             <a:r>
               <a:rPr lang="en-US" sz="1300" dirty="0">
                 <a:solidFill>
-                  <a:srgbClr val="EAECEE"/>
-                </a:solidFill>
-                <a:latin typeface="Courier New" pitchFamily="34" charset="0"/>
-                <a:ea typeface="Courier New" pitchFamily="34" charset="-122"/>
-                <a:cs typeface="Courier New" pitchFamily="34" charset="-120"/>
-              </a:rPr>
-              <a:t>  on db.Clientes;</a:t>
+                  <a:srgbClr val="CCCCCC"/>
+                </a:solidFill>
+                <a:latin typeface="Courier New" pitchFamily="34" charset="0"/>
+                <a:ea typeface="Courier New" pitchFamily="34" charset="-122"/>
+                <a:cs typeface="Courier New" pitchFamily="34" charset="-120"/>
+              </a:rPr>
+              <a:t>  </a:t>
+            </a:r>
+            <a:pPr indent="0" marL="0">
+              <a:buNone/>
+            </a:pPr>
+            <a:r>
+              <a:rPr lang="en-US" sz="1300" dirty="0">
+                <a:solidFill>
+                  <a:srgbClr val="569CD6"/>
+                </a:solidFill>
+                <a:latin typeface="Courier New" pitchFamily="34" charset="0"/>
+                <a:ea typeface="Courier New" pitchFamily="34" charset="-122"/>
+                <a:cs typeface="Courier New" pitchFamily="34" charset="-120"/>
+              </a:rPr>
+              <a:t>on</a:t>
+            </a:r>
+            <a:pPr indent="0" marL="0">
+              <a:buNone/>
+            </a:pPr>
+            <a:r>
+              <a:rPr lang="en-US" sz="1300" dirty="0">
+                <a:solidFill>
+                  <a:srgbClr val="CCCCCC"/>
+                </a:solidFill>
+                <a:latin typeface="Courier New" pitchFamily="34" charset="0"/>
+                <a:ea typeface="Courier New" pitchFamily="34" charset="-122"/>
+                <a:cs typeface="Courier New" pitchFamily="34" charset="-120"/>
+              </a:rPr>
+              <a:t> </a:t>
+            </a:r>
+            <a:pPr indent="0" marL="0">
+              <a:buNone/>
+            </a:pPr>
+            <a:r>
+              <a:rPr lang="en-US" sz="1300" dirty="0">
+                <a:solidFill>
+                  <a:srgbClr val="9CDCFE"/>
+                </a:solidFill>
+                <a:latin typeface="Courier New" pitchFamily="34" charset="0"/>
+                <a:ea typeface="Courier New" pitchFamily="34" charset="-122"/>
+                <a:cs typeface="Courier New" pitchFamily="34" charset="-120"/>
+              </a:rPr>
+              <a:t>db</a:t>
+            </a:r>
+            <a:pPr indent="0" marL="0">
+              <a:buNone/>
+            </a:pPr>
+            <a:r>
+              <a:rPr lang="en-US" sz="1300" dirty="0">
+                <a:solidFill>
+                  <a:srgbClr val="CCCCCC"/>
+                </a:solidFill>
+                <a:latin typeface="Courier New" pitchFamily="34" charset="0"/>
+                <a:ea typeface="Courier New" pitchFamily="34" charset="-122"/>
+                <a:cs typeface="Courier New" pitchFamily="34" charset="-120"/>
+              </a:rPr>
+              <a:t>.</a:t>
+            </a:r>
+            <a:pPr indent="0" marL="0">
+              <a:buNone/>
+            </a:pPr>
+            <a:r>
+              <a:rPr lang="en-US" sz="1300" dirty="0">
+                <a:solidFill>
+                  <a:srgbClr val="4EC9B0"/>
+                </a:solidFill>
+                <a:latin typeface="Courier New" pitchFamily="34" charset="0"/>
+                <a:ea typeface="Courier New" pitchFamily="34" charset="-122"/>
+                <a:cs typeface="Courier New" pitchFamily="34" charset="-120"/>
+              </a:rPr>
+              <a:t>Clientes</a:t>
+            </a:r>
+            <a:pPr indent="0" marL="0">
+              <a:buNone/>
+            </a:pPr>
+            <a:r>
+              <a:rPr lang="en-US" sz="1300" dirty="0">
+                <a:solidFill>
+                  <a:srgbClr val="CCCCCC"/>
+                </a:solidFill>
+                <a:latin typeface="Courier New" pitchFamily="34" charset="0"/>
+                <a:ea typeface="Courier New" pitchFamily="34" charset="-122"/>
+                <a:cs typeface="Courier New" pitchFamily="34" charset="-120"/>
+              </a:rPr>
+              <a:t>;</a:t>
             </a:r>
             <a:endParaRPr lang="en-US" sz="1300" dirty="0"/>
           </a:p>
@@ -4033,7 +4556,7 @@
             <a:r>
               <a:rPr lang="en-US" sz="1300" dirty="0">
                 <a:solidFill>
-                  <a:srgbClr val="EAECEE"/>
+                  <a:srgbClr val="CCCCCC"/>
                 </a:solidFill>
                 <a:latin typeface="Courier New" pitchFamily="34" charset="0"/>
                 <a:ea typeface="Courier New" pitchFamily="34" charset="-122"/>
@@ -4050,13 +4573,41 @@
             <a:r>
               <a:rPr lang="en-US" sz="1300" dirty="0">
                 <a:solidFill>
-                  <a:srgbClr val="89D1FF"/>
-                </a:solidFill>
-                <a:latin typeface="Courier New" pitchFamily="34" charset="0"/>
-                <a:ea typeface="Courier New" pitchFamily="34" charset="-122"/>
-                <a:cs typeface="Courier New" pitchFamily="34" charset="-120"/>
-              </a:rPr>
-              <a:t>@requires: 'Admin'</a:t>
+                  <a:srgbClr val="DCDCAA"/>
+                </a:solidFill>
+                <a:latin typeface="Courier New" pitchFamily="34" charset="0"/>
+                <a:ea typeface="Courier New" pitchFamily="34" charset="-122"/>
+                <a:cs typeface="Courier New" pitchFamily="34" charset="-120"/>
+              </a:rPr>
+              <a:t>@requires</a:t>
+            </a:r>
+            <a:pPr indent="0" marL="0">
+              <a:buNone/>
+            </a:pPr>
+            <a:r>
+              <a:rPr lang="en-US" sz="1300" dirty="0">
+                <a:solidFill>
+                  <a:srgbClr val="CCCCCC"/>
+                </a:solidFill>
+                <a:latin typeface="Courier New" pitchFamily="34" charset="0"/>
+                <a:ea typeface="Courier New" pitchFamily="34" charset="-122"/>
+                <a:cs typeface="Courier New" pitchFamily="34" charset="-120"/>
+              </a:rPr>
+              <a:t>: </a:t>
+            </a:r>
+            <a:pPr indent="0" marL="0">
+              <a:buNone/>
+            </a:pPr>
+            <a:r>
+              <a:rPr lang="en-US" sz="1300" dirty="0">
+                <a:solidFill>
+                  <a:srgbClr val="CE9178"/>
+                </a:solidFill>
+                <a:latin typeface="Courier New" pitchFamily="34" charset="0"/>
+                <a:ea typeface="Courier New" pitchFamily="34" charset="-122"/>
+                <a:cs typeface="Courier New" pitchFamily="34" charset="-120"/>
+              </a:rPr>
+              <a:t>'Admin'</a:t>
             </a:r>
             <a:endParaRPr lang="en-US" sz="1300" dirty="0"/>
           </a:p>
@@ -4067,13 +4618,97 @@
             <a:r>
               <a:rPr lang="en-US" sz="1300" dirty="0">
                 <a:solidFill>
-                  <a:srgbClr val="EAECEE"/>
-                </a:solidFill>
-                <a:latin typeface="Courier New" pitchFamily="34" charset="0"/>
-                <a:ea typeface="Courier New" pitchFamily="34" charset="-122"/>
-                <a:cs typeface="Courier New" pitchFamily="34" charset="-120"/>
-              </a:rPr>
-              <a:t>action importarPlanilha(...);</a:t>
+                  <a:srgbClr val="569CD6"/>
+                </a:solidFill>
+                <a:latin typeface="Courier New" pitchFamily="34" charset="0"/>
+                <a:ea typeface="Courier New" pitchFamily="34" charset="-122"/>
+                <a:cs typeface="Courier New" pitchFamily="34" charset="-120"/>
+              </a:rPr>
+              <a:t>action</a:t>
+            </a:r>
+            <a:pPr indent="0" marL="0">
+              <a:buNone/>
+            </a:pPr>
+            <a:r>
+              <a:rPr lang="en-US" sz="1300" dirty="0">
+                <a:solidFill>
+                  <a:srgbClr val="CCCCCC"/>
+                </a:solidFill>
+                <a:latin typeface="Courier New" pitchFamily="34" charset="0"/>
+                <a:ea typeface="Courier New" pitchFamily="34" charset="-122"/>
+                <a:cs typeface="Courier New" pitchFamily="34" charset="-120"/>
+              </a:rPr>
+              <a:t> </a:t>
+            </a:r>
+            <a:pPr indent="0" marL="0">
+              <a:buNone/>
+            </a:pPr>
+            <a:r>
+              <a:rPr lang="en-US" sz="1300" dirty="0">
+                <a:solidFill>
+                  <a:srgbClr val="DCDCAA"/>
+                </a:solidFill>
+                <a:latin typeface="Courier New" pitchFamily="34" charset="0"/>
+                <a:ea typeface="Courier New" pitchFamily="34" charset="-122"/>
+                <a:cs typeface="Courier New" pitchFamily="34" charset="-120"/>
+              </a:rPr>
+              <a:t>importarPlanilha</a:t>
+            </a:r>
+            <a:pPr indent="0" marL="0">
+              <a:buNone/>
+            </a:pPr>
+            <a:r>
+              <a:rPr lang="en-US" sz="1300" dirty="0">
+                <a:solidFill>
+                  <a:srgbClr val="FFD700"/>
+                </a:solidFill>
+                <a:latin typeface="Courier New" pitchFamily="34" charset="0"/>
+                <a:ea typeface="Courier New" pitchFamily="34" charset="-122"/>
+                <a:cs typeface="Courier New" pitchFamily="34" charset="-120"/>
+              </a:rPr>
+              <a:t>(</a:t>
+            </a:r>
+            <a:pPr indent="0" marL="0">
+              <a:buNone/>
+            </a:pPr>
+            <a:r>
+              <a:rPr lang="en-US" sz="1300" dirty="0">
+                <a:solidFill>
+                  <a:srgbClr val="CCCCCC"/>
+                </a:solidFill>
+                <a:latin typeface="Courier New" pitchFamily="34" charset="0"/>
+                <a:ea typeface="Courier New" pitchFamily="34" charset="-122"/>
+                <a:cs typeface="Courier New" pitchFamily="34" charset="-120"/>
+              </a:rPr>
+              <a:t>...</a:t>
+            </a:r>
+            <a:pPr indent="0" marL="0">
+              <a:buNone/>
+            </a:pPr>
+            <a:r>
+              <a:rPr lang="en-US" sz="1300" dirty="0">
+                <a:solidFill>
+                  <a:srgbClr val="FFD700"/>
+                </a:solidFill>
+                <a:latin typeface="Courier New" pitchFamily="34" charset="0"/>
+                <a:ea typeface="Courier New" pitchFamily="34" charset="-122"/>
+                <a:cs typeface="Courier New" pitchFamily="34" charset="-120"/>
+              </a:rPr>
+              <a:t>)</a:t>
+            </a:r>
+            <a:pPr indent="0" marL="0">
+              <a:buNone/>
+            </a:pPr>
+            <a:r>
+              <a:rPr lang="en-US" sz="1300" dirty="0">
+                <a:solidFill>
+                  <a:srgbClr val="CCCCCC"/>
+                </a:solidFill>
+                <a:latin typeface="Courier New" pitchFamily="34" charset="0"/>
+                <a:ea typeface="Courier New" pitchFamily="34" charset="-122"/>
+                <a:cs typeface="Courier New" pitchFamily="34" charset="-120"/>
+              </a:rPr>
+              <a:t>;</a:t>
             </a:r>
             <a:endParaRPr lang="en-US" sz="1300" dirty="0"/>
           </a:p>
@@ -5766,9 +6401,14 @@
             </a:avLst>
           </a:prstGeom>
           <a:solidFill>
-            <a:srgbClr val="1D2D3E"/>
+            <a:srgbClr val="1F1F1F"/>
           </a:solidFill>
-          <a:ln/>
+          <a:ln w="9525">
+            <a:solidFill>
+              <a:srgbClr val="2B2B2B"/>
+            </a:solidFill>
+            <a:prstDash val="solid"/>
+          </a:ln>
           <a:effectLst>
             <a:outerShdw sx="100000" sy="100000" kx="0" ky="0" algn="bl" rotWithShape="0" blurRad="101600" dist="25400" dir="5400000">
               <a:srgbClr val="223649">
@@ -5805,13 +6445,55 @@
             <a:r>
               <a:rPr lang="en-US" sz="1300" dirty="0">
                 <a:solidFill>
-                  <a:srgbClr val="EAECEE"/>
-                </a:solidFill>
-                <a:latin typeface="Courier New" pitchFamily="34" charset="0"/>
-                <a:ea typeface="Courier New" pitchFamily="34" charset="-122"/>
-                <a:cs typeface="Courier New" pitchFamily="34" charset="-120"/>
-              </a:rPr>
-              <a:t>$ cd nodejs-padrao     # ou nodejs-typescript</a:t>
+                  <a:srgbClr val="CCCCCC"/>
+                </a:solidFill>
+                <a:latin typeface="Courier New" pitchFamily="34" charset="0"/>
+                <a:ea typeface="Courier New" pitchFamily="34" charset="-122"/>
+                <a:cs typeface="Courier New" pitchFamily="34" charset="-120"/>
+              </a:rPr>
+              <a:t>$ </a:t>
+            </a:r>
+            <a:pPr indent="0" marL="0">
+              <a:buNone/>
+            </a:pPr>
+            <a:r>
+              <a:rPr lang="en-US" sz="1300" dirty="0">
+                <a:solidFill>
+                  <a:srgbClr val="DCDCAA"/>
+                </a:solidFill>
+                <a:latin typeface="Courier New" pitchFamily="34" charset="0"/>
+                <a:ea typeface="Courier New" pitchFamily="34" charset="-122"/>
+                <a:cs typeface="Courier New" pitchFamily="34" charset="-120"/>
+              </a:rPr>
+              <a:t>cd</a:t>
+            </a:r>
+            <a:pPr indent="0" marL="0">
+              <a:buNone/>
+            </a:pPr>
+            <a:r>
+              <a:rPr lang="en-US" sz="1300" dirty="0">
+                <a:solidFill>
+                  <a:srgbClr val="CCCCCC"/>
+                </a:solidFill>
+                <a:latin typeface="Courier New" pitchFamily="34" charset="0"/>
+                <a:ea typeface="Courier New" pitchFamily="34" charset="-122"/>
+                <a:cs typeface="Courier New" pitchFamily="34" charset="-120"/>
+              </a:rPr>
+              <a:t> nodejs-padrao     </a:t>
+            </a:r>
+            <a:pPr indent="0" marL="0">
+              <a:buNone/>
+            </a:pPr>
+            <a:r>
+              <a:rPr lang="en-US" sz="1300" dirty="0">
+                <a:solidFill>
+                  <a:srgbClr val="6A9955"/>
+                </a:solidFill>
+                <a:latin typeface="Courier New" pitchFamily="34" charset="0"/>
+                <a:ea typeface="Courier New" pitchFamily="34" charset="-122"/>
+                <a:cs typeface="Courier New" pitchFamily="34" charset="-120"/>
+              </a:rPr>
+              <a:t># ou nodejs-typescript</a:t>
             </a:r>
             <a:endParaRPr lang="en-US" sz="1300" dirty="0"/>
           </a:p>
@@ -5822,13 +6504,41 @@
             <a:r>
               <a:rPr lang="en-US" sz="1300" dirty="0">
                 <a:solidFill>
-                  <a:srgbClr val="EAECEE"/>
-                </a:solidFill>
-                <a:latin typeface="Courier New" pitchFamily="34" charset="0"/>
-                <a:ea typeface="Courier New" pitchFamily="34" charset="-122"/>
-                <a:cs typeface="Courier New" pitchFamily="34" charset="-120"/>
-              </a:rPr>
-              <a:t>$ npm install</a:t>
+                  <a:srgbClr val="CCCCCC"/>
+                </a:solidFill>
+                <a:latin typeface="Courier New" pitchFamily="34" charset="0"/>
+                <a:ea typeface="Courier New" pitchFamily="34" charset="-122"/>
+                <a:cs typeface="Courier New" pitchFamily="34" charset="-120"/>
+              </a:rPr>
+              <a:t>$ </a:t>
+            </a:r>
+            <a:pPr indent="0" marL="0">
+              <a:buNone/>
+            </a:pPr>
+            <a:r>
+              <a:rPr lang="en-US" sz="1300" dirty="0">
+                <a:solidFill>
+                  <a:srgbClr val="DCDCAA"/>
+                </a:solidFill>
+                <a:latin typeface="Courier New" pitchFamily="34" charset="0"/>
+                <a:ea typeface="Courier New" pitchFamily="34" charset="-122"/>
+                <a:cs typeface="Courier New" pitchFamily="34" charset="-120"/>
+              </a:rPr>
+              <a:t>npm</a:t>
+            </a:r>
+            <a:pPr indent="0" marL="0">
+              <a:buNone/>
+            </a:pPr>
+            <a:r>
+              <a:rPr lang="en-US" sz="1300" dirty="0">
+                <a:solidFill>
+                  <a:srgbClr val="CCCCCC"/>
+                </a:solidFill>
+                <a:latin typeface="Courier New" pitchFamily="34" charset="0"/>
+                <a:ea typeface="Courier New" pitchFamily="34" charset="-122"/>
+                <a:cs typeface="Courier New" pitchFamily="34" charset="-120"/>
+              </a:rPr>
+              <a:t> install</a:t>
             </a:r>
             <a:endParaRPr lang="en-US" sz="1300" dirty="0"/>
           </a:p>
@@ -5839,13 +6549,41 @@
             <a:r>
               <a:rPr lang="en-US" sz="1300" dirty="0">
                 <a:solidFill>
-                  <a:srgbClr val="EAECEE"/>
-                </a:solidFill>
-                <a:latin typeface="Courier New" pitchFamily="34" charset="0"/>
-                <a:ea typeface="Courier New" pitchFamily="34" charset="-122"/>
-                <a:cs typeface="Courier New" pitchFamily="34" charset="-120"/>
-              </a:rPr>
-              <a:t>$ npm run watch</a:t>
+                  <a:srgbClr val="CCCCCC"/>
+                </a:solidFill>
+                <a:latin typeface="Courier New" pitchFamily="34" charset="0"/>
+                <a:ea typeface="Courier New" pitchFamily="34" charset="-122"/>
+                <a:cs typeface="Courier New" pitchFamily="34" charset="-120"/>
+              </a:rPr>
+              <a:t>$ </a:t>
+            </a:r>
+            <a:pPr indent="0" marL="0">
+              <a:buNone/>
+            </a:pPr>
+            <a:r>
+              <a:rPr lang="en-US" sz="1300" dirty="0">
+                <a:solidFill>
+                  <a:srgbClr val="DCDCAA"/>
+                </a:solidFill>
+                <a:latin typeface="Courier New" pitchFamily="34" charset="0"/>
+                <a:ea typeface="Courier New" pitchFamily="34" charset="-122"/>
+                <a:cs typeface="Courier New" pitchFamily="34" charset="-120"/>
+              </a:rPr>
+              <a:t>npm</a:t>
+            </a:r>
+            <a:pPr indent="0" marL="0">
+              <a:buNone/>
+            </a:pPr>
+            <a:r>
+              <a:rPr lang="en-US" sz="1300" dirty="0">
+                <a:solidFill>
+                  <a:srgbClr val="CCCCCC"/>
+                </a:solidFill>
+                <a:latin typeface="Courier New" pitchFamily="34" charset="0"/>
+                <a:ea typeface="Courier New" pitchFamily="34" charset="-122"/>
+                <a:cs typeface="Courier New" pitchFamily="34" charset="-120"/>
+              </a:rPr>
+              <a:t> run watch</a:t>
             </a:r>
             <a:endParaRPr lang="en-US" sz="1300" dirty="0"/>
           </a:p>
@@ -5856,7 +6594,7 @@
             <a:r>
               <a:rPr lang="en-US" sz="1300" dirty="0">
                 <a:solidFill>
-                  <a:srgbClr val="EAECEE"/>
+                  <a:srgbClr val="CCCCCC"/>
                 </a:solidFill>
                 <a:latin typeface="Courier New" pitchFamily="34" charset="0"/>
                 <a:ea typeface="Courier New" pitchFamily="34" charset="-122"/>
@@ -5873,7 +6611,7 @@
             <a:r>
               <a:rPr lang="en-US" sz="1300" dirty="0">
                 <a:solidFill>
-                  <a:srgbClr val="EAECEE"/>
+                  <a:srgbClr val="CCCCCC"/>
                 </a:solidFill>
                 <a:latin typeface="Courier New" pitchFamily="34" charset="0"/>
                 <a:ea typeface="Courier New" pitchFamily="34" charset="-122"/>
@@ -5890,7 +6628,7 @@
             <a:r>
               <a:rPr lang="en-US" sz="1300" dirty="0">
                 <a:solidFill>
-                  <a:srgbClr val="EAECEE"/>
+                  <a:srgbClr val="CCCCCC"/>
                 </a:solidFill>
                 <a:latin typeface="Courier New" pitchFamily="34" charset="0"/>
                 <a:ea typeface="Courier New" pitchFamily="34" charset="-122"/>
@@ -5907,7 +6645,7 @@
             <a:r>
               <a:rPr lang="en-US" sz="1300" dirty="0">
                 <a:solidFill>
-                  <a:srgbClr val="EAECEE"/>
+                  <a:srgbClr val="CCCCCC"/>
                 </a:solidFill>
                 <a:latin typeface="Courier New" pitchFamily="34" charset="0"/>
                 <a:ea typeface="Courier New" pitchFamily="34" charset="-122"/>
@@ -5924,13 +6662,55 @@
             <a:r>
               <a:rPr lang="en-US" sz="1300" dirty="0">
                 <a:solidFill>
-                  <a:srgbClr val="EAECEE"/>
-                </a:solidFill>
-                <a:latin typeface="Courier New" pitchFamily="34" charset="0"/>
-                <a:ea typeface="Courier New" pitchFamily="34" charset="-122"/>
-                <a:cs typeface="Courier New" pitchFamily="34" charset="-120"/>
-              </a:rPr>
-              <a:t>$ npm run https       # proxy 8443 -&gt; 4004</a:t>
+                  <a:srgbClr val="CCCCCC"/>
+                </a:solidFill>
+                <a:latin typeface="Courier New" pitchFamily="34" charset="0"/>
+                <a:ea typeface="Courier New" pitchFamily="34" charset="-122"/>
+                <a:cs typeface="Courier New" pitchFamily="34" charset="-120"/>
+              </a:rPr>
+              <a:t>$ </a:t>
+            </a:r>
+            <a:pPr indent="0" marL="0">
+              <a:buNone/>
+            </a:pPr>
+            <a:r>
+              <a:rPr lang="en-US" sz="1300" dirty="0">
+                <a:solidFill>
+                  <a:srgbClr val="DCDCAA"/>
+                </a:solidFill>
+                <a:latin typeface="Courier New" pitchFamily="34" charset="0"/>
+                <a:ea typeface="Courier New" pitchFamily="34" charset="-122"/>
+                <a:cs typeface="Courier New" pitchFamily="34" charset="-120"/>
+              </a:rPr>
+              <a:t>npm</a:t>
+            </a:r>
+            <a:pPr indent="0" marL="0">
+              <a:buNone/>
+            </a:pPr>
+            <a:r>
+              <a:rPr lang="en-US" sz="1300" dirty="0">
+                <a:solidFill>
+                  <a:srgbClr val="CCCCCC"/>
+                </a:solidFill>
+                <a:latin typeface="Courier New" pitchFamily="34" charset="0"/>
+                <a:ea typeface="Courier New" pitchFamily="34" charset="-122"/>
+                <a:cs typeface="Courier New" pitchFamily="34" charset="-120"/>
+              </a:rPr>
+              <a:t> run https       </a:t>
+            </a:r>
+            <a:pPr indent="0" marL="0">
+              <a:buNone/>
+            </a:pPr>
+            <a:r>
+              <a:rPr lang="en-US" sz="1300" dirty="0">
+                <a:solidFill>
+                  <a:srgbClr val="6A9955"/>
+                </a:solidFill>
+                <a:latin typeface="Courier New" pitchFamily="34" charset="0"/>
+                <a:ea typeface="Courier New" pitchFamily="34" charset="-122"/>
+                <a:cs typeface="Courier New" pitchFamily="34" charset="-120"/>
+              </a:rPr>
+              <a:t># proxy 8443 -&gt; 4004</a:t>
             </a:r>
             <a:endParaRPr lang="en-US" sz="1300" dirty="0"/>
           </a:p>
@@ -5953,9 +6733,14 @@
             </a:avLst>
           </a:prstGeom>
           <a:solidFill>
-            <a:srgbClr val="1D2D3E"/>
+            <a:srgbClr val="1F1F1F"/>
           </a:solidFill>
-          <a:ln/>
+          <a:ln w="9525">
+            <a:solidFill>
+              <a:srgbClr val="2B2B2B"/>
+            </a:solidFill>
+            <a:prstDash val="solid"/>
+          </a:ln>
           <a:effectLst>
             <a:outerShdw sx="100000" sy="100000" kx="0" ky="0" algn="bl" rotWithShape="0" blurRad="101600" dist="25400" dir="5400000">
               <a:srgbClr val="223649">
@@ -5992,13 +6777,41 @@
             <a:r>
               <a:rPr lang="en-US" sz="1300" dirty="0">
                 <a:solidFill>
-                  <a:srgbClr val="EAECEE"/>
-                </a:solidFill>
-                <a:latin typeface="Courier New" pitchFamily="34" charset="0"/>
-                <a:ea typeface="Courier New" pitchFamily="34" charset="-122"/>
-                <a:cs typeface="Courier New" pitchFamily="34" charset="-120"/>
-              </a:rPr>
-              <a:t>GET  /odata/v4/pedidos/$metadata</a:t>
+                  <a:srgbClr val="569CD6"/>
+                </a:solidFill>
+                <a:latin typeface="Courier New" pitchFamily="34" charset="0"/>
+                <a:ea typeface="Courier New" pitchFamily="34" charset="-122"/>
+                <a:cs typeface="Courier New" pitchFamily="34" charset="-120"/>
+              </a:rPr>
+              <a:t>GET</a:t>
+            </a:r>
+            <a:pPr indent="0" marL="0">
+              <a:buNone/>
+            </a:pPr>
+            <a:r>
+              <a:rPr lang="en-US" sz="1300" dirty="0">
+                <a:solidFill>
+                  <a:srgbClr val="CCCCCC"/>
+                </a:solidFill>
+                <a:latin typeface="Courier New" pitchFamily="34" charset="0"/>
+                <a:ea typeface="Courier New" pitchFamily="34" charset="-122"/>
+                <a:cs typeface="Courier New" pitchFamily="34" charset="-120"/>
+              </a:rPr>
+              <a:t>  /odata/v4/pedidos/</a:t>
+            </a:r>
+            <a:pPr indent="0" marL="0">
+              <a:buNone/>
+            </a:pPr>
+            <a:r>
+              <a:rPr lang="en-US" sz="1300" dirty="0">
+                <a:solidFill>
+                  <a:srgbClr val="9CDCFE"/>
+                </a:solidFill>
+                <a:latin typeface="Courier New" pitchFamily="34" charset="0"/>
+                <a:ea typeface="Courier New" pitchFamily="34" charset="-122"/>
+                <a:cs typeface="Courier New" pitchFamily="34" charset="-120"/>
+              </a:rPr>
+              <a:t>$metadata</a:t>
             </a:r>
             <a:endParaRPr lang="en-US" sz="1300" dirty="0"/>
           </a:p>
@@ -6009,13 +6822,27 @@
             <a:r>
               <a:rPr lang="en-US" sz="1300" dirty="0">
                 <a:solidFill>
-                  <a:srgbClr val="EAECEE"/>
-                </a:solidFill>
-                <a:latin typeface="Courier New" pitchFamily="34" charset="0"/>
-                <a:ea typeface="Courier New" pitchFamily="34" charset="-122"/>
-                <a:cs typeface="Courier New" pitchFamily="34" charset="-120"/>
-              </a:rPr>
-              <a:t>GET  /odata/v4/pedidos/Pedidos</a:t>
+                  <a:srgbClr val="569CD6"/>
+                </a:solidFill>
+                <a:latin typeface="Courier New" pitchFamily="34" charset="0"/>
+                <a:ea typeface="Courier New" pitchFamily="34" charset="-122"/>
+                <a:cs typeface="Courier New" pitchFamily="34" charset="-120"/>
+              </a:rPr>
+              <a:t>GET</a:t>
+            </a:r>
+            <a:pPr indent="0" marL="0">
+              <a:buNone/>
+            </a:pPr>
+            <a:r>
+              <a:rPr lang="en-US" sz="1300" dirty="0">
+                <a:solidFill>
+                  <a:srgbClr val="CCCCCC"/>
+                </a:solidFill>
+                <a:latin typeface="Courier New" pitchFamily="34" charset="0"/>
+                <a:ea typeface="Courier New" pitchFamily="34" charset="-122"/>
+                <a:cs typeface="Courier New" pitchFamily="34" charset="-120"/>
+              </a:rPr>
+              <a:t>  /odata/v4/pedidos/Pedidos</a:t>
             </a:r>
             <a:endParaRPr lang="en-US" sz="1300" dirty="0"/>
           </a:p>
@@ -6026,13 +6853,41 @@
             <a:r>
               <a:rPr lang="en-US" sz="1300" dirty="0">
                 <a:solidFill>
-                  <a:srgbClr val="EAECEE"/>
-                </a:solidFill>
-                <a:latin typeface="Courier New" pitchFamily="34" charset="0"/>
-                <a:ea typeface="Courier New" pitchFamily="34" charset="-122"/>
-                <a:cs typeface="Courier New" pitchFamily="34" charset="-120"/>
-              </a:rPr>
-              <a:t>       ?$expand=itens,pagamento</a:t>
+                  <a:srgbClr val="CCCCCC"/>
+                </a:solidFill>
+                <a:latin typeface="Courier New" pitchFamily="34" charset="0"/>
+                <a:ea typeface="Courier New" pitchFamily="34" charset="-122"/>
+                <a:cs typeface="Courier New" pitchFamily="34" charset="-120"/>
+              </a:rPr>
+              <a:t>       ?</a:t>
+            </a:r>
+            <a:pPr indent="0" marL="0">
+              <a:buNone/>
+            </a:pPr>
+            <a:r>
+              <a:rPr lang="en-US" sz="1300" dirty="0">
+                <a:solidFill>
+                  <a:srgbClr val="9CDCFE"/>
+                </a:solidFill>
+                <a:latin typeface="Courier New" pitchFamily="34" charset="0"/>
+                <a:ea typeface="Courier New" pitchFamily="34" charset="-122"/>
+                <a:cs typeface="Courier New" pitchFamily="34" charset="-120"/>
+              </a:rPr>
+              <a:t>$expand</a:t>
+            </a:r>
+            <a:pPr indent="0" marL="0">
+              <a:buNone/>
+            </a:pPr>
+            <a:r>
+              <a:rPr lang="en-US" sz="1300" dirty="0">
+                <a:solidFill>
+                  <a:srgbClr val="CCCCCC"/>
+                </a:solidFill>
+                <a:latin typeface="Courier New" pitchFamily="34" charset="0"/>
+                <a:ea typeface="Courier New" pitchFamily="34" charset="-122"/>
+                <a:cs typeface="Courier New" pitchFamily="34" charset="-120"/>
+              </a:rPr>
+              <a:t>=itens,pagamento</a:t>
             </a:r>
             <a:endParaRPr lang="en-US" sz="1300" dirty="0"/>
           </a:p>
@@ -6043,13 +6898,27 @@
             <a:r>
               <a:rPr lang="en-US" sz="1300" dirty="0">
                 <a:solidFill>
-                  <a:srgbClr val="EAECEE"/>
-                </a:solidFill>
-                <a:latin typeface="Courier New" pitchFamily="34" charset="0"/>
-                <a:ea typeface="Courier New" pitchFamily="34" charset="-122"/>
-                <a:cs typeface="Courier New" pitchFamily="34" charset="-120"/>
-              </a:rPr>
-              <a:t>POST /odata/v4/pedidos/Pedidos(ID=...,</a:t>
+                  <a:srgbClr val="569CD6"/>
+                </a:solidFill>
+                <a:latin typeface="Courier New" pitchFamily="34" charset="0"/>
+                <a:ea typeface="Courier New" pitchFamily="34" charset="-122"/>
+                <a:cs typeface="Courier New" pitchFamily="34" charset="-120"/>
+              </a:rPr>
+              <a:t>POST</a:t>
+            </a:r>
+            <a:pPr indent="0" marL="0">
+              <a:buNone/>
+            </a:pPr>
+            <a:r>
+              <a:rPr lang="en-US" sz="1300" dirty="0">
+                <a:solidFill>
+                  <a:srgbClr val="CCCCCC"/>
+                </a:solidFill>
+                <a:latin typeface="Courier New" pitchFamily="34" charset="0"/>
+                <a:ea typeface="Courier New" pitchFamily="34" charset="-122"/>
+                <a:cs typeface="Courier New" pitchFamily="34" charset="-120"/>
+              </a:rPr>
+              <a:t> /odata/v4/pedidos/Pedidos(ID=...,</a:t>
             </a:r>
             <a:endParaRPr lang="en-US" sz="1300" dirty="0"/>
           </a:p>
@@ -6060,7 +6929,7 @@
             <a:r>
               <a:rPr lang="en-US" sz="1300" dirty="0">
                 <a:solidFill>
-                  <a:srgbClr val="EAECEE"/>
+                  <a:srgbClr val="CCCCCC"/>
                 </a:solidFill>
                 <a:latin typeface="Courier New" pitchFamily="34" charset="0"/>
                 <a:ea typeface="Courier New" pitchFamily="34" charset="-122"/>
@@ -6077,7 +6946,7 @@
             <a:r>
               <a:rPr lang="en-US" sz="1300" dirty="0">
                 <a:solidFill>
-                  <a:srgbClr val="EAECEE"/>
+                  <a:srgbClr val="CCCCCC"/>
                 </a:solidFill>
                 <a:latin typeface="Courier New" pitchFamily="34" charset="0"/>
                 <a:ea typeface="Courier New" pitchFamily="34" charset="-122"/>
@@ -6094,13 +6963,41 @@
             <a:r>
               <a:rPr lang="en-US" sz="1300" dirty="0">
                 <a:solidFill>
-                  <a:srgbClr val="EAECEE"/>
-                </a:solidFill>
-                <a:latin typeface="Courier New" pitchFamily="34" charset="0"/>
-                <a:ea typeface="Courier New" pitchFamily="34" charset="-122"/>
-                <a:cs typeface="Courier New" pitchFamily="34" charset="-120"/>
-              </a:rPr>
-              <a:t>GET  /launchpad.html   # 8 tiles</a:t>
+                  <a:srgbClr val="569CD6"/>
+                </a:solidFill>
+                <a:latin typeface="Courier New" pitchFamily="34" charset="0"/>
+                <a:ea typeface="Courier New" pitchFamily="34" charset="-122"/>
+                <a:cs typeface="Courier New" pitchFamily="34" charset="-120"/>
+              </a:rPr>
+              <a:t>GET</a:t>
+            </a:r>
+            <a:pPr indent="0" marL="0">
+              <a:buNone/>
+            </a:pPr>
+            <a:r>
+              <a:rPr lang="en-US" sz="1300" dirty="0">
+                <a:solidFill>
+                  <a:srgbClr val="CCCCCC"/>
+                </a:solidFill>
+                <a:latin typeface="Courier New" pitchFamily="34" charset="0"/>
+                <a:ea typeface="Courier New" pitchFamily="34" charset="-122"/>
+                <a:cs typeface="Courier New" pitchFamily="34" charset="-120"/>
+              </a:rPr>
+              <a:t>  /launchpad.html   </a:t>
+            </a:r>
+            <a:pPr indent="0" marL="0">
+              <a:buNone/>
+            </a:pPr>
+            <a:r>
+              <a:rPr lang="en-US" sz="1300" dirty="0">
+                <a:solidFill>
+                  <a:srgbClr val="6A9955"/>
+                </a:solidFill>
+                <a:latin typeface="Courier New" pitchFamily="34" charset="0"/>
+                <a:ea typeface="Courier New" pitchFamily="34" charset="-122"/>
+                <a:cs typeface="Courier New" pitchFamily="34" charset="-120"/>
+              </a:rPr>
+              <a:t># 8 tiles</a:t>
             </a:r>
             <a:endParaRPr lang="en-US" sz="1300" dirty="0"/>
           </a:p>
@@ -10575,9 +11472,14 @@
             </a:avLst>
           </a:prstGeom>
           <a:solidFill>
-            <a:srgbClr val="1D2D3E"/>
+            <a:srgbClr val="1F1F1F"/>
           </a:solidFill>
-          <a:ln/>
+          <a:ln w="9525">
+            <a:solidFill>
+              <a:srgbClr val="2B2B2B"/>
+            </a:solidFill>
+            <a:prstDash val="solid"/>
+          </a:ln>
           <a:effectLst>
             <a:outerShdw sx="100000" sy="100000" kx="0" ky="0" algn="bl" rotWithShape="0" blurRad="101600" dist="25400" dir="5400000">
               <a:srgbClr val="223649">
@@ -10614,13 +11516,223 @@
             <a:r>
               <a:rPr lang="en-US" sz="1300" dirty="0">
                 <a:solidFill>
-                  <a:srgbClr val="EAECEE"/>
-                </a:solidFill>
-                <a:latin typeface="Courier New" pitchFamily="34" charset="0"/>
-                <a:ea typeface="Courier New" pitchFamily="34" charset="-122"/>
-                <a:cs typeface="Courier New" pitchFamily="34" charset="-120"/>
-              </a:rPr>
-              <a:t>using { pedidoscompras as db } from '../db/schema';</a:t>
+                  <a:srgbClr val="C586C0"/>
+                </a:solidFill>
+                <a:latin typeface="Courier New" pitchFamily="34" charset="0"/>
+                <a:ea typeface="Courier New" pitchFamily="34" charset="-122"/>
+                <a:cs typeface="Courier New" pitchFamily="34" charset="-120"/>
+              </a:rPr>
+              <a:t>using</a:t>
+            </a:r>
+            <a:pPr indent="0" marL="0">
+              <a:buNone/>
+            </a:pPr>
+            <a:r>
+              <a:rPr lang="en-US" sz="1300" dirty="0">
+                <a:solidFill>
+                  <a:srgbClr val="CCCCCC"/>
+                </a:solidFill>
+                <a:latin typeface="Courier New" pitchFamily="34" charset="0"/>
+                <a:ea typeface="Courier New" pitchFamily="34" charset="-122"/>
+                <a:cs typeface="Courier New" pitchFamily="34" charset="-120"/>
+              </a:rPr>
+              <a:t> </a:t>
+            </a:r>
+            <a:pPr indent="0" marL="0">
+              <a:buNone/>
+            </a:pPr>
+            <a:r>
+              <a:rPr lang="en-US" sz="1300" dirty="0">
+                <a:solidFill>
+                  <a:srgbClr val="FFD700"/>
+                </a:solidFill>
+                <a:latin typeface="Courier New" pitchFamily="34" charset="0"/>
+                <a:ea typeface="Courier New" pitchFamily="34" charset="-122"/>
+                <a:cs typeface="Courier New" pitchFamily="34" charset="-120"/>
+              </a:rPr>
+              <a:t>{</a:t>
+            </a:r>
+            <a:pPr indent="0" marL="0">
+              <a:buNone/>
+            </a:pPr>
+            <a:r>
+              <a:rPr lang="en-US" sz="1300" dirty="0">
+                <a:solidFill>
+                  <a:srgbClr val="CCCCCC"/>
+                </a:solidFill>
+                <a:latin typeface="Courier New" pitchFamily="34" charset="0"/>
+                <a:ea typeface="Courier New" pitchFamily="34" charset="-122"/>
+                <a:cs typeface="Courier New" pitchFamily="34" charset="-120"/>
+              </a:rPr>
+              <a:t> </a:t>
+            </a:r>
+            <a:pPr indent="0" marL="0">
+              <a:buNone/>
+            </a:pPr>
+            <a:r>
+              <a:rPr lang="en-US" sz="1300" dirty="0">
+                <a:solidFill>
+                  <a:srgbClr val="9CDCFE"/>
+                </a:solidFill>
+                <a:latin typeface="Courier New" pitchFamily="34" charset="0"/>
+                <a:ea typeface="Courier New" pitchFamily="34" charset="-122"/>
+                <a:cs typeface="Courier New" pitchFamily="34" charset="-120"/>
+              </a:rPr>
+              <a:t>pedidoscompras</a:t>
+            </a:r>
+            <a:pPr indent="0" marL="0">
+              <a:buNone/>
+            </a:pPr>
+            <a:r>
+              <a:rPr lang="en-US" sz="1300" dirty="0">
+                <a:solidFill>
+                  <a:srgbClr val="CCCCCC"/>
+                </a:solidFill>
+                <a:latin typeface="Courier New" pitchFamily="34" charset="0"/>
+                <a:ea typeface="Courier New" pitchFamily="34" charset="-122"/>
+                <a:cs typeface="Courier New" pitchFamily="34" charset="-120"/>
+              </a:rPr>
+              <a:t> </a:t>
+            </a:r>
+            <a:pPr indent="0" marL="0">
+              <a:buNone/>
+            </a:pPr>
+            <a:r>
+              <a:rPr lang="en-US" sz="1300" dirty="0">
+                <a:solidFill>
+                  <a:srgbClr val="569CD6"/>
+                </a:solidFill>
+                <a:latin typeface="Courier New" pitchFamily="34" charset="0"/>
+                <a:ea typeface="Courier New" pitchFamily="34" charset="-122"/>
+                <a:cs typeface="Courier New" pitchFamily="34" charset="-120"/>
+              </a:rPr>
+              <a:t>as</a:t>
+            </a:r>
+            <a:pPr indent="0" marL="0">
+              <a:buNone/>
+            </a:pPr>
+            <a:r>
+              <a:rPr lang="en-US" sz="1300" dirty="0">
+                <a:solidFill>
+                  <a:srgbClr val="CCCCCC"/>
+                </a:solidFill>
+                <a:latin typeface="Courier New" pitchFamily="34" charset="0"/>
+                <a:ea typeface="Courier New" pitchFamily="34" charset="-122"/>
+                <a:cs typeface="Courier New" pitchFamily="34" charset="-120"/>
+              </a:rPr>
+              <a:t> </a:t>
+            </a:r>
+            <a:pPr indent="0" marL="0">
+              <a:buNone/>
+            </a:pPr>
+            <a:r>
+              <a:rPr lang="en-US" sz="1300" dirty="0">
+                <a:solidFill>
+                  <a:srgbClr val="9CDCFE"/>
+                </a:solidFill>
+                <a:latin typeface="Courier New" pitchFamily="34" charset="0"/>
+                <a:ea typeface="Courier New" pitchFamily="34" charset="-122"/>
+                <a:cs typeface="Courier New" pitchFamily="34" charset="-120"/>
+              </a:rPr>
+              <a:t>db</a:t>
+            </a:r>
+            <a:pPr indent="0" marL="0">
+              <a:buNone/>
+            </a:pPr>
+            <a:r>
+              <a:rPr lang="en-US" sz="1300" dirty="0">
+                <a:solidFill>
+                  <a:srgbClr val="CCCCCC"/>
+                </a:solidFill>
+                <a:latin typeface="Courier New" pitchFamily="34" charset="0"/>
+                <a:ea typeface="Courier New" pitchFamily="34" charset="-122"/>
+                <a:cs typeface="Courier New" pitchFamily="34" charset="-120"/>
+              </a:rPr>
+              <a:t> </a:t>
+            </a:r>
+            <a:pPr indent="0" marL="0">
+              <a:buNone/>
+            </a:pPr>
+            <a:r>
+              <a:rPr lang="en-US" sz="1300" dirty="0">
+                <a:solidFill>
+                  <a:srgbClr val="FFD700"/>
+                </a:solidFill>
+                <a:latin typeface="Courier New" pitchFamily="34" charset="0"/>
+                <a:ea typeface="Courier New" pitchFamily="34" charset="-122"/>
+                <a:cs typeface="Courier New" pitchFamily="34" charset="-120"/>
+              </a:rPr>
+              <a:t>}</a:t>
+            </a:r>
+            <a:pPr indent="0" marL="0">
+              <a:buNone/>
+            </a:pPr>
+            <a:r>
+              <a:rPr lang="en-US" sz="1300" dirty="0">
+                <a:solidFill>
+                  <a:srgbClr val="CCCCCC"/>
+                </a:solidFill>
+                <a:latin typeface="Courier New" pitchFamily="34" charset="0"/>
+                <a:ea typeface="Courier New" pitchFamily="34" charset="-122"/>
+                <a:cs typeface="Courier New" pitchFamily="34" charset="-120"/>
+              </a:rPr>
+              <a:t> </a:t>
+            </a:r>
+            <a:pPr indent="0" marL="0">
+              <a:buNone/>
+            </a:pPr>
+            <a:r>
+              <a:rPr lang="en-US" sz="1300" dirty="0">
+                <a:solidFill>
+                  <a:srgbClr val="C586C0"/>
+                </a:solidFill>
+                <a:latin typeface="Courier New" pitchFamily="34" charset="0"/>
+                <a:ea typeface="Courier New" pitchFamily="34" charset="-122"/>
+                <a:cs typeface="Courier New" pitchFamily="34" charset="-120"/>
+              </a:rPr>
+              <a:t>from</a:t>
+            </a:r>
+            <a:pPr indent="0" marL="0">
+              <a:buNone/>
+            </a:pPr>
+            <a:r>
+              <a:rPr lang="en-US" sz="1300" dirty="0">
+                <a:solidFill>
+                  <a:srgbClr val="CCCCCC"/>
+                </a:solidFill>
+                <a:latin typeface="Courier New" pitchFamily="34" charset="0"/>
+                <a:ea typeface="Courier New" pitchFamily="34" charset="-122"/>
+                <a:cs typeface="Courier New" pitchFamily="34" charset="-120"/>
+              </a:rPr>
+              <a:t> </a:t>
+            </a:r>
+            <a:pPr indent="0" marL="0">
+              <a:buNone/>
+            </a:pPr>
+            <a:r>
+              <a:rPr lang="en-US" sz="1300" dirty="0">
+                <a:solidFill>
+                  <a:srgbClr val="CE9178"/>
+                </a:solidFill>
+                <a:latin typeface="Courier New" pitchFamily="34" charset="0"/>
+                <a:ea typeface="Courier New" pitchFamily="34" charset="-122"/>
+                <a:cs typeface="Courier New" pitchFamily="34" charset="-120"/>
+              </a:rPr>
+              <a:t>'../db/schema'</a:t>
+            </a:r>
+            <a:pPr indent="0" marL="0">
+              <a:buNone/>
+            </a:pPr>
+            <a:r>
+              <a:rPr lang="en-US" sz="1300" dirty="0">
+                <a:solidFill>
+                  <a:srgbClr val="CCCCCC"/>
+                </a:solidFill>
+                <a:latin typeface="Courier New" pitchFamily="34" charset="0"/>
+                <a:ea typeface="Courier New" pitchFamily="34" charset="-122"/>
+                <a:cs typeface="Courier New" pitchFamily="34" charset="-120"/>
+              </a:rPr>
+              <a:t>;</a:t>
             </a:r>
             <a:endParaRPr lang="en-US" sz="1300" dirty="0"/>
           </a:p>
@@ -10631,7 +11743,7 @@
             <a:r>
               <a:rPr lang="en-US" sz="1300" dirty="0">
                 <a:solidFill>
-                  <a:srgbClr val="EAECEE"/>
+                  <a:srgbClr val="CCCCCC"/>
                 </a:solidFill>
                 <a:latin typeface="Courier New" pitchFamily="34" charset="0"/>
                 <a:ea typeface="Courier New" pitchFamily="34" charset="-122"/>
@@ -10648,13 +11760,41 @@
             <a:r>
               <a:rPr lang="en-US" sz="1300" dirty="0">
                 <a:solidFill>
-                  <a:srgbClr val="89D1FF"/>
-                </a:solidFill>
-                <a:latin typeface="Courier New" pitchFamily="34" charset="0"/>
-                <a:ea typeface="Courier New" pitchFamily="34" charset="-122"/>
-                <a:cs typeface="Courier New" pitchFamily="34" charset="-120"/>
-              </a:rPr>
-              <a:t>@path    : 'pedidos'</a:t>
+                  <a:srgbClr val="DCDCAA"/>
+                </a:solidFill>
+                <a:latin typeface="Courier New" pitchFamily="34" charset="0"/>
+                <a:ea typeface="Courier New" pitchFamily="34" charset="-122"/>
+                <a:cs typeface="Courier New" pitchFamily="34" charset="-120"/>
+              </a:rPr>
+              <a:t>@path</a:t>
+            </a:r>
+            <a:pPr indent="0" marL="0">
+              <a:buNone/>
+            </a:pPr>
+            <a:r>
+              <a:rPr lang="en-US" sz="1300" dirty="0">
+                <a:solidFill>
+                  <a:srgbClr val="CCCCCC"/>
+                </a:solidFill>
+                <a:latin typeface="Courier New" pitchFamily="34" charset="0"/>
+                <a:ea typeface="Courier New" pitchFamily="34" charset="-122"/>
+                <a:cs typeface="Courier New" pitchFamily="34" charset="-120"/>
+              </a:rPr>
+              <a:t>    : </a:t>
+            </a:r>
+            <a:pPr indent="0" marL="0">
+              <a:buNone/>
+            </a:pPr>
+            <a:r>
+              <a:rPr lang="en-US" sz="1300" dirty="0">
+                <a:solidFill>
+                  <a:srgbClr val="CE9178"/>
+                </a:solidFill>
+                <a:latin typeface="Courier New" pitchFamily="34" charset="0"/>
+                <a:ea typeface="Courier New" pitchFamily="34" charset="-122"/>
+                <a:cs typeface="Courier New" pitchFamily="34" charset="-120"/>
+              </a:rPr>
+              <a:t>'pedidos'</a:t>
             </a:r>
             <a:endParaRPr lang="en-US" sz="1300" dirty="0"/>
           </a:p>
@@ -10665,13 +11805,41 @@
             <a:r>
               <a:rPr lang="en-US" sz="1300" dirty="0">
                 <a:solidFill>
-                  <a:srgbClr val="89D1FF"/>
-                </a:solidFill>
-                <a:latin typeface="Courier New" pitchFamily="34" charset="0"/>
-                <a:ea typeface="Courier New" pitchFamily="34" charset="-122"/>
-                <a:cs typeface="Courier New" pitchFamily="34" charset="-120"/>
-              </a:rPr>
-              <a:t>@requires: 'authenticated-user'</a:t>
+                  <a:srgbClr val="DCDCAA"/>
+                </a:solidFill>
+                <a:latin typeface="Courier New" pitchFamily="34" charset="0"/>
+                <a:ea typeface="Courier New" pitchFamily="34" charset="-122"/>
+                <a:cs typeface="Courier New" pitchFamily="34" charset="-120"/>
+              </a:rPr>
+              <a:t>@requires</a:t>
+            </a:r>
+            <a:pPr indent="0" marL="0">
+              <a:buNone/>
+            </a:pPr>
+            <a:r>
+              <a:rPr lang="en-US" sz="1300" dirty="0">
+                <a:solidFill>
+                  <a:srgbClr val="CCCCCC"/>
+                </a:solidFill>
+                <a:latin typeface="Courier New" pitchFamily="34" charset="0"/>
+                <a:ea typeface="Courier New" pitchFamily="34" charset="-122"/>
+                <a:cs typeface="Courier New" pitchFamily="34" charset="-120"/>
+              </a:rPr>
+              <a:t>: </a:t>
+            </a:r>
+            <a:pPr indent="0" marL="0">
+              <a:buNone/>
+            </a:pPr>
+            <a:r>
+              <a:rPr lang="en-US" sz="1300" dirty="0">
+                <a:solidFill>
+                  <a:srgbClr val="CE9178"/>
+                </a:solidFill>
+                <a:latin typeface="Courier New" pitchFamily="34" charset="0"/>
+                <a:ea typeface="Courier New" pitchFamily="34" charset="-122"/>
+                <a:cs typeface="Courier New" pitchFamily="34" charset="-120"/>
+              </a:rPr>
+              <a:t>'authenticated-user'</a:t>
             </a:r>
             <a:endParaRPr lang="en-US" sz="1300" dirty="0"/>
           </a:p>
@@ -10682,13 +11850,69 @@
             <a:r>
               <a:rPr lang="en-US" sz="1300" dirty="0">
                 <a:solidFill>
-                  <a:srgbClr val="EAECEE"/>
-                </a:solidFill>
-                <a:latin typeface="Courier New" pitchFamily="34" charset="0"/>
-                <a:ea typeface="Courier New" pitchFamily="34" charset="-122"/>
-                <a:cs typeface="Courier New" pitchFamily="34" charset="-120"/>
-              </a:rPr>
-              <a:t>service PedidosService {</a:t>
+                  <a:srgbClr val="569CD6"/>
+                </a:solidFill>
+                <a:latin typeface="Courier New" pitchFamily="34" charset="0"/>
+                <a:ea typeface="Courier New" pitchFamily="34" charset="-122"/>
+                <a:cs typeface="Courier New" pitchFamily="34" charset="-120"/>
+              </a:rPr>
+              <a:t>service</a:t>
+            </a:r>
+            <a:pPr indent="0" marL="0">
+              <a:buNone/>
+            </a:pPr>
+            <a:r>
+              <a:rPr lang="en-US" sz="1300" dirty="0">
+                <a:solidFill>
+                  <a:srgbClr val="CCCCCC"/>
+                </a:solidFill>
+                <a:latin typeface="Courier New" pitchFamily="34" charset="0"/>
+                <a:ea typeface="Courier New" pitchFamily="34" charset="-122"/>
+                <a:cs typeface="Courier New" pitchFamily="34" charset="-120"/>
+              </a:rPr>
+              <a:t> </a:t>
+            </a:r>
+            <a:pPr indent="0" marL="0">
+              <a:buNone/>
+            </a:pPr>
+            <a:r>
+              <a:rPr lang="en-US" sz="1300" dirty="0">
+                <a:solidFill>
+                  <a:srgbClr val="4EC9B0"/>
+                </a:solidFill>
+                <a:latin typeface="Courier New" pitchFamily="34" charset="0"/>
+                <a:ea typeface="Courier New" pitchFamily="34" charset="-122"/>
+                <a:cs typeface="Courier New" pitchFamily="34" charset="-120"/>
+              </a:rPr>
+              <a:t>PedidosService</a:t>
+            </a:r>
+            <a:pPr indent="0" marL="0">
+              <a:buNone/>
+            </a:pPr>
+            <a:r>
+              <a:rPr lang="en-US" sz="1300" dirty="0">
+                <a:solidFill>
+                  <a:srgbClr val="CCCCCC"/>
+                </a:solidFill>
+                <a:latin typeface="Courier New" pitchFamily="34" charset="0"/>
+                <a:ea typeface="Courier New" pitchFamily="34" charset="-122"/>
+                <a:cs typeface="Courier New" pitchFamily="34" charset="-120"/>
+              </a:rPr>
+              <a:t> </a:t>
+            </a:r>
+            <a:pPr indent="0" marL="0">
+              <a:buNone/>
+            </a:pPr>
+            <a:r>
+              <a:rPr lang="en-US" sz="1300" dirty="0">
+                <a:solidFill>
+                  <a:srgbClr val="FFD700"/>
+                </a:solidFill>
+                <a:latin typeface="Courier New" pitchFamily="34" charset="0"/>
+                <a:ea typeface="Courier New" pitchFamily="34" charset="-122"/>
+                <a:cs typeface="Courier New" pitchFamily="34" charset="-120"/>
+              </a:rPr>
+              <a:t>{</a:t>
             </a:r>
             <a:endParaRPr lang="en-US" sz="1300" dirty="0"/>
           </a:p>
@@ -10699,7 +11923,7 @@
             <a:r>
               <a:rPr lang="en-US" sz="1300" dirty="0">
                 <a:solidFill>
-                  <a:srgbClr val="EAECEE"/>
+                  <a:srgbClr val="CCCCCC"/>
                 </a:solidFill>
                 <a:latin typeface="Courier New" pitchFamily="34" charset="0"/>
                 <a:ea typeface="Courier New" pitchFamily="34" charset="-122"/>
@@ -10716,13 +11940,27 @@
             <a:r>
               <a:rPr lang="en-US" sz="1300" dirty="0">
                 <a:solidFill>
-                  <a:srgbClr val="89D1FF"/>
-                </a:solidFill>
-                <a:latin typeface="Courier New" pitchFamily="34" charset="0"/>
-                <a:ea typeface="Courier New" pitchFamily="34" charset="-122"/>
-                <a:cs typeface="Courier New" pitchFamily="34" charset="-120"/>
-              </a:rPr>
-              <a:t>  @odata.draft.enabled</a:t>
+                  <a:srgbClr val="CCCCCC"/>
+                </a:solidFill>
+                <a:latin typeface="Courier New" pitchFamily="34" charset="0"/>
+                <a:ea typeface="Courier New" pitchFamily="34" charset="-122"/>
+                <a:cs typeface="Courier New" pitchFamily="34" charset="-120"/>
+              </a:rPr>
+              <a:t>  </a:t>
+            </a:r>
+            <a:pPr indent="0" marL="0">
+              <a:buNone/>
+            </a:pPr>
+            <a:r>
+              <a:rPr lang="en-US" sz="1300" dirty="0">
+                <a:solidFill>
+                  <a:srgbClr val="DCDCAA"/>
+                </a:solidFill>
+                <a:latin typeface="Courier New" pitchFamily="34" charset="0"/>
+                <a:ea typeface="Courier New" pitchFamily="34" charset="-122"/>
+                <a:cs typeface="Courier New" pitchFamily="34" charset="-120"/>
+              </a:rPr>
+              <a:t>@odata.draft.enabled</a:t>
             </a:r>
             <a:endParaRPr lang="en-US" sz="1300" dirty="0"/>
           </a:p>
@@ -10733,13 +11971,279 @@
             <a:r>
               <a:rPr lang="en-US" sz="1300" dirty="0">
                 <a:solidFill>
-                  <a:srgbClr val="89D1FF"/>
-                </a:solidFill>
-                <a:latin typeface="Courier New" pitchFamily="34" charset="0"/>
-                <a:ea typeface="Courier New" pitchFamily="34" charset="-122"/>
-                <a:cs typeface="Courier New" pitchFamily="34" charset="-120"/>
-              </a:rPr>
-              <a:t>  @restrict: [{ grant: '*', to: ['Comum', 'Admin'] }]</a:t>
+                  <a:srgbClr val="CCCCCC"/>
+                </a:solidFill>
+                <a:latin typeface="Courier New" pitchFamily="34" charset="0"/>
+                <a:ea typeface="Courier New" pitchFamily="34" charset="-122"/>
+                <a:cs typeface="Courier New" pitchFamily="34" charset="-120"/>
+              </a:rPr>
+              <a:t>  </a:t>
+            </a:r>
+            <a:pPr indent="0" marL="0">
+              <a:buNone/>
+            </a:pPr>
+            <a:r>
+              <a:rPr lang="en-US" sz="1300" dirty="0">
+                <a:solidFill>
+                  <a:srgbClr val="DCDCAA"/>
+                </a:solidFill>
+                <a:latin typeface="Courier New" pitchFamily="34" charset="0"/>
+                <a:ea typeface="Courier New" pitchFamily="34" charset="-122"/>
+                <a:cs typeface="Courier New" pitchFamily="34" charset="-120"/>
+              </a:rPr>
+              <a:t>@restrict</a:t>
+            </a:r>
+            <a:pPr indent="0" marL="0">
+              <a:buNone/>
+            </a:pPr>
+            <a:r>
+              <a:rPr lang="en-US" sz="1300" dirty="0">
+                <a:solidFill>
+                  <a:srgbClr val="CCCCCC"/>
+                </a:solidFill>
+                <a:latin typeface="Courier New" pitchFamily="34" charset="0"/>
+                <a:ea typeface="Courier New" pitchFamily="34" charset="-122"/>
+                <a:cs typeface="Courier New" pitchFamily="34" charset="-120"/>
+              </a:rPr>
+              <a:t>: </a:t>
+            </a:r>
+            <a:pPr indent="0" marL="0">
+              <a:buNone/>
+            </a:pPr>
+            <a:r>
+              <a:rPr lang="en-US" sz="1300" dirty="0">
+                <a:solidFill>
+                  <a:srgbClr val="DA70D6"/>
+                </a:solidFill>
+                <a:latin typeface="Courier New" pitchFamily="34" charset="0"/>
+                <a:ea typeface="Courier New" pitchFamily="34" charset="-122"/>
+                <a:cs typeface="Courier New" pitchFamily="34" charset="-120"/>
+              </a:rPr>
+              <a:t>[</a:t>
+            </a:r>
+            <a:pPr indent="0" marL="0">
+              <a:buNone/>
+            </a:pPr>
+            <a:r>
+              <a:rPr lang="en-US" sz="1300" dirty="0">
+                <a:solidFill>
+                  <a:srgbClr val="179FFF"/>
+                </a:solidFill>
+                <a:latin typeface="Courier New" pitchFamily="34" charset="0"/>
+                <a:ea typeface="Courier New" pitchFamily="34" charset="-122"/>
+                <a:cs typeface="Courier New" pitchFamily="34" charset="-120"/>
+              </a:rPr>
+              <a:t>{</a:t>
+            </a:r>
+            <a:pPr indent="0" marL="0">
+              <a:buNone/>
+            </a:pPr>
+            <a:r>
+              <a:rPr lang="en-US" sz="1300" dirty="0">
+                <a:solidFill>
+                  <a:srgbClr val="CCCCCC"/>
+                </a:solidFill>
+                <a:latin typeface="Courier New" pitchFamily="34" charset="0"/>
+                <a:ea typeface="Courier New" pitchFamily="34" charset="-122"/>
+                <a:cs typeface="Courier New" pitchFamily="34" charset="-120"/>
+              </a:rPr>
+              <a:t> </a:t>
+            </a:r>
+            <a:pPr indent="0" marL="0">
+              <a:buNone/>
+            </a:pPr>
+            <a:r>
+              <a:rPr lang="en-US" sz="1300" dirty="0">
+                <a:solidFill>
+                  <a:srgbClr val="9CDCFE"/>
+                </a:solidFill>
+                <a:latin typeface="Courier New" pitchFamily="34" charset="0"/>
+                <a:ea typeface="Courier New" pitchFamily="34" charset="-122"/>
+                <a:cs typeface="Courier New" pitchFamily="34" charset="-120"/>
+              </a:rPr>
+              <a:t>grant</a:t>
+            </a:r>
+            <a:pPr indent="0" marL="0">
+              <a:buNone/>
+            </a:pPr>
+            <a:r>
+              <a:rPr lang="en-US" sz="1300" dirty="0">
+                <a:solidFill>
+                  <a:srgbClr val="CCCCCC"/>
+                </a:solidFill>
+                <a:latin typeface="Courier New" pitchFamily="34" charset="0"/>
+                <a:ea typeface="Courier New" pitchFamily="34" charset="-122"/>
+                <a:cs typeface="Courier New" pitchFamily="34" charset="-120"/>
+              </a:rPr>
+              <a:t>: </a:t>
+            </a:r>
+            <a:pPr indent="0" marL="0">
+              <a:buNone/>
+            </a:pPr>
+            <a:r>
+              <a:rPr lang="en-US" sz="1300" dirty="0">
+                <a:solidFill>
+                  <a:srgbClr val="CE9178"/>
+                </a:solidFill>
+                <a:latin typeface="Courier New" pitchFamily="34" charset="0"/>
+                <a:ea typeface="Courier New" pitchFamily="34" charset="-122"/>
+                <a:cs typeface="Courier New" pitchFamily="34" charset="-120"/>
+              </a:rPr>
+              <a:t>'*'</a:t>
+            </a:r>
+            <a:pPr indent="0" marL="0">
+              <a:buNone/>
+            </a:pPr>
+            <a:r>
+              <a:rPr lang="en-US" sz="1300" dirty="0">
+                <a:solidFill>
+                  <a:srgbClr val="CCCCCC"/>
+                </a:solidFill>
+                <a:latin typeface="Courier New" pitchFamily="34" charset="0"/>
+                <a:ea typeface="Courier New" pitchFamily="34" charset="-122"/>
+                <a:cs typeface="Courier New" pitchFamily="34" charset="-120"/>
+              </a:rPr>
+              <a:t>, </a:t>
+            </a:r>
+            <a:pPr indent="0" marL="0">
+              <a:buNone/>
+            </a:pPr>
+            <a:r>
+              <a:rPr lang="en-US" sz="1300" dirty="0">
+                <a:solidFill>
+                  <a:srgbClr val="569CD6"/>
+                </a:solidFill>
+                <a:latin typeface="Courier New" pitchFamily="34" charset="0"/>
+                <a:ea typeface="Courier New" pitchFamily="34" charset="-122"/>
+                <a:cs typeface="Courier New" pitchFamily="34" charset="-120"/>
+              </a:rPr>
+              <a:t>to</a:t>
+            </a:r>
+            <a:pPr indent="0" marL="0">
+              <a:buNone/>
+            </a:pPr>
+            <a:r>
+              <a:rPr lang="en-US" sz="1300" dirty="0">
+                <a:solidFill>
+                  <a:srgbClr val="CCCCCC"/>
+                </a:solidFill>
+                <a:latin typeface="Courier New" pitchFamily="34" charset="0"/>
+                <a:ea typeface="Courier New" pitchFamily="34" charset="-122"/>
+                <a:cs typeface="Courier New" pitchFamily="34" charset="-120"/>
+              </a:rPr>
+              <a:t>: </a:t>
+            </a:r>
+            <a:pPr indent="0" marL="0">
+              <a:buNone/>
+            </a:pPr>
+            <a:r>
+              <a:rPr lang="en-US" sz="1300" dirty="0">
+                <a:solidFill>
+                  <a:srgbClr val="FFD700"/>
+                </a:solidFill>
+                <a:latin typeface="Courier New" pitchFamily="34" charset="0"/>
+                <a:ea typeface="Courier New" pitchFamily="34" charset="-122"/>
+                <a:cs typeface="Courier New" pitchFamily="34" charset="-120"/>
+              </a:rPr>
+              <a:t>[</a:t>
+            </a:r>
+            <a:pPr indent="0" marL="0">
+              <a:buNone/>
+            </a:pPr>
+            <a:r>
+              <a:rPr lang="en-US" sz="1300" dirty="0">
+                <a:solidFill>
+                  <a:srgbClr val="CE9178"/>
+                </a:solidFill>
+                <a:latin typeface="Courier New" pitchFamily="34" charset="0"/>
+                <a:ea typeface="Courier New" pitchFamily="34" charset="-122"/>
+                <a:cs typeface="Courier New" pitchFamily="34" charset="-120"/>
+              </a:rPr>
+              <a:t>'Comum'</a:t>
+            </a:r>
+            <a:pPr indent="0" marL="0">
+              <a:buNone/>
+            </a:pPr>
+            <a:r>
+              <a:rPr lang="en-US" sz="1300" dirty="0">
+                <a:solidFill>
+                  <a:srgbClr val="CCCCCC"/>
+                </a:solidFill>
+                <a:latin typeface="Courier New" pitchFamily="34" charset="0"/>
+                <a:ea typeface="Courier New" pitchFamily="34" charset="-122"/>
+                <a:cs typeface="Courier New" pitchFamily="34" charset="-120"/>
+              </a:rPr>
+              <a:t>, </a:t>
+            </a:r>
+            <a:pPr indent="0" marL="0">
+              <a:buNone/>
+            </a:pPr>
+            <a:r>
+              <a:rPr lang="en-US" sz="1300" dirty="0">
+                <a:solidFill>
+                  <a:srgbClr val="CE9178"/>
+                </a:solidFill>
+                <a:latin typeface="Courier New" pitchFamily="34" charset="0"/>
+                <a:ea typeface="Courier New" pitchFamily="34" charset="-122"/>
+                <a:cs typeface="Courier New" pitchFamily="34" charset="-120"/>
+              </a:rPr>
+              <a:t>'Admin'</a:t>
+            </a:r>
+            <a:pPr indent="0" marL="0">
+              <a:buNone/>
+            </a:pPr>
+            <a:r>
+              <a:rPr lang="en-US" sz="1300" dirty="0">
+                <a:solidFill>
+                  <a:srgbClr val="FFD700"/>
+                </a:solidFill>
+                <a:latin typeface="Courier New" pitchFamily="34" charset="0"/>
+                <a:ea typeface="Courier New" pitchFamily="34" charset="-122"/>
+                <a:cs typeface="Courier New" pitchFamily="34" charset="-120"/>
+              </a:rPr>
+              <a:t>]</a:t>
+            </a:r>
+            <a:pPr indent="0" marL="0">
+              <a:buNone/>
+            </a:pPr>
+            <a:r>
+              <a:rPr lang="en-US" sz="1300" dirty="0">
+                <a:solidFill>
+                  <a:srgbClr val="CCCCCC"/>
+                </a:solidFill>
+                <a:latin typeface="Courier New" pitchFamily="34" charset="0"/>
+                <a:ea typeface="Courier New" pitchFamily="34" charset="-122"/>
+                <a:cs typeface="Courier New" pitchFamily="34" charset="-120"/>
+              </a:rPr>
+              <a:t> </a:t>
+            </a:r>
+            <a:pPr indent="0" marL="0">
+              <a:buNone/>
+            </a:pPr>
+            <a:r>
+              <a:rPr lang="en-US" sz="1300" dirty="0">
+                <a:solidFill>
+                  <a:srgbClr val="179FFF"/>
+                </a:solidFill>
+                <a:latin typeface="Courier New" pitchFamily="34" charset="0"/>
+                <a:ea typeface="Courier New" pitchFamily="34" charset="-122"/>
+                <a:cs typeface="Courier New" pitchFamily="34" charset="-120"/>
+              </a:rPr>
+              <a:t>}</a:t>
+            </a:r>
+            <a:pPr indent="0" marL="0">
+              <a:buNone/>
+            </a:pPr>
+            <a:r>
+              <a:rPr lang="en-US" sz="1300" dirty="0">
+                <a:solidFill>
+                  <a:srgbClr val="DA70D6"/>
+                </a:solidFill>
+                <a:latin typeface="Courier New" pitchFamily="34" charset="0"/>
+                <a:ea typeface="Courier New" pitchFamily="34" charset="-122"/>
+                <a:cs typeface="Courier New" pitchFamily="34" charset="-120"/>
+              </a:rPr>
+              <a:t>]</a:t>
             </a:r>
             <a:endParaRPr lang="en-US" sz="1300" dirty="0"/>
           </a:p>
@@ -10750,13 +12254,223 @@
             <a:r>
               <a:rPr lang="en-US" sz="1300" dirty="0">
                 <a:solidFill>
-                  <a:srgbClr val="EAECEE"/>
-                </a:solidFill>
-                <a:latin typeface="Courier New" pitchFamily="34" charset="0"/>
-                <a:ea typeface="Courier New" pitchFamily="34" charset="-122"/>
-                <a:cs typeface="Courier New" pitchFamily="34" charset="-120"/>
-              </a:rPr>
-              <a:t>  entity Pedidos as projection on db.Pedidos {</a:t>
+                  <a:srgbClr val="CCCCCC"/>
+                </a:solidFill>
+                <a:latin typeface="Courier New" pitchFamily="34" charset="0"/>
+                <a:ea typeface="Courier New" pitchFamily="34" charset="-122"/>
+                <a:cs typeface="Courier New" pitchFamily="34" charset="-120"/>
+              </a:rPr>
+              <a:t>  </a:t>
+            </a:r>
+            <a:pPr indent="0" marL="0">
+              <a:buNone/>
+            </a:pPr>
+            <a:r>
+              <a:rPr lang="en-US" sz="1300" dirty="0">
+                <a:solidFill>
+                  <a:srgbClr val="569CD6"/>
+                </a:solidFill>
+                <a:latin typeface="Courier New" pitchFamily="34" charset="0"/>
+                <a:ea typeface="Courier New" pitchFamily="34" charset="-122"/>
+                <a:cs typeface="Courier New" pitchFamily="34" charset="-120"/>
+              </a:rPr>
+              <a:t>entity</a:t>
+            </a:r>
+            <a:pPr indent="0" marL="0">
+              <a:buNone/>
+            </a:pPr>
+            <a:r>
+              <a:rPr lang="en-US" sz="1300" dirty="0">
+                <a:solidFill>
+                  <a:srgbClr val="CCCCCC"/>
+                </a:solidFill>
+                <a:latin typeface="Courier New" pitchFamily="34" charset="0"/>
+                <a:ea typeface="Courier New" pitchFamily="34" charset="-122"/>
+                <a:cs typeface="Courier New" pitchFamily="34" charset="-120"/>
+              </a:rPr>
+              <a:t> </a:t>
+            </a:r>
+            <a:pPr indent="0" marL="0">
+              <a:buNone/>
+            </a:pPr>
+            <a:r>
+              <a:rPr lang="en-US" sz="1300" dirty="0">
+                <a:solidFill>
+                  <a:srgbClr val="4EC9B0"/>
+                </a:solidFill>
+                <a:latin typeface="Courier New" pitchFamily="34" charset="0"/>
+                <a:ea typeface="Courier New" pitchFamily="34" charset="-122"/>
+                <a:cs typeface="Courier New" pitchFamily="34" charset="-120"/>
+              </a:rPr>
+              <a:t>Pedidos</a:t>
+            </a:r>
+            <a:pPr indent="0" marL="0">
+              <a:buNone/>
+            </a:pPr>
+            <a:r>
+              <a:rPr lang="en-US" sz="1300" dirty="0">
+                <a:solidFill>
+                  <a:srgbClr val="CCCCCC"/>
+                </a:solidFill>
+                <a:latin typeface="Courier New" pitchFamily="34" charset="0"/>
+                <a:ea typeface="Courier New" pitchFamily="34" charset="-122"/>
+                <a:cs typeface="Courier New" pitchFamily="34" charset="-120"/>
+              </a:rPr>
+              <a:t> </a:t>
+            </a:r>
+            <a:pPr indent="0" marL="0">
+              <a:buNone/>
+            </a:pPr>
+            <a:r>
+              <a:rPr lang="en-US" sz="1300" dirty="0">
+                <a:solidFill>
+                  <a:srgbClr val="569CD6"/>
+                </a:solidFill>
+                <a:latin typeface="Courier New" pitchFamily="34" charset="0"/>
+                <a:ea typeface="Courier New" pitchFamily="34" charset="-122"/>
+                <a:cs typeface="Courier New" pitchFamily="34" charset="-120"/>
+              </a:rPr>
+              <a:t>as</a:t>
+            </a:r>
+            <a:pPr indent="0" marL="0">
+              <a:buNone/>
+            </a:pPr>
+            <a:r>
+              <a:rPr lang="en-US" sz="1300" dirty="0">
+                <a:solidFill>
+                  <a:srgbClr val="CCCCCC"/>
+                </a:solidFill>
+                <a:latin typeface="Courier New" pitchFamily="34" charset="0"/>
+                <a:ea typeface="Courier New" pitchFamily="34" charset="-122"/>
+                <a:cs typeface="Courier New" pitchFamily="34" charset="-120"/>
+              </a:rPr>
+              <a:t> </a:t>
+            </a:r>
+            <a:pPr indent="0" marL="0">
+              <a:buNone/>
+            </a:pPr>
+            <a:r>
+              <a:rPr lang="en-US" sz="1300" dirty="0">
+                <a:solidFill>
+                  <a:srgbClr val="569CD6"/>
+                </a:solidFill>
+                <a:latin typeface="Courier New" pitchFamily="34" charset="0"/>
+                <a:ea typeface="Courier New" pitchFamily="34" charset="-122"/>
+                <a:cs typeface="Courier New" pitchFamily="34" charset="-120"/>
+              </a:rPr>
+              <a:t>projection</a:t>
+            </a:r>
+            <a:pPr indent="0" marL="0">
+              <a:buNone/>
+            </a:pPr>
+            <a:r>
+              <a:rPr lang="en-US" sz="1300" dirty="0">
+                <a:solidFill>
+                  <a:srgbClr val="CCCCCC"/>
+                </a:solidFill>
+                <a:latin typeface="Courier New" pitchFamily="34" charset="0"/>
+                <a:ea typeface="Courier New" pitchFamily="34" charset="-122"/>
+                <a:cs typeface="Courier New" pitchFamily="34" charset="-120"/>
+              </a:rPr>
+              <a:t> </a:t>
+            </a:r>
+            <a:pPr indent="0" marL="0">
+              <a:buNone/>
+            </a:pPr>
+            <a:r>
+              <a:rPr lang="en-US" sz="1300" dirty="0">
+                <a:solidFill>
+                  <a:srgbClr val="569CD6"/>
+                </a:solidFill>
+                <a:latin typeface="Courier New" pitchFamily="34" charset="0"/>
+                <a:ea typeface="Courier New" pitchFamily="34" charset="-122"/>
+                <a:cs typeface="Courier New" pitchFamily="34" charset="-120"/>
+              </a:rPr>
+              <a:t>on</a:t>
+            </a:r>
+            <a:pPr indent="0" marL="0">
+              <a:buNone/>
+            </a:pPr>
+            <a:r>
+              <a:rPr lang="en-US" sz="1300" dirty="0">
+                <a:solidFill>
+                  <a:srgbClr val="CCCCCC"/>
+                </a:solidFill>
+                <a:latin typeface="Courier New" pitchFamily="34" charset="0"/>
+                <a:ea typeface="Courier New" pitchFamily="34" charset="-122"/>
+                <a:cs typeface="Courier New" pitchFamily="34" charset="-120"/>
+              </a:rPr>
+              <a:t> </a:t>
+            </a:r>
+            <a:pPr indent="0" marL="0">
+              <a:buNone/>
+            </a:pPr>
+            <a:r>
+              <a:rPr lang="en-US" sz="1300" dirty="0">
+                <a:solidFill>
+                  <a:srgbClr val="9CDCFE"/>
+                </a:solidFill>
+                <a:latin typeface="Courier New" pitchFamily="34" charset="0"/>
+                <a:ea typeface="Courier New" pitchFamily="34" charset="-122"/>
+                <a:cs typeface="Courier New" pitchFamily="34" charset="-120"/>
+              </a:rPr>
+              <a:t>db</a:t>
+            </a:r>
+            <a:pPr indent="0" marL="0">
+              <a:buNone/>
+            </a:pPr>
+            <a:r>
+              <a:rPr lang="en-US" sz="1300" dirty="0">
+                <a:solidFill>
+                  <a:srgbClr val="CCCCCC"/>
+                </a:solidFill>
+                <a:latin typeface="Courier New" pitchFamily="34" charset="0"/>
+                <a:ea typeface="Courier New" pitchFamily="34" charset="-122"/>
+                <a:cs typeface="Courier New" pitchFamily="34" charset="-120"/>
+              </a:rPr>
+              <a:t>.</a:t>
+            </a:r>
+            <a:pPr indent="0" marL="0">
+              <a:buNone/>
+            </a:pPr>
+            <a:r>
+              <a:rPr lang="en-US" sz="1300" dirty="0">
+                <a:solidFill>
+                  <a:srgbClr val="4EC9B0"/>
+                </a:solidFill>
+                <a:latin typeface="Courier New" pitchFamily="34" charset="0"/>
+                <a:ea typeface="Courier New" pitchFamily="34" charset="-122"/>
+                <a:cs typeface="Courier New" pitchFamily="34" charset="-120"/>
+              </a:rPr>
+              <a:t>Pedidos</a:t>
+            </a:r>
+            <a:pPr indent="0" marL="0">
+              <a:buNone/>
+            </a:pPr>
+            <a:r>
+              <a:rPr lang="en-US" sz="1300" dirty="0">
+                <a:solidFill>
+                  <a:srgbClr val="CCCCCC"/>
+                </a:solidFill>
+                <a:latin typeface="Courier New" pitchFamily="34" charset="0"/>
+                <a:ea typeface="Courier New" pitchFamily="34" charset="-122"/>
+                <a:cs typeface="Courier New" pitchFamily="34" charset="-120"/>
+              </a:rPr>
+              <a:t> </a:t>
+            </a:r>
+            <a:pPr indent="0" marL="0">
+              <a:buNone/>
+            </a:pPr>
+            <a:r>
+              <a:rPr lang="en-US" sz="1300" dirty="0">
+                <a:solidFill>
+                  <a:srgbClr val="DA70D6"/>
+                </a:solidFill>
+                <a:latin typeface="Courier New" pitchFamily="34" charset="0"/>
+                <a:ea typeface="Courier New" pitchFamily="34" charset="-122"/>
+                <a:cs typeface="Courier New" pitchFamily="34" charset="-120"/>
+              </a:rPr>
+              <a:t>{</a:t>
             </a:r>
             <a:endParaRPr lang="en-US" sz="1300" dirty="0"/>
           </a:p>
@@ -10767,7 +12481,7 @@
             <a:r>
               <a:rPr lang="en-US" sz="1300" dirty="0">
                 <a:solidFill>
-                  <a:srgbClr val="A9B4BE"/>
+                  <a:srgbClr val="CCCCCC"/>
                 </a:solidFill>
                 <a:latin typeface="Courier New" pitchFamily="34" charset="0"/>
                 <a:ea typeface="Courier New" pitchFamily="34" charset="-122"/>
@@ -10784,13 +12498,125 @@
             <a:r>
               <a:rPr lang="en-US" sz="1300" dirty="0">
                 <a:solidFill>
-                  <a:srgbClr val="EAECEE"/>
-                </a:solidFill>
-                <a:latin typeface="Courier New" pitchFamily="34" charset="0"/>
-                <a:ea typeface="Courier New" pitchFamily="34" charset="-122"/>
-                <a:cs typeface="Courier New" pitchFamily="34" charset="-120"/>
-              </a:rPr>
-              <a:t>    cliente.nome         as nomeCliente,</a:t>
+                  <a:srgbClr val="CCCCCC"/>
+                </a:solidFill>
+                <a:latin typeface="Courier New" pitchFamily="34" charset="0"/>
+                <a:ea typeface="Courier New" pitchFamily="34" charset="-122"/>
+                <a:cs typeface="Courier New" pitchFamily="34" charset="-120"/>
+              </a:rPr>
+              <a:t>    </a:t>
+            </a:r>
+            <a:pPr indent="0" marL="0">
+              <a:buNone/>
+            </a:pPr>
+            <a:r>
+              <a:rPr lang="en-US" sz="1300" dirty="0">
+                <a:solidFill>
+                  <a:srgbClr val="9CDCFE"/>
+                </a:solidFill>
+                <a:latin typeface="Courier New" pitchFamily="34" charset="0"/>
+                <a:ea typeface="Courier New" pitchFamily="34" charset="-122"/>
+                <a:cs typeface="Courier New" pitchFamily="34" charset="-120"/>
+              </a:rPr>
+              <a:t>cliente</a:t>
+            </a:r>
+            <a:pPr indent="0" marL="0">
+              <a:buNone/>
+            </a:pPr>
+            <a:r>
+              <a:rPr lang="en-US" sz="1300" dirty="0">
+                <a:solidFill>
+                  <a:srgbClr val="CCCCCC"/>
+                </a:solidFill>
+                <a:latin typeface="Courier New" pitchFamily="34" charset="0"/>
+                <a:ea typeface="Courier New" pitchFamily="34" charset="-122"/>
+                <a:cs typeface="Courier New" pitchFamily="34" charset="-120"/>
+              </a:rPr>
+              <a:t>.</a:t>
+            </a:r>
+            <a:pPr indent="0" marL="0">
+              <a:buNone/>
+            </a:pPr>
+            <a:r>
+              <a:rPr lang="en-US" sz="1300" dirty="0">
+                <a:solidFill>
+                  <a:srgbClr val="9CDCFE"/>
+                </a:solidFill>
+                <a:latin typeface="Courier New" pitchFamily="34" charset="0"/>
+                <a:ea typeface="Courier New" pitchFamily="34" charset="-122"/>
+                <a:cs typeface="Courier New" pitchFamily="34" charset="-120"/>
+              </a:rPr>
+              <a:t>nome</a:t>
+            </a:r>
+            <a:pPr indent="0" marL="0">
+              <a:buNone/>
+            </a:pPr>
+            <a:r>
+              <a:rPr lang="en-US" sz="1300" dirty="0">
+                <a:solidFill>
+                  <a:srgbClr val="CCCCCC"/>
+                </a:solidFill>
+                <a:latin typeface="Courier New" pitchFamily="34" charset="0"/>
+                <a:ea typeface="Courier New" pitchFamily="34" charset="-122"/>
+                <a:cs typeface="Courier New" pitchFamily="34" charset="-120"/>
+              </a:rPr>
+              <a:t>         </a:t>
+            </a:r>
+            <a:pPr indent="0" marL="0">
+              <a:buNone/>
+            </a:pPr>
+            <a:r>
+              <a:rPr lang="en-US" sz="1300" dirty="0">
+                <a:solidFill>
+                  <a:srgbClr val="569CD6"/>
+                </a:solidFill>
+                <a:latin typeface="Courier New" pitchFamily="34" charset="0"/>
+                <a:ea typeface="Courier New" pitchFamily="34" charset="-122"/>
+                <a:cs typeface="Courier New" pitchFamily="34" charset="-120"/>
+              </a:rPr>
+              <a:t>as</a:t>
+            </a:r>
+            <a:pPr indent="0" marL="0">
+              <a:buNone/>
+            </a:pPr>
+            <a:r>
+              <a:rPr lang="en-US" sz="1300" dirty="0">
+                <a:solidFill>
+                  <a:srgbClr val="CCCCCC"/>
+                </a:solidFill>
+                <a:latin typeface="Courier New" pitchFamily="34" charset="0"/>
+                <a:ea typeface="Courier New" pitchFamily="34" charset="-122"/>
+                <a:cs typeface="Courier New" pitchFamily="34" charset="-120"/>
+              </a:rPr>
+              <a:t> </a:t>
+            </a:r>
+            <a:pPr indent="0" marL="0">
+              <a:buNone/>
+            </a:pPr>
+            <a:r>
+              <a:rPr lang="en-US" sz="1300" dirty="0">
+                <a:solidFill>
+                  <a:srgbClr val="9CDCFE"/>
+                </a:solidFill>
+                <a:latin typeface="Courier New" pitchFamily="34" charset="0"/>
+                <a:ea typeface="Courier New" pitchFamily="34" charset="-122"/>
+                <a:cs typeface="Courier New" pitchFamily="34" charset="-120"/>
+              </a:rPr>
+              <a:t>nomeCliente</a:t>
+            </a:r>
+            <a:pPr indent="0" marL="0">
+              <a:buNone/>
+            </a:pPr>
+            <a:r>
+              <a:rPr lang="en-US" sz="1300" dirty="0">
+                <a:solidFill>
+                  <a:srgbClr val="CCCCCC"/>
+                </a:solidFill>
+                <a:latin typeface="Courier New" pitchFamily="34" charset="0"/>
+                <a:ea typeface="Courier New" pitchFamily="34" charset="-122"/>
+                <a:cs typeface="Courier New" pitchFamily="34" charset="-120"/>
+              </a:rPr>
+              <a:t>,</a:t>
             </a:r>
             <a:endParaRPr lang="en-US" sz="1300" dirty="0"/>
           </a:p>
@@ -10801,13 +12627,125 @@
             <a:r>
               <a:rPr lang="en-US" sz="1300" dirty="0">
                 <a:solidFill>
-                  <a:srgbClr val="EAECEE"/>
-                </a:solidFill>
-                <a:latin typeface="Courier New" pitchFamily="34" charset="0"/>
-                <a:ea typeface="Courier New" pitchFamily="34" charset="-122"/>
-                <a:cs typeface="Courier New" pitchFamily="34" charset="-120"/>
-              </a:rPr>
-              <a:t>    cliente.cpf          as cpfCliente,</a:t>
+                  <a:srgbClr val="CCCCCC"/>
+                </a:solidFill>
+                <a:latin typeface="Courier New" pitchFamily="34" charset="0"/>
+                <a:ea typeface="Courier New" pitchFamily="34" charset="-122"/>
+                <a:cs typeface="Courier New" pitchFamily="34" charset="-120"/>
+              </a:rPr>
+              <a:t>    </a:t>
+            </a:r>
+            <a:pPr indent="0" marL="0">
+              <a:buNone/>
+            </a:pPr>
+            <a:r>
+              <a:rPr lang="en-US" sz="1300" dirty="0">
+                <a:solidFill>
+                  <a:srgbClr val="9CDCFE"/>
+                </a:solidFill>
+                <a:latin typeface="Courier New" pitchFamily="34" charset="0"/>
+                <a:ea typeface="Courier New" pitchFamily="34" charset="-122"/>
+                <a:cs typeface="Courier New" pitchFamily="34" charset="-120"/>
+              </a:rPr>
+              <a:t>cliente</a:t>
+            </a:r>
+            <a:pPr indent="0" marL="0">
+              <a:buNone/>
+            </a:pPr>
+            <a:r>
+              <a:rPr lang="en-US" sz="1300" dirty="0">
+                <a:solidFill>
+                  <a:srgbClr val="CCCCCC"/>
+                </a:solidFill>
+                <a:latin typeface="Courier New" pitchFamily="34" charset="0"/>
+                <a:ea typeface="Courier New" pitchFamily="34" charset="-122"/>
+                <a:cs typeface="Courier New" pitchFamily="34" charset="-120"/>
+              </a:rPr>
+              <a:t>.</a:t>
+            </a:r>
+            <a:pPr indent="0" marL="0">
+              <a:buNone/>
+            </a:pPr>
+            <a:r>
+              <a:rPr lang="en-US" sz="1300" dirty="0">
+                <a:solidFill>
+                  <a:srgbClr val="9CDCFE"/>
+                </a:solidFill>
+                <a:latin typeface="Courier New" pitchFamily="34" charset="0"/>
+                <a:ea typeface="Courier New" pitchFamily="34" charset="-122"/>
+                <a:cs typeface="Courier New" pitchFamily="34" charset="-120"/>
+              </a:rPr>
+              <a:t>cpf</a:t>
+            </a:r>
+            <a:pPr indent="0" marL="0">
+              <a:buNone/>
+            </a:pPr>
+            <a:r>
+              <a:rPr lang="en-US" sz="1300" dirty="0">
+                <a:solidFill>
+                  <a:srgbClr val="CCCCCC"/>
+                </a:solidFill>
+                <a:latin typeface="Courier New" pitchFamily="34" charset="0"/>
+                <a:ea typeface="Courier New" pitchFamily="34" charset="-122"/>
+                <a:cs typeface="Courier New" pitchFamily="34" charset="-120"/>
+              </a:rPr>
+              <a:t>          </a:t>
+            </a:r>
+            <a:pPr indent="0" marL="0">
+              <a:buNone/>
+            </a:pPr>
+            <a:r>
+              <a:rPr lang="en-US" sz="1300" dirty="0">
+                <a:solidFill>
+                  <a:srgbClr val="569CD6"/>
+                </a:solidFill>
+                <a:latin typeface="Courier New" pitchFamily="34" charset="0"/>
+                <a:ea typeface="Courier New" pitchFamily="34" charset="-122"/>
+                <a:cs typeface="Courier New" pitchFamily="34" charset="-120"/>
+              </a:rPr>
+              <a:t>as</a:t>
+            </a:r>
+            <a:pPr indent="0" marL="0">
+              <a:buNone/>
+            </a:pPr>
+            <a:r>
+              <a:rPr lang="en-US" sz="1300" dirty="0">
+                <a:solidFill>
+                  <a:srgbClr val="CCCCCC"/>
+                </a:solidFill>
+                <a:latin typeface="Courier New" pitchFamily="34" charset="0"/>
+                <a:ea typeface="Courier New" pitchFamily="34" charset="-122"/>
+                <a:cs typeface="Courier New" pitchFamily="34" charset="-120"/>
+              </a:rPr>
+              <a:t> </a:t>
+            </a:r>
+            <a:pPr indent="0" marL="0">
+              <a:buNone/>
+            </a:pPr>
+            <a:r>
+              <a:rPr lang="en-US" sz="1300" dirty="0">
+                <a:solidFill>
+                  <a:srgbClr val="9CDCFE"/>
+                </a:solidFill>
+                <a:latin typeface="Courier New" pitchFamily="34" charset="0"/>
+                <a:ea typeface="Courier New" pitchFamily="34" charset="-122"/>
+                <a:cs typeface="Courier New" pitchFamily="34" charset="-120"/>
+              </a:rPr>
+              <a:t>cpfCliente</a:t>
+            </a:r>
+            <a:pPr indent="0" marL="0">
+              <a:buNone/>
+            </a:pPr>
+            <a:r>
+              <a:rPr lang="en-US" sz="1300" dirty="0">
+                <a:solidFill>
+                  <a:srgbClr val="CCCCCC"/>
+                </a:solidFill>
+                <a:latin typeface="Courier New" pitchFamily="34" charset="0"/>
+                <a:ea typeface="Courier New" pitchFamily="34" charset="-122"/>
+                <a:cs typeface="Courier New" pitchFamily="34" charset="-120"/>
+              </a:rPr>
+              <a:t>,</a:t>
             </a:r>
             <a:endParaRPr lang="en-US" sz="1300" dirty="0"/>
           </a:p>
@@ -10818,13 +12756,125 @@
             <a:r>
               <a:rPr lang="en-US" sz="1300" dirty="0">
                 <a:solidFill>
-                  <a:srgbClr val="EAECEE"/>
-                </a:solidFill>
-                <a:latin typeface="Courier New" pitchFamily="34" charset="0"/>
-                <a:ea typeface="Courier New" pitchFamily="34" charset="-122"/>
-                <a:cs typeface="Courier New" pitchFamily="34" charset="-120"/>
-              </a:rPr>
-              <a:t>    cliente.cpfFormatado as cpfClienteFormatado,</a:t>
+                  <a:srgbClr val="CCCCCC"/>
+                </a:solidFill>
+                <a:latin typeface="Courier New" pitchFamily="34" charset="0"/>
+                <a:ea typeface="Courier New" pitchFamily="34" charset="-122"/>
+                <a:cs typeface="Courier New" pitchFamily="34" charset="-120"/>
+              </a:rPr>
+              <a:t>    </a:t>
+            </a:r>
+            <a:pPr indent="0" marL="0">
+              <a:buNone/>
+            </a:pPr>
+            <a:r>
+              <a:rPr lang="en-US" sz="1300" dirty="0">
+                <a:solidFill>
+                  <a:srgbClr val="9CDCFE"/>
+                </a:solidFill>
+                <a:latin typeface="Courier New" pitchFamily="34" charset="0"/>
+                <a:ea typeface="Courier New" pitchFamily="34" charset="-122"/>
+                <a:cs typeface="Courier New" pitchFamily="34" charset="-120"/>
+              </a:rPr>
+              <a:t>cliente</a:t>
+            </a:r>
+            <a:pPr indent="0" marL="0">
+              <a:buNone/>
+            </a:pPr>
+            <a:r>
+              <a:rPr lang="en-US" sz="1300" dirty="0">
+                <a:solidFill>
+                  <a:srgbClr val="CCCCCC"/>
+                </a:solidFill>
+                <a:latin typeface="Courier New" pitchFamily="34" charset="0"/>
+                <a:ea typeface="Courier New" pitchFamily="34" charset="-122"/>
+                <a:cs typeface="Courier New" pitchFamily="34" charset="-120"/>
+              </a:rPr>
+              <a:t>.</a:t>
+            </a:r>
+            <a:pPr indent="0" marL="0">
+              <a:buNone/>
+            </a:pPr>
+            <a:r>
+              <a:rPr lang="en-US" sz="1300" dirty="0">
+                <a:solidFill>
+                  <a:srgbClr val="9CDCFE"/>
+                </a:solidFill>
+                <a:latin typeface="Courier New" pitchFamily="34" charset="0"/>
+                <a:ea typeface="Courier New" pitchFamily="34" charset="-122"/>
+                <a:cs typeface="Courier New" pitchFamily="34" charset="-120"/>
+              </a:rPr>
+              <a:t>cpfFormatado</a:t>
+            </a:r>
+            <a:pPr indent="0" marL="0">
+              <a:buNone/>
+            </a:pPr>
+            <a:r>
+              <a:rPr lang="en-US" sz="1300" dirty="0">
+                <a:solidFill>
+                  <a:srgbClr val="CCCCCC"/>
+                </a:solidFill>
+                <a:latin typeface="Courier New" pitchFamily="34" charset="0"/>
+                <a:ea typeface="Courier New" pitchFamily="34" charset="-122"/>
+                <a:cs typeface="Courier New" pitchFamily="34" charset="-120"/>
+              </a:rPr>
+              <a:t> </a:t>
+            </a:r>
+            <a:pPr indent="0" marL="0">
+              <a:buNone/>
+            </a:pPr>
+            <a:r>
+              <a:rPr lang="en-US" sz="1300" dirty="0">
+                <a:solidFill>
+                  <a:srgbClr val="569CD6"/>
+                </a:solidFill>
+                <a:latin typeface="Courier New" pitchFamily="34" charset="0"/>
+                <a:ea typeface="Courier New" pitchFamily="34" charset="-122"/>
+                <a:cs typeface="Courier New" pitchFamily="34" charset="-120"/>
+              </a:rPr>
+              <a:t>as</a:t>
+            </a:r>
+            <a:pPr indent="0" marL="0">
+              <a:buNone/>
+            </a:pPr>
+            <a:r>
+              <a:rPr lang="en-US" sz="1300" dirty="0">
+                <a:solidFill>
+                  <a:srgbClr val="CCCCCC"/>
+                </a:solidFill>
+                <a:latin typeface="Courier New" pitchFamily="34" charset="0"/>
+                <a:ea typeface="Courier New" pitchFamily="34" charset="-122"/>
+                <a:cs typeface="Courier New" pitchFamily="34" charset="-120"/>
+              </a:rPr>
+              <a:t> </a:t>
+            </a:r>
+            <a:pPr indent="0" marL="0">
+              <a:buNone/>
+            </a:pPr>
+            <a:r>
+              <a:rPr lang="en-US" sz="1300" dirty="0">
+                <a:solidFill>
+                  <a:srgbClr val="9CDCFE"/>
+                </a:solidFill>
+                <a:latin typeface="Courier New" pitchFamily="34" charset="0"/>
+                <a:ea typeface="Courier New" pitchFamily="34" charset="-122"/>
+                <a:cs typeface="Courier New" pitchFamily="34" charset="-120"/>
+              </a:rPr>
+              <a:t>cpfClienteFormatado</a:t>
+            </a:r>
+            <a:pPr indent="0" marL="0">
+              <a:buNone/>
+            </a:pPr>
+            <a:r>
+              <a:rPr lang="en-US" sz="1300" dirty="0">
+                <a:solidFill>
+                  <a:srgbClr val="CCCCCC"/>
+                </a:solidFill>
+                <a:latin typeface="Courier New" pitchFamily="34" charset="0"/>
+                <a:ea typeface="Courier New" pitchFamily="34" charset="-122"/>
+                <a:cs typeface="Courier New" pitchFamily="34" charset="-120"/>
+              </a:rPr>
+              <a:t>,</a:t>
             </a:r>
             <a:endParaRPr lang="en-US" sz="1300" dirty="0"/>
           </a:p>
@@ -10835,13 +12885,167 @@
             <a:r>
               <a:rPr lang="en-US" sz="1300" dirty="0">
                 <a:solidFill>
-                  <a:srgbClr val="EAECEE"/>
-                </a:solidFill>
-                <a:latin typeface="Courier New" pitchFamily="34" charset="0"/>
-                <a:ea typeface="Courier New" pitchFamily="34" charset="-122"/>
-                <a:cs typeface="Courier New" pitchFamily="34" charset="-120"/>
-              </a:rPr>
-              <a:t>    case when exists reembolsos then false</a:t>
+                  <a:srgbClr val="CCCCCC"/>
+                </a:solidFill>
+                <a:latin typeface="Courier New" pitchFamily="34" charset="0"/>
+                <a:ea typeface="Courier New" pitchFamily="34" charset="-122"/>
+                <a:cs typeface="Courier New" pitchFamily="34" charset="-120"/>
+              </a:rPr>
+              <a:t>    </a:t>
+            </a:r>
+            <a:pPr indent="0" marL="0">
+              <a:buNone/>
+            </a:pPr>
+            <a:r>
+              <a:rPr lang="en-US" sz="1300" dirty="0">
+                <a:solidFill>
+                  <a:srgbClr val="C586C0"/>
+                </a:solidFill>
+                <a:latin typeface="Courier New" pitchFamily="34" charset="0"/>
+                <a:ea typeface="Courier New" pitchFamily="34" charset="-122"/>
+                <a:cs typeface="Courier New" pitchFamily="34" charset="-120"/>
+              </a:rPr>
+              <a:t>case</a:t>
+            </a:r>
+            <a:pPr indent="0" marL="0">
+              <a:buNone/>
+            </a:pPr>
+            <a:r>
+              <a:rPr lang="en-US" sz="1300" dirty="0">
+                <a:solidFill>
+                  <a:srgbClr val="CCCCCC"/>
+                </a:solidFill>
+                <a:latin typeface="Courier New" pitchFamily="34" charset="0"/>
+                <a:ea typeface="Courier New" pitchFamily="34" charset="-122"/>
+                <a:cs typeface="Courier New" pitchFamily="34" charset="-120"/>
+              </a:rPr>
+              <a:t> </a:t>
+            </a:r>
+            <a:pPr indent="0" marL="0">
+              <a:buNone/>
+            </a:pPr>
+            <a:r>
+              <a:rPr lang="en-US" sz="1300" dirty="0">
+                <a:solidFill>
+                  <a:srgbClr val="C586C0"/>
+                </a:solidFill>
+                <a:latin typeface="Courier New" pitchFamily="34" charset="0"/>
+                <a:ea typeface="Courier New" pitchFamily="34" charset="-122"/>
+                <a:cs typeface="Courier New" pitchFamily="34" charset="-120"/>
+              </a:rPr>
+              <a:t>when</a:t>
+            </a:r>
+            <a:pPr indent="0" marL="0">
+              <a:buNone/>
+            </a:pPr>
+            <a:r>
+              <a:rPr lang="en-US" sz="1300" dirty="0">
+                <a:solidFill>
+                  <a:srgbClr val="CCCCCC"/>
+                </a:solidFill>
+                <a:latin typeface="Courier New" pitchFamily="34" charset="0"/>
+                <a:ea typeface="Courier New" pitchFamily="34" charset="-122"/>
+                <a:cs typeface="Courier New" pitchFamily="34" charset="-120"/>
+              </a:rPr>
+              <a:t> </a:t>
+            </a:r>
+            <a:pPr indent="0" marL="0">
+              <a:buNone/>
+            </a:pPr>
+            <a:r>
+              <a:rPr lang="en-US" sz="1300" dirty="0">
+                <a:solidFill>
+                  <a:srgbClr val="569CD6"/>
+                </a:solidFill>
+                <a:latin typeface="Courier New" pitchFamily="34" charset="0"/>
+                <a:ea typeface="Courier New" pitchFamily="34" charset="-122"/>
+                <a:cs typeface="Courier New" pitchFamily="34" charset="-120"/>
+              </a:rPr>
+              <a:t>exists</a:t>
+            </a:r>
+            <a:pPr indent="0" marL="0">
+              <a:buNone/>
+            </a:pPr>
+            <a:r>
+              <a:rPr lang="en-US" sz="1300" dirty="0">
+                <a:solidFill>
+                  <a:srgbClr val="CCCCCC"/>
+                </a:solidFill>
+                <a:latin typeface="Courier New" pitchFamily="34" charset="0"/>
+                <a:ea typeface="Courier New" pitchFamily="34" charset="-122"/>
+                <a:cs typeface="Courier New" pitchFamily="34" charset="-120"/>
+              </a:rPr>
+              <a:t> </a:t>
+            </a:r>
+            <a:pPr indent="0" marL="0">
+              <a:buNone/>
+            </a:pPr>
+            <a:r>
+              <a:rPr lang="en-US" sz="1300" dirty="0">
+                <a:solidFill>
+                  <a:srgbClr val="9CDCFE"/>
+                </a:solidFill>
+                <a:latin typeface="Courier New" pitchFamily="34" charset="0"/>
+                <a:ea typeface="Courier New" pitchFamily="34" charset="-122"/>
+                <a:cs typeface="Courier New" pitchFamily="34" charset="-120"/>
+              </a:rPr>
+              <a:t>reembolsos</a:t>
+            </a:r>
+            <a:pPr indent="0" marL="0">
+              <a:buNone/>
+            </a:pPr>
+            <a:r>
+              <a:rPr lang="en-US" sz="1300" dirty="0">
+                <a:solidFill>
+                  <a:srgbClr val="CCCCCC"/>
+                </a:solidFill>
+                <a:latin typeface="Courier New" pitchFamily="34" charset="0"/>
+                <a:ea typeface="Courier New" pitchFamily="34" charset="-122"/>
+                <a:cs typeface="Courier New" pitchFamily="34" charset="-120"/>
+              </a:rPr>
+              <a:t> </a:t>
+            </a:r>
+            <a:pPr indent="0" marL="0">
+              <a:buNone/>
+            </a:pPr>
+            <a:r>
+              <a:rPr lang="en-US" sz="1300" dirty="0">
+                <a:solidFill>
+                  <a:srgbClr val="C586C0"/>
+                </a:solidFill>
+                <a:latin typeface="Courier New" pitchFamily="34" charset="0"/>
+                <a:ea typeface="Courier New" pitchFamily="34" charset="-122"/>
+                <a:cs typeface="Courier New" pitchFamily="34" charset="-120"/>
+              </a:rPr>
+              <a:t>then</a:t>
+            </a:r>
+            <a:pPr indent="0" marL="0">
+              <a:buNone/>
+            </a:pPr>
+            <a:r>
+              <a:rPr lang="en-US" sz="1300" dirty="0">
+                <a:solidFill>
+                  <a:srgbClr val="CCCCCC"/>
+                </a:solidFill>
+                <a:latin typeface="Courier New" pitchFamily="34" charset="0"/>
+                <a:ea typeface="Courier New" pitchFamily="34" charset="-122"/>
+                <a:cs typeface="Courier New" pitchFamily="34" charset="-120"/>
+              </a:rPr>
+              <a:t> </a:t>
+            </a:r>
+            <a:pPr indent="0" marL="0">
+              <a:buNone/>
+            </a:pPr>
+            <a:r>
+              <a:rPr lang="en-US" sz="1300" dirty="0">
+                <a:solidFill>
+                  <a:srgbClr val="569CD6"/>
+                </a:solidFill>
+                <a:latin typeface="Courier New" pitchFamily="34" charset="0"/>
+                <a:ea typeface="Courier New" pitchFamily="34" charset="-122"/>
+                <a:cs typeface="Courier New" pitchFamily="34" charset="-120"/>
+              </a:rPr>
+              <a:t>false</a:t>
             </a:r>
             <a:endParaRPr lang="en-US" sz="1300" dirty="0"/>
           </a:p>
@@ -10852,13 +13056,167 @@
             <a:r>
               <a:rPr lang="en-US" sz="1300" dirty="0">
                 <a:solidFill>
-                  <a:srgbClr val="EAECEE"/>
-                </a:solidFill>
-                <a:latin typeface="Courier New" pitchFamily="34" charset="0"/>
-                <a:ea typeface="Courier New" pitchFamily="34" charset="-122"/>
-                <a:cs typeface="Courier New" pitchFamily="34" charset="-120"/>
-              </a:rPr>
-              <a:t>         else true end   as semReembolso : Boolean</a:t>
+                  <a:srgbClr val="CCCCCC"/>
+                </a:solidFill>
+                <a:latin typeface="Courier New" pitchFamily="34" charset="0"/>
+                <a:ea typeface="Courier New" pitchFamily="34" charset="-122"/>
+                <a:cs typeface="Courier New" pitchFamily="34" charset="-120"/>
+              </a:rPr>
+              <a:t>         </a:t>
+            </a:r>
+            <a:pPr indent="0" marL="0">
+              <a:buNone/>
+            </a:pPr>
+            <a:r>
+              <a:rPr lang="en-US" sz="1300" dirty="0">
+                <a:solidFill>
+                  <a:srgbClr val="C586C0"/>
+                </a:solidFill>
+                <a:latin typeface="Courier New" pitchFamily="34" charset="0"/>
+                <a:ea typeface="Courier New" pitchFamily="34" charset="-122"/>
+                <a:cs typeface="Courier New" pitchFamily="34" charset="-120"/>
+              </a:rPr>
+              <a:t>else</a:t>
+            </a:r>
+            <a:pPr indent="0" marL="0">
+              <a:buNone/>
+            </a:pPr>
+            <a:r>
+              <a:rPr lang="en-US" sz="1300" dirty="0">
+                <a:solidFill>
+                  <a:srgbClr val="CCCCCC"/>
+                </a:solidFill>
+                <a:latin typeface="Courier New" pitchFamily="34" charset="0"/>
+                <a:ea typeface="Courier New" pitchFamily="34" charset="-122"/>
+                <a:cs typeface="Courier New" pitchFamily="34" charset="-120"/>
+              </a:rPr>
+              <a:t> </a:t>
+            </a:r>
+            <a:pPr indent="0" marL="0">
+              <a:buNone/>
+            </a:pPr>
+            <a:r>
+              <a:rPr lang="en-US" sz="1300" dirty="0">
+                <a:solidFill>
+                  <a:srgbClr val="569CD6"/>
+                </a:solidFill>
+                <a:latin typeface="Courier New" pitchFamily="34" charset="0"/>
+                <a:ea typeface="Courier New" pitchFamily="34" charset="-122"/>
+                <a:cs typeface="Courier New" pitchFamily="34" charset="-120"/>
+              </a:rPr>
+              <a:t>true</a:t>
+            </a:r>
+            <a:pPr indent="0" marL="0">
+              <a:buNone/>
+            </a:pPr>
+            <a:r>
+              <a:rPr lang="en-US" sz="1300" dirty="0">
+                <a:solidFill>
+                  <a:srgbClr val="CCCCCC"/>
+                </a:solidFill>
+                <a:latin typeface="Courier New" pitchFamily="34" charset="0"/>
+                <a:ea typeface="Courier New" pitchFamily="34" charset="-122"/>
+                <a:cs typeface="Courier New" pitchFamily="34" charset="-120"/>
+              </a:rPr>
+              <a:t> </a:t>
+            </a:r>
+            <a:pPr indent="0" marL="0">
+              <a:buNone/>
+            </a:pPr>
+            <a:r>
+              <a:rPr lang="en-US" sz="1300" dirty="0">
+                <a:solidFill>
+                  <a:srgbClr val="C586C0"/>
+                </a:solidFill>
+                <a:latin typeface="Courier New" pitchFamily="34" charset="0"/>
+                <a:ea typeface="Courier New" pitchFamily="34" charset="-122"/>
+                <a:cs typeface="Courier New" pitchFamily="34" charset="-120"/>
+              </a:rPr>
+              <a:t>end</a:t>
+            </a:r>
+            <a:pPr indent="0" marL="0">
+              <a:buNone/>
+            </a:pPr>
+            <a:r>
+              <a:rPr lang="en-US" sz="1300" dirty="0">
+                <a:solidFill>
+                  <a:srgbClr val="CCCCCC"/>
+                </a:solidFill>
+                <a:latin typeface="Courier New" pitchFamily="34" charset="0"/>
+                <a:ea typeface="Courier New" pitchFamily="34" charset="-122"/>
+                <a:cs typeface="Courier New" pitchFamily="34" charset="-120"/>
+              </a:rPr>
+              <a:t>   </a:t>
+            </a:r>
+            <a:pPr indent="0" marL="0">
+              <a:buNone/>
+            </a:pPr>
+            <a:r>
+              <a:rPr lang="en-US" sz="1300" dirty="0">
+                <a:solidFill>
+                  <a:srgbClr val="569CD6"/>
+                </a:solidFill>
+                <a:latin typeface="Courier New" pitchFamily="34" charset="0"/>
+                <a:ea typeface="Courier New" pitchFamily="34" charset="-122"/>
+                <a:cs typeface="Courier New" pitchFamily="34" charset="-120"/>
+              </a:rPr>
+              <a:t>as</a:t>
+            </a:r>
+            <a:pPr indent="0" marL="0">
+              <a:buNone/>
+            </a:pPr>
+            <a:r>
+              <a:rPr lang="en-US" sz="1300" dirty="0">
+                <a:solidFill>
+                  <a:srgbClr val="CCCCCC"/>
+                </a:solidFill>
+                <a:latin typeface="Courier New" pitchFamily="34" charset="0"/>
+                <a:ea typeface="Courier New" pitchFamily="34" charset="-122"/>
+                <a:cs typeface="Courier New" pitchFamily="34" charset="-120"/>
+              </a:rPr>
+              <a:t> </a:t>
+            </a:r>
+            <a:pPr indent="0" marL="0">
+              <a:buNone/>
+            </a:pPr>
+            <a:r>
+              <a:rPr lang="en-US" sz="1300" dirty="0">
+                <a:solidFill>
+                  <a:srgbClr val="9CDCFE"/>
+                </a:solidFill>
+                <a:latin typeface="Courier New" pitchFamily="34" charset="0"/>
+                <a:ea typeface="Courier New" pitchFamily="34" charset="-122"/>
+                <a:cs typeface="Courier New" pitchFamily="34" charset="-120"/>
+              </a:rPr>
+              <a:t>semReembolso</a:t>
+            </a:r>
+            <a:pPr indent="0" marL="0">
+              <a:buNone/>
+            </a:pPr>
+            <a:r>
+              <a:rPr lang="en-US" sz="1300" dirty="0">
+                <a:solidFill>
+                  <a:srgbClr val="CCCCCC"/>
+                </a:solidFill>
+                <a:latin typeface="Courier New" pitchFamily="34" charset="0"/>
+                <a:ea typeface="Courier New" pitchFamily="34" charset="-122"/>
+                <a:cs typeface="Courier New" pitchFamily="34" charset="-120"/>
+              </a:rPr>
+              <a:t> : </a:t>
+            </a:r>
+            <a:pPr indent="0" marL="0">
+              <a:buNone/>
+            </a:pPr>
+            <a:r>
+              <a:rPr lang="en-US" sz="1300" dirty="0">
+                <a:solidFill>
+                  <a:srgbClr val="4EC9B0"/>
+                </a:solidFill>
+                <a:latin typeface="Courier New" pitchFamily="34" charset="0"/>
+                <a:ea typeface="Courier New" pitchFamily="34" charset="-122"/>
+                <a:cs typeface="Courier New" pitchFamily="34" charset="-120"/>
+              </a:rPr>
+              <a:t>Boolean</a:t>
             </a:r>
             <a:endParaRPr lang="en-US" sz="1300" dirty="0"/>
           </a:p>
@@ -10869,13 +13227,153 @@
             <a:r>
               <a:rPr lang="en-US" sz="1300" dirty="0">
                 <a:solidFill>
-                  <a:srgbClr val="EAECEE"/>
-                </a:solidFill>
-                <a:latin typeface="Courier New" pitchFamily="34" charset="0"/>
-                <a:ea typeface="Courier New" pitchFamily="34" charset="-122"/>
-                <a:cs typeface="Courier New" pitchFamily="34" charset="-120"/>
-              </a:rPr>
-              <a:t>  } excluding { reembolsos };</a:t>
+                  <a:srgbClr val="CCCCCC"/>
+                </a:solidFill>
+                <a:latin typeface="Courier New" pitchFamily="34" charset="0"/>
+                <a:ea typeface="Courier New" pitchFamily="34" charset="-122"/>
+                <a:cs typeface="Courier New" pitchFamily="34" charset="-120"/>
+              </a:rPr>
+              <a:t>  </a:t>
+            </a:r>
+            <a:pPr indent="0" marL="0">
+              <a:buNone/>
+            </a:pPr>
+            <a:r>
+              <a:rPr lang="en-US" sz="1300" dirty="0">
+                <a:solidFill>
+                  <a:srgbClr val="DA70D6"/>
+                </a:solidFill>
+                <a:latin typeface="Courier New" pitchFamily="34" charset="0"/>
+                <a:ea typeface="Courier New" pitchFamily="34" charset="-122"/>
+                <a:cs typeface="Courier New" pitchFamily="34" charset="-120"/>
+              </a:rPr>
+              <a:t>}</a:t>
+            </a:r>
+            <a:pPr indent="0" marL="0">
+              <a:buNone/>
+            </a:pPr>
+            <a:r>
+              <a:rPr lang="en-US" sz="1300" dirty="0">
+                <a:solidFill>
+                  <a:srgbClr val="CCCCCC"/>
+                </a:solidFill>
+                <a:latin typeface="Courier New" pitchFamily="34" charset="0"/>
+                <a:ea typeface="Courier New" pitchFamily="34" charset="-122"/>
+                <a:cs typeface="Courier New" pitchFamily="34" charset="-120"/>
+              </a:rPr>
+              <a:t> </a:t>
+            </a:r>
+            <a:pPr indent="0" marL="0">
+              <a:buNone/>
+            </a:pPr>
+            <a:r>
+              <a:rPr lang="en-US" sz="1300" dirty="0">
+                <a:solidFill>
+                  <a:srgbClr val="C586C0"/>
+                </a:solidFill>
+                <a:latin typeface="Courier New" pitchFamily="34" charset="0"/>
+                <a:ea typeface="Courier New" pitchFamily="34" charset="-122"/>
+                <a:cs typeface="Courier New" pitchFamily="34" charset="-120"/>
+              </a:rPr>
+              <a:t>excluding</a:t>
+            </a:r>
+            <a:pPr indent="0" marL="0">
+              <a:buNone/>
+            </a:pPr>
+            <a:r>
+              <a:rPr lang="en-US" sz="1300" dirty="0">
+                <a:solidFill>
+                  <a:srgbClr val="CCCCCC"/>
+                </a:solidFill>
+                <a:latin typeface="Courier New" pitchFamily="34" charset="0"/>
+                <a:ea typeface="Courier New" pitchFamily="34" charset="-122"/>
+                <a:cs typeface="Courier New" pitchFamily="34" charset="-120"/>
+              </a:rPr>
+              <a:t> </a:t>
+            </a:r>
+            <a:pPr indent="0" marL="0">
+              <a:buNone/>
+            </a:pPr>
+            <a:r>
+              <a:rPr lang="en-US" sz="1300" dirty="0">
+                <a:solidFill>
+                  <a:srgbClr val="DA70D6"/>
+                </a:solidFill>
+                <a:latin typeface="Courier New" pitchFamily="34" charset="0"/>
+                <a:ea typeface="Courier New" pitchFamily="34" charset="-122"/>
+                <a:cs typeface="Courier New" pitchFamily="34" charset="-120"/>
+              </a:rPr>
+              <a:t>{</a:t>
+            </a:r>
+            <a:pPr indent="0" marL="0">
+              <a:buNone/>
+            </a:pPr>
+            <a:r>
+              <a:rPr lang="en-US" sz="1300" dirty="0">
+                <a:solidFill>
+                  <a:srgbClr val="CCCCCC"/>
+                </a:solidFill>
+                <a:latin typeface="Courier New" pitchFamily="34" charset="0"/>
+                <a:ea typeface="Courier New" pitchFamily="34" charset="-122"/>
+                <a:cs typeface="Courier New" pitchFamily="34" charset="-120"/>
+              </a:rPr>
+              <a:t> </a:t>
+            </a:r>
+            <a:pPr indent="0" marL="0">
+              <a:buNone/>
+            </a:pPr>
+            <a:r>
+              <a:rPr lang="en-US" sz="1300" dirty="0">
+                <a:solidFill>
+                  <a:srgbClr val="9CDCFE"/>
+                </a:solidFill>
+                <a:latin typeface="Courier New" pitchFamily="34" charset="0"/>
+                <a:ea typeface="Courier New" pitchFamily="34" charset="-122"/>
+                <a:cs typeface="Courier New" pitchFamily="34" charset="-120"/>
+              </a:rPr>
+              <a:t>reembolsos</a:t>
+            </a:r>
+            <a:pPr indent="0" marL="0">
+              <a:buNone/>
+            </a:pPr>
+            <a:r>
+              <a:rPr lang="en-US" sz="1300" dirty="0">
+                <a:solidFill>
+                  <a:srgbClr val="CCCCCC"/>
+                </a:solidFill>
+                <a:latin typeface="Courier New" pitchFamily="34" charset="0"/>
+                <a:ea typeface="Courier New" pitchFamily="34" charset="-122"/>
+                <a:cs typeface="Courier New" pitchFamily="34" charset="-120"/>
+              </a:rPr>
+              <a:t> </a:t>
+            </a:r>
+            <a:pPr indent="0" marL="0">
+              <a:buNone/>
+            </a:pPr>
+            <a:r>
+              <a:rPr lang="en-US" sz="1300" dirty="0">
+                <a:solidFill>
+                  <a:srgbClr val="DA70D6"/>
+                </a:solidFill>
+                <a:latin typeface="Courier New" pitchFamily="34" charset="0"/>
+                <a:ea typeface="Courier New" pitchFamily="34" charset="-122"/>
+                <a:cs typeface="Courier New" pitchFamily="34" charset="-120"/>
+              </a:rPr>
+              <a:t>}</a:t>
+            </a:r>
+            <a:pPr indent="0" marL="0">
+              <a:buNone/>
+            </a:pPr>
+            <a:r>
+              <a:rPr lang="en-US" sz="1300" dirty="0">
+                <a:solidFill>
+                  <a:srgbClr val="CCCCCC"/>
+                </a:solidFill>
+                <a:latin typeface="Courier New" pitchFamily="34" charset="0"/>
+                <a:ea typeface="Courier New" pitchFamily="34" charset="-122"/>
+                <a:cs typeface="Courier New" pitchFamily="34" charset="-120"/>
+              </a:rPr>
+              <a:t>;</a:t>
             </a:r>
             <a:endParaRPr lang="en-US" sz="1300" dirty="0"/>
           </a:p>
@@ -10886,7 +13384,7 @@
             <a:r>
               <a:rPr lang="en-US" sz="1300" dirty="0">
                 <a:solidFill>
-                  <a:srgbClr val="EAECEE"/>
+                  <a:srgbClr val="FFD700"/>
                 </a:solidFill>
                 <a:latin typeface="Courier New" pitchFamily="34" charset="0"/>
                 <a:ea typeface="Courier New" pitchFamily="34" charset="-122"/>
@@ -12752,9 +15250,14 @@
             </a:avLst>
           </a:prstGeom>
           <a:solidFill>
-            <a:srgbClr val="1D2D3E"/>
+            <a:srgbClr val="1F1F1F"/>
           </a:solidFill>
-          <a:ln/>
+          <a:ln w="9525">
+            <a:solidFill>
+              <a:srgbClr val="2B2B2B"/>
+            </a:solidFill>
+            <a:prstDash val="solid"/>
+          </a:ln>
           <a:effectLst>
             <a:outerShdw sx="100000" sy="100000" kx="0" ky="0" algn="bl" rotWithShape="0" blurRad="101600" dist="25400" dir="5400000">
               <a:srgbClr val="223649">
@@ -12791,13 +15294,41 @@
             <a:r>
               <a:rPr lang="en-US" sz="1300" dirty="0">
                 <a:solidFill>
-                  <a:srgbClr val="EAECEE"/>
-                </a:solidFill>
-                <a:latin typeface="Courier New" pitchFamily="34" charset="0"/>
-                <a:ea typeface="Courier New" pitchFamily="34" charset="-122"/>
-                <a:cs typeface="Courier New" pitchFamily="34" charset="-120"/>
-              </a:rPr>
-              <a:t>actions {</a:t>
+                  <a:srgbClr val="569CD6"/>
+                </a:solidFill>
+                <a:latin typeface="Courier New" pitchFamily="34" charset="0"/>
+                <a:ea typeface="Courier New" pitchFamily="34" charset="-122"/>
+                <a:cs typeface="Courier New" pitchFamily="34" charset="-120"/>
+              </a:rPr>
+              <a:t>actions</a:t>
+            </a:r>
+            <a:pPr indent="0" marL="0">
+              <a:buNone/>
+            </a:pPr>
+            <a:r>
+              <a:rPr lang="en-US" sz="1300" dirty="0">
+                <a:solidFill>
+                  <a:srgbClr val="CCCCCC"/>
+                </a:solidFill>
+                <a:latin typeface="Courier New" pitchFamily="34" charset="0"/>
+                <a:ea typeface="Courier New" pitchFamily="34" charset="-122"/>
+                <a:cs typeface="Courier New" pitchFamily="34" charset="-120"/>
+              </a:rPr>
+              <a:t> </a:t>
+            </a:r>
+            <a:pPr indent="0" marL="0">
+              <a:buNone/>
+            </a:pPr>
+            <a:r>
+              <a:rPr lang="en-US" sz="1300" dirty="0">
+                <a:solidFill>
+                  <a:srgbClr val="FFD700"/>
+                </a:solidFill>
+                <a:latin typeface="Courier New" pitchFamily="34" charset="0"/>
+                <a:ea typeface="Courier New" pitchFamily="34" charset="-122"/>
+                <a:cs typeface="Courier New" pitchFamily="34" charset="-120"/>
+              </a:rPr>
+              <a:t>{</a:t>
             </a:r>
             <a:endParaRPr lang="en-US" sz="1300" dirty="0"/>
           </a:p>
@@ -12808,13 +15339,27 @@
             <a:r>
               <a:rPr lang="en-US" sz="1300" dirty="0">
                 <a:solidFill>
-                  <a:srgbClr val="89D1FF"/>
-                </a:solidFill>
-                <a:latin typeface="Courier New" pitchFamily="34" charset="0"/>
-                <a:ea typeface="Courier New" pitchFamily="34" charset="-122"/>
-                <a:cs typeface="Courier New" pitchFamily="34" charset="-120"/>
-              </a:rPr>
-              <a:t>  @(</a:t>
+                  <a:srgbClr val="CCCCCC"/>
+                </a:solidFill>
+                <a:latin typeface="Courier New" pitchFamily="34" charset="0"/>
+                <a:ea typeface="Courier New" pitchFamily="34" charset="-122"/>
+                <a:cs typeface="Courier New" pitchFamily="34" charset="-120"/>
+              </a:rPr>
+              <a:t>  @</a:t>
+            </a:r>
+            <a:pPr indent="0" marL="0">
+              <a:buNone/>
+            </a:pPr>
+            <a:r>
+              <a:rPr lang="en-US" sz="1300" dirty="0">
+                <a:solidFill>
+                  <a:srgbClr val="DA70D6"/>
+                </a:solidFill>
+                <a:latin typeface="Courier New" pitchFamily="34" charset="0"/>
+                <a:ea typeface="Courier New" pitchFamily="34" charset="-122"/>
+                <a:cs typeface="Courier New" pitchFamily="34" charset="-120"/>
+              </a:rPr>
+              <a:t>(</a:t>
             </a:r>
             <a:endParaRPr lang="en-US" sz="1300" dirty="0"/>
           </a:p>
@@ -12825,13 +15370,69 @@
             <a:r>
               <a:rPr lang="en-US" sz="1300" dirty="0">
                 <a:solidFill>
-                  <a:srgbClr val="EAECEE"/>
-                </a:solidFill>
-                <a:latin typeface="Courier New" pitchFamily="34" charset="0"/>
-                <a:ea typeface="Courier New" pitchFamily="34" charset="-122"/>
-                <a:cs typeface="Courier New" pitchFamily="34" charset="-120"/>
-              </a:rPr>
-              <a:t>    Core.OperationAvailable:</a:t>
+                  <a:srgbClr val="CCCCCC"/>
+                </a:solidFill>
+                <a:latin typeface="Courier New" pitchFamily="34" charset="0"/>
+                <a:ea typeface="Courier New" pitchFamily="34" charset="-122"/>
+                <a:cs typeface="Courier New" pitchFamily="34" charset="-120"/>
+              </a:rPr>
+              <a:t>    </a:t>
+            </a:r>
+            <a:pPr indent="0" marL="0">
+              <a:buNone/>
+            </a:pPr>
+            <a:r>
+              <a:rPr lang="en-US" sz="1300" dirty="0">
+                <a:solidFill>
+                  <a:srgbClr val="4EC9B0"/>
+                </a:solidFill>
+                <a:latin typeface="Courier New" pitchFamily="34" charset="0"/>
+                <a:ea typeface="Courier New" pitchFamily="34" charset="-122"/>
+                <a:cs typeface="Courier New" pitchFamily="34" charset="-120"/>
+              </a:rPr>
+              <a:t>Core</a:t>
+            </a:r>
+            <a:pPr indent="0" marL="0">
+              <a:buNone/>
+            </a:pPr>
+            <a:r>
+              <a:rPr lang="en-US" sz="1300" dirty="0">
+                <a:solidFill>
+                  <a:srgbClr val="CCCCCC"/>
+                </a:solidFill>
+                <a:latin typeface="Courier New" pitchFamily="34" charset="0"/>
+                <a:ea typeface="Courier New" pitchFamily="34" charset="-122"/>
+                <a:cs typeface="Courier New" pitchFamily="34" charset="-120"/>
+              </a:rPr>
+              <a:t>.</a:t>
+            </a:r>
+            <a:pPr indent="0" marL="0">
+              <a:buNone/>
+            </a:pPr>
+            <a:r>
+              <a:rPr lang="en-US" sz="1300" dirty="0">
+                <a:solidFill>
+                  <a:srgbClr val="4EC9B0"/>
+                </a:solidFill>
+                <a:latin typeface="Courier New" pitchFamily="34" charset="0"/>
+                <a:ea typeface="Courier New" pitchFamily="34" charset="-122"/>
+                <a:cs typeface="Courier New" pitchFamily="34" charset="-120"/>
+              </a:rPr>
+              <a:t>OperationAvailable</a:t>
+            </a:r>
+            <a:pPr indent="0" marL="0">
+              <a:buNone/>
+            </a:pPr>
+            <a:r>
+              <a:rPr lang="en-US" sz="1300" dirty="0">
+                <a:solidFill>
+                  <a:srgbClr val="CCCCCC"/>
+                </a:solidFill>
+                <a:latin typeface="Courier New" pitchFamily="34" charset="0"/>
+                <a:ea typeface="Courier New" pitchFamily="34" charset="-122"/>
+                <a:cs typeface="Courier New" pitchFamily="34" charset="-120"/>
+              </a:rPr>
+              <a:t>:</a:t>
             </a:r>
             <a:endParaRPr lang="en-US" sz="1300" dirty="0"/>
           </a:p>
@@ -12842,13 +15443,153 @@
             <a:r>
               <a:rPr lang="en-US" sz="1300" dirty="0">
                 <a:solidFill>
-                  <a:srgbClr val="EAECEE"/>
-                </a:solidFill>
-                <a:latin typeface="Courier New" pitchFamily="34" charset="0"/>
-                <a:ea typeface="Courier New" pitchFamily="34" charset="-122"/>
-                <a:cs typeface="Courier New" pitchFamily="34" charset="-120"/>
-              </a:rPr>
-              <a:t>      ($self.statusPedido.code = 'ABERTO'),</a:t>
+                  <a:srgbClr val="CCCCCC"/>
+                </a:solidFill>
+                <a:latin typeface="Courier New" pitchFamily="34" charset="0"/>
+                <a:ea typeface="Courier New" pitchFamily="34" charset="-122"/>
+                <a:cs typeface="Courier New" pitchFamily="34" charset="-120"/>
+              </a:rPr>
+              <a:t>      </a:t>
+            </a:r>
+            <a:pPr indent="0" marL="0">
+              <a:buNone/>
+            </a:pPr>
+            <a:r>
+              <a:rPr lang="en-US" sz="1300" dirty="0">
+                <a:solidFill>
+                  <a:srgbClr val="179FFF"/>
+                </a:solidFill>
+                <a:latin typeface="Courier New" pitchFamily="34" charset="0"/>
+                <a:ea typeface="Courier New" pitchFamily="34" charset="-122"/>
+                <a:cs typeface="Courier New" pitchFamily="34" charset="-120"/>
+              </a:rPr>
+              <a:t>(</a:t>
+            </a:r>
+            <a:pPr indent="0" marL="0">
+              <a:buNone/>
+            </a:pPr>
+            <a:r>
+              <a:rPr lang="en-US" sz="1300" dirty="0">
+                <a:solidFill>
+                  <a:srgbClr val="569CD6"/>
+                </a:solidFill>
+                <a:latin typeface="Courier New" pitchFamily="34" charset="0"/>
+                <a:ea typeface="Courier New" pitchFamily="34" charset="-122"/>
+                <a:cs typeface="Courier New" pitchFamily="34" charset="-120"/>
+              </a:rPr>
+              <a:t>$self</a:t>
+            </a:r>
+            <a:pPr indent="0" marL="0">
+              <a:buNone/>
+            </a:pPr>
+            <a:r>
+              <a:rPr lang="en-US" sz="1300" dirty="0">
+                <a:solidFill>
+                  <a:srgbClr val="CCCCCC"/>
+                </a:solidFill>
+                <a:latin typeface="Courier New" pitchFamily="34" charset="0"/>
+                <a:ea typeface="Courier New" pitchFamily="34" charset="-122"/>
+                <a:cs typeface="Courier New" pitchFamily="34" charset="-120"/>
+              </a:rPr>
+              <a:t>.</a:t>
+            </a:r>
+            <a:pPr indent="0" marL="0">
+              <a:buNone/>
+            </a:pPr>
+            <a:r>
+              <a:rPr lang="en-US" sz="1300" dirty="0">
+                <a:solidFill>
+                  <a:srgbClr val="9CDCFE"/>
+                </a:solidFill>
+                <a:latin typeface="Courier New" pitchFamily="34" charset="0"/>
+                <a:ea typeface="Courier New" pitchFamily="34" charset="-122"/>
+                <a:cs typeface="Courier New" pitchFamily="34" charset="-120"/>
+              </a:rPr>
+              <a:t>statusPedido</a:t>
+            </a:r>
+            <a:pPr indent="0" marL="0">
+              <a:buNone/>
+            </a:pPr>
+            <a:r>
+              <a:rPr lang="en-US" sz="1300" dirty="0">
+                <a:solidFill>
+                  <a:srgbClr val="CCCCCC"/>
+                </a:solidFill>
+                <a:latin typeface="Courier New" pitchFamily="34" charset="0"/>
+                <a:ea typeface="Courier New" pitchFamily="34" charset="-122"/>
+                <a:cs typeface="Courier New" pitchFamily="34" charset="-120"/>
+              </a:rPr>
+              <a:t>.</a:t>
+            </a:r>
+            <a:pPr indent="0" marL="0">
+              <a:buNone/>
+            </a:pPr>
+            <a:r>
+              <a:rPr lang="en-US" sz="1300" dirty="0">
+                <a:solidFill>
+                  <a:srgbClr val="9CDCFE"/>
+                </a:solidFill>
+                <a:latin typeface="Courier New" pitchFamily="34" charset="0"/>
+                <a:ea typeface="Courier New" pitchFamily="34" charset="-122"/>
+                <a:cs typeface="Courier New" pitchFamily="34" charset="-120"/>
+              </a:rPr>
+              <a:t>code</a:t>
+            </a:r>
+            <a:pPr indent="0" marL="0">
+              <a:buNone/>
+            </a:pPr>
+            <a:r>
+              <a:rPr lang="en-US" sz="1300" dirty="0">
+                <a:solidFill>
+                  <a:srgbClr val="CCCCCC"/>
+                </a:solidFill>
+                <a:latin typeface="Courier New" pitchFamily="34" charset="0"/>
+                <a:ea typeface="Courier New" pitchFamily="34" charset="-122"/>
+                <a:cs typeface="Courier New" pitchFamily="34" charset="-120"/>
+              </a:rPr>
+              <a:t> = </a:t>
+            </a:r>
+            <a:pPr indent="0" marL="0">
+              <a:buNone/>
+            </a:pPr>
+            <a:r>
+              <a:rPr lang="en-US" sz="1300" dirty="0">
+                <a:solidFill>
+                  <a:srgbClr val="CE9178"/>
+                </a:solidFill>
+                <a:latin typeface="Courier New" pitchFamily="34" charset="0"/>
+                <a:ea typeface="Courier New" pitchFamily="34" charset="-122"/>
+                <a:cs typeface="Courier New" pitchFamily="34" charset="-120"/>
+              </a:rPr>
+              <a:t>'ABERTO'</a:t>
+            </a:r>
+            <a:pPr indent="0" marL="0">
+              <a:buNone/>
+            </a:pPr>
+            <a:r>
+              <a:rPr lang="en-US" sz="1300" dirty="0">
+                <a:solidFill>
+                  <a:srgbClr val="179FFF"/>
+                </a:solidFill>
+                <a:latin typeface="Courier New" pitchFamily="34" charset="0"/>
+                <a:ea typeface="Courier New" pitchFamily="34" charset="-122"/>
+                <a:cs typeface="Courier New" pitchFamily="34" charset="-120"/>
+              </a:rPr>
+              <a:t>)</a:t>
+            </a:r>
+            <a:pPr indent="0" marL="0">
+              <a:buNone/>
+            </a:pPr>
+            <a:r>
+              <a:rPr lang="en-US" sz="1300" dirty="0">
+                <a:solidFill>
+                  <a:srgbClr val="CCCCCC"/>
+                </a:solidFill>
+                <a:latin typeface="Courier New" pitchFamily="34" charset="0"/>
+                <a:ea typeface="Courier New" pitchFamily="34" charset="-122"/>
+                <a:cs typeface="Courier New" pitchFamily="34" charset="-120"/>
+              </a:rPr>
+              <a:t>,</a:t>
             </a:r>
             <a:endParaRPr lang="en-US" sz="1300" dirty="0"/>
           </a:p>
@@ -12859,13 +15600,83 @@
             <a:r>
               <a:rPr lang="en-US" sz="1300" dirty="0">
                 <a:solidFill>
-                  <a:srgbClr val="EAECEE"/>
-                </a:solidFill>
-                <a:latin typeface="Courier New" pitchFamily="34" charset="0"/>
-                <a:ea typeface="Courier New" pitchFamily="34" charset="-122"/>
-                <a:cs typeface="Courier New" pitchFamily="34" charset="-120"/>
-              </a:rPr>
-              <a:t>    Common.SideEffects: {</a:t>
+                  <a:srgbClr val="CCCCCC"/>
+                </a:solidFill>
+                <a:latin typeface="Courier New" pitchFamily="34" charset="0"/>
+                <a:ea typeface="Courier New" pitchFamily="34" charset="-122"/>
+                <a:cs typeface="Courier New" pitchFamily="34" charset="-120"/>
+              </a:rPr>
+              <a:t>    </a:t>
+            </a:r>
+            <a:pPr indent="0" marL="0">
+              <a:buNone/>
+            </a:pPr>
+            <a:r>
+              <a:rPr lang="en-US" sz="1300" dirty="0">
+                <a:solidFill>
+                  <a:srgbClr val="4EC9B0"/>
+                </a:solidFill>
+                <a:latin typeface="Courier New" pitchFamily="34" charset="0"/>
+                <a:ea typeface="Courier New" pitchFamily="34" charset="-122"/>
+                <a:cs typeface="Courier New" pitchFamily="34" charset="-120"/>
+              </a:rPr>
+              <a:t>Common</a:t>
+            </a:r>
+            <a:pPr indent="0" marL="0">
+              <a:buNone/>
+            </a:pPr>
+            <a:r>
+              <a:rPr lang="en-US" sz="1300" dirty="0">
+                <a:solidFill>
+                  <a:srgbClr val="CCCCCC"/>
+                </a:solidFill>
+                <a:latin typeface="Courier New" pitchFamily="34" charset="0"/>
+                <a:ea typeface="Courier New" pitchFamily="34" charset="-122"/>
+                <a:cs typeface="Courier New" pitchFamily="34" charset="-120"/>
+              </a:rPr>
+              <a:t>.</a:t>
+            </a:r>
+            <a:pPr indent="0" marL="0">
+              <a:buNone/>
+            </a:pPr>
+            <a:r>
+              <a:rPr lang="en-US" sz="1300" dirty="0">
+                <a:solidFill>
+                  <a:srgbClr val="4EC9B0"/>
+                </a:solidFill>
+                <a:latin typeface="Courier New" pitchFamily="34" charset="0"/>
+                <a:ea typeface="Courier New" pitchFamily="34" charset="-122"/>
+                <a:cs typeface="Courier New" pitchFamily="34" charset="-120"/>
+              </a:rPr>
+              <a:t>SideEffects</a:t>
+            </a:r>
+            <a:pPr indent="0" marL="0">
+              <a:buNone/>
+            </a:pPr>
+            <a:r>
+              <a:rPr lang="en-US" sz="1300" dirty="0">
+                <a:solidFill>
+                  <a:srgbClr val="CCCCCC"/>
+                </a:solidFill>
+                <a:latin typeface="Courier New" pitchFamily="34" charset="0"/>
+                <a:ea typeface="Courier New" pitchFamily="34" charset="-122"/>
+                <a:cs typeface="Courier New" pitchFamily="34" charset="-120"/>
+              </a:rPr>
+              <a:t>: </a:t>
+            </a:r>
+            <a:pPr indent="0" marL="0">
+              <a:buNone/>
+            </a:pPr>
+            <a:r>
+              <a:rPr lang="en-US" sz="1300" dirty="0">
+                <a:solidFill>
+                  <a:srgbClr val="179FFF"/>
+                </a:solidFill>
+                <a:latin typeface="Courier New" pitchFamily="34" charset="0"/>
+                <a:ea typeface="Courier New" pitchFamily="34" charset="-122"/>
+                <a:cs typeface="Courier New" pitchFamily="34" charset="-120"/>
+              </a:rPr>
+              <a:t>{</a:t>
             </a:r>
             <a:endParaRPr lang="en-US" sz="1300" dirty="0"/>
           </a:p>
@@ -12876,13 +15687,167 @@
             <a:r>
               <a:rPr lang="en-US" sz="1300" dirty="0">
                 <a:solidFill>
-                  <a:srgbClr val="EAECEE"/>
-                </a:solidFill>
-                <a:latin typeface="Courier New" pitchFamily="34" charset="0"/>
-                <a:ea typeface="Courier New" pitchFamily="34" charset="-122"/>
-                <a:cs typeface="Courier New" pitchFamily="34" charset="-120"/>
-              </a:rPr>
-              <a:t>      TargetEntities: [in, in.pagamento] }</a:t>
+                  <a:srgbClr val="CCCCCC"/>
+                </a:solidFill>
+                <a:latin typeface="Courier New" pitchFamily="34" charset="0"/>
+                <a:ea typeface="Courier New" pitchFamily="34" charset="-122"/>
+                <a:cs typeface="Courier New" pitchFamily="34" charset="-120"/>
+              </a:rPr>
+              <a:t>      </a:t>
+            </a:r>
+            <a:pPr indent="0" marL="0">
+              <a:buNone/>
+            </a:pPr>
+            <a:r>
+              <a:rPr lang="en-US" sz="1300" dirty="0">
+                <a:solidFill>
+                  <a:srgbClr val="4EC9B0"/>
+                </a:solidFill>
+                <a:latin typeface="Courier New" pitchFamily="34" charset="0"/>
+                <a:ea typeface="Courier New" pitchFamily="34" charset="-122"/>
+                <a:cs typeface="Courier New" pitchFamily="34" charset="-120"/>
+              </a:rPr>
+              <a:t>TargetEntities</a:t>
+            </a:r>
+            <a:pPr indent="0" marL="0">
+              <a:buNone/>
+            </a:pPr>
+            <a:r>
+              <a:rPr lang="en-US" sz="1300" dirty="0">
+                <a:solidFill>
+                  <a:srgbClr val="CCCCCC"/>
+                </a:solidFill>
+                <a:latin typeface="Courier New" pitchFamily="34" charset="0"/>
+                <a:ea typeface="Courier New" pitchFamily="34" charset="-122"/>
+                <a:cs typeface="Courier New" pitchFamily="34" charset="-120"/>
+              </a:rPr>
+              <a:t>: </a:t>
+            </a:r>
+            <a:pPr indent="0" marL="0">
+              <a:buNone/>
+            </a:pPr>
+            <a:r>
+              <a:rPr lang="en-US" sz="1300" dirty="0">
+                <a:solidFill>
+                  <a:srgbClr val="FFD700"/>
+                </a:solidFill>
+                <a:latin typeface="Courier New" pitchFamily="34" charset="0"/>
+                <a:ea typeface="Courier New" pitchFamily="34" charset="-122"/>
+                <a:cs typeface="Courier New" pitchFamily="34" charset="-120"/>
+              </a:rPr>
+              <a:t>[</a:t>
+            </a:r>
+            <a:pPr indent="0" marL="0">
+              <a:buNone/>
+            </a:pPr>
+            <a:r>
+              <a:rPr lang="en-US" sz="1300" dirty="0">
+                <a:solidFill>
+                  <a:srgbClr val="569CD6"/>
+                </a:solidFill>
+                <a:latin typeface="Courier New" pitchFamily="34" charset="0"/>
+                <a:ea typeface="Courier New" pitchFamily="34" charset="-122"/>
+                <a:cs typeface="Courier New" pitchFamily="34" charset="-120"/>
+              </a:rPr>
+              <a:t>in</a:t>
+            </a:r>
+            <a:pPr indent="0" marL="0">
+              <a:buNone/>
+            </a:pPr>
+            <a:r>
+              <a:rPr lang="en-US" sz="1300" dirty="0">
+                <a:solidFill>
+                  <a:srgbClr val="CCCCCC"/>
+                </a:solidFill>
+                <a:latin typeface="Courier New" pitchFamily="34" charset="0"/>
+                <a:ea typeface="Courier New" pitchFamily="34" charset="-122"/>
+                <a:cs typeface="Courier New" pitchFamily="34" charset="-120"/>
+              </a:rPr>
+              <a:t>, </a:t>
+            </a:r>
+            <a:pPr indent="0" marL="0">
+              <a:buNone/>
+            </a:pPr>
+            <a:r>
+              <a:rPr lang="en-US" sz="1300" dirty="0">
+                <a:solidFill>
+                  <a:srgbClr val="569CD6"/>
+                </a:solidFill>
+                <a:latin typeface="Courier New" pitchFamily="34" charset="0"/>
+                <a:ea typeface="Courier New" pitchFamily="34" charset="-122"/>
+                <a:cs typeface="Courier New" pitchFamily="34" charset="-120"/>
+              </a:rPr>
+              <a:t>in</a:t>
+            </a:r>
+            <a:pPr indent="0" marL="0">
+              <a:buNone/>
+            </a:pPr>
+            <a:r>
+              <a:rPr lang="en-US" sz="1300" dirty="0">
+                <a:solidFill>
+                  <a:srgbClr val="CCCCCC"/>
+                </a:solidFill>
+                <a:latin typeface="Courier New" pitchFamily="34" charset="0"/>
+                <a:ea typeface="Courier New" pitchFamily="34" charset="-122"/>
+                <a:cs typeface="Courier New" pitchFamily="34" charset="-120"/>
+              </a:rPr>
+              <a:t>.</a:t>
+            </a:r>
+            <a:pPr indent="0" marL="0">
+              <a:buNone/>
+            </a:pPr>
+            <a:r>
+              <a:rPr lang="en-US" sz="1300" dirty="0">
+                <a:solidFill>
+                  <a:srgbClr val="9CDCFE"/>
+                </a:solidFill>
+                <a:latin typeface="Courier New" pitchFamily="34" charset="0"/>
+                <a:ea typeface="Courier New" pitchFamily="34" charset="-122"/>
+                <a:cs typeface="Courier New" pitchFamily="34" charset="-120"/>
+              </a:rPr>
+              <a:t>pagamento</a:t>
+            </a:r>
+            <a:pPr indent="0" marL="0">
+              <a:buNone/>
+            </a:pPr>
+            <a:r>
+              <a:rPr lang="en-US" sz="1300" dirty="0">
+                <a:solidFill>
+                  <a:srgbClr val="FFD700"/>
+                </a:solidFill>
+                <a:latin typeface="Courier New" pitchFamily="34" charset="0"/>
+                <a:ea typeface="Courier New" pitchFamily="34" charset="-122"/>
+                <a:cs typeface="Courier New" pitchFamily="34" charset="-120"/>
+              </a:rPr>
+              <a:t>]</a:t>
+            </a:r>
+            <a:pPr indent="0" marL="0">
+              <a:buNone/>
+            </a:pPr>
+            <a:r>
+              <a:rPr lang="en-US" sz="1300" dirty="0">
+                <a:solidFill>
+                  <a:srgbClr val="CCCCCC"/>
+                </a:solidFill>
+                <a:latin typeface="Courier New" pitchFamily="34" charset="0"/>
+                <a:ea typeface="Courier New" pitchFamily="34" charset="-122"/>
+                <a:cs typeface="Courier New" pitchFamily="34" charset="-120"/>
+              </a:rPr>
+              <a:t> </a:t>
+            </a:r>
+            <a:pPr indent="0" marL="0">
+              <a:buNone/>
+            </a:pPr>
+            <a:r>
+              <a:rPr lang="en-US" sz="1300" dirty="0">
+                <a:solidFill>
+                  <a:srgbClr val="179FFF"/>
+                </a:solidFill>
+                <a:latin typeface="Courier New" pitchFamily="34" charset="0"/>
+                <a:ea typeface="Courier New" pitchFamily="34" charset="-122"/>
+                <a:cs typeface="Courier New" pitchFamily="34" charset="-120"/>
+              </a:rPr>
+              <a:t>}</a:t>
             </a:r>
             <a:endParaRPr lang="en-US" sz="1300" dirty="0"/>
           </a:p>
@@ -12893,13 +15858,27 @@
             <a:r>
               <a:rPr lang="en-US" sz="1300" dirty="0">
                 <a:solidFill>
-                  <a:srgbClr val="EAECEE"/>
-                </a:solidFill>
-                <a:latin typeface="Courier New" pitchFamily="34" charset="0"/>
-                <a:ea typeface="Courier New" pitchFamily="34" charset="-122"/>
-                <a:cs typeface="Courier New" pitchFamily="34" charset="-120"/>
-              </a:rPr>
-              <a:t>  )</a:t>
+                  <a:srgbClr val="CCCCCC"/>
+                </a:solidFill>
+                <a:latin typeface="Courier New" pitchFamily="34" charset="0"/>
+                <a:ea typeface="Courier New" pitchFamily="34" charset="-122"/>
+                <a:cs typeface="Courier New" pitchFamily="34" charset="-120"/>
+              </a:rPr>
+              <a:t>  </a:t>
+            </a:r>
+            <a:pPr indent="0" marL="0">
+              <a:buNone/>
+            </a:pPr>
+            <a:r>
+              <a:rPr lang="en-US" sz="1300" dirty="0">
+                <a:solidFill>
+                  <a:srgbClr val="DA70D6"/>
+                </a:solidFill>
+                <a:latin typeface="Courier New" pitchFamily="34" charset="0"/>
+                <a:ea typeface="Courier New" pitchFamily="34" charset="-122"/>
+                <a:cs typeface="Courier New" pitchFamily="34" charset="-120"/>
+              </a:rPr>
+              <a:t>)</a:t>
             </a:r>
             <a:endParaRPr lang="en-US" sz="1300" dirty="0"/>
           </a:p>
@@ -12910,13 +15889,69 @@
             <a:r>
               <a:rPr lang="en-US" sz="1300" dirty="0">
                 <a:solidFill>
-                  <a:srgbClr val="EAECEE"/>
-                </a:solidFill>
-                <a:latin typeface="Courier New" pitchFamily="34" charset="0"/>
-                <a:ea typeface="Courier New" pitchFamily="34" charset="-122"/>
-                <a:cs typeface="Courier New" pitchFamily="34" charset="-120"/>
-              </a:rPr>
-              <a:t>  action efetuarPagamento(</a:t>
+                  <a:srgbClr val="CCCCCC"/>
+                </a:solidFill>
+                <a:latin typeface="Courier New" pitchFamily="34" charset="0"/>
+                <a:ea typeface="Courier New" pitchFamily="34" charset="-122"/>
+                <a:cs typeface="Courier New" pitchFamily="34" charset="-120"/>
+              </a:rPr>
+              <a:t>  </a:t>
+            </a:r>
+            <a:pPr indent="0" marL="0">
+              <a:buNone/>
+            </a:pPr>
+            <a:r>
+              <a:rPr lang="en-US" sz="1300" dirty="0">
+                <a:solidFill>
+                  <a:srgbClr val="569CD6"/>
+                </a:solidFill>
+                <a:latin typeface="Courier New" pitchFamily="34" charset="0"/>
+                <a:ea typeface="Courier New" pitchFamily="34" charset="-122"/>
+                <a:cs typeface="Courier New" pitchFamily="34" charset="-120"/>
+              </a:rPr>
+              <a:t>action</a:t>
+            </a:r>
+            <a:pPr indent="0" marL="0">
+              <a:buNone/>
+            </a:pPr>
+            <a:r>
+              <a:rPr lang="en-US" sz="1300" dirty="0">
+                <a:solidFill>
+                  <a:srgbClr val="CCCCCC"/>
+                </a:solidFill>
+                <a:latin typeface="Courier New" pitchFamily="34" charset="0"/>
+                <a:ea typeface="Courier New" pitchFamily="34" charset="-122"/>
+                <a:cs typeface="Courier New" pitchFamily="34" charset="-120"/>
+              </a:rPr>
+              <a:t> </a:t>
+            </a:r>
+            <a:pPr indent="0" marL="0">
+              <a:buNone/>
+            </a:pPr>
+            <a:r>
+              <a:rPr lang="en-US" sz="1300" dirty="0">
+                <a:solidFill>
+                  <a:srgbClr val="DCDCAA"/>
+                </a:solidFill>
+                <a:latin typeface="Courier New" pitchFamily="34" charset="0"/>
+                <a:ea typeface="Courier New" pitchFamily="34" charset="-122"/>
+                <a:cs typeface="Courier New" pitchFamily="34" charset="-120"/>
+              </a:rPr>
+              <a:t>efetuarPagamento</a:t>
+            </a:r>
+            <a:pPr indent="0" marL="0">
+              <a:buNone/>
+            </a:pPr>
+            <a:r>
+              <a:rPr lang="en-US" sz="1300" dirty="0">
+                <a:solidFill>
+                  <a:srgbClr val="DA70D6"/>
+                </a:solidFill>
+                <a:latin typeface="Courier New" pitchFamily="34" charset="0"/>
+                <a:ea typeface="Courier New" pitchFamily="34" charset="-122"/>
+                <a:cs typeface="Courier New" pitchFamily="34" charset="-120"/>
+              </a:rPr>
+              <a:t>(</a:t>
             </a:r>
             <a:endParaRPr lang="en-US" sz="1300" dirty="0"/>
           </a:p>
@@ -12927,13 +15962,139 @@
             <a:r>
               <a:rPr lang="en-US" sz="1300" dirty="0">
                 <a:solidFill>
-                  <a:srgbClr val="89D1FF"/>
-                </a:solidFill>
-                <a:latin typeface="Courier New" pitchFamily="34" charset="0"/>
-                <a:ea typeface="Courier New" pitchFamily="34" charset="-122"/>
-                <a:cs typeface="Courier New" pitchFamily="34" charset="-120"/>
-              </a:rPr>
-              <a:t>    @mandatory metodoPagamento : String(20),</a:t>
+                  <a:srgbClr val="CCCCCC"/>
+                </a:solidFill>
+                <a:latin typeface="Courier New" pitchFamily="34" charset="0"/>
+                <a:ea typeface="Courier New" pitchFamily="34" charset="-122"/>
+                <a:cs typeface="Courier New" pitchFamily="34" charset="-120"/>
+              </a:rPr>
+              <a:t>    </a:t>
+            </a:r>
+            <a:pPr indent="0" marL="0">
+              <a:buNone/>
+            </a:pPr>
+            <a:r>
+              <a:rPr lang="en-US" sz="1300" dirty="0">
+                <a:solidFill>
+                  <a:srgbClr val="DCDCAA"/>
+                </a:solidFill>
+                <a:latin typeface="Courier New" pitchFamily="34" charset="0"/>
+                <a:ea typeface="Courier New" pitchFamily="34" charset="-122"/>
+                <a:cs typeface="Courier New" pitchFamily="34" charset="-120"/>
+              </a:rPr>
+              <a:t>@mandatory</a:t>
+            </a:r>
+            <a:pPr indent="0" marL="0">
+              <a:buNone/>
+            </a:pPr>
+            <a:r>
+              <a:rPr lang="en-US" sz="1300" dirty="0">
+                <a:solidFill>
+                  <a:srgbClr val="CCCCCC"/>
+                </a:solidFill>
+                <a:latin typeface="Courier New" pitchFamily="34" charset="0"/>
+                <a:ea typeface="Courier New" pitchFamily="34" charset="-122"/>
+                <a:cs typeface="Courier New" pitchFamily="34" charset="-120"/>
+              </a:rPr>
+              <a:t> </a:t>
+            </a:r>
+            <a:pPr indent="0" marL="0">
+              <a:buNone/>
+            </a:pPr>
+            <a:r>
+              <a:rPr lang="en-US" sz="1300" dirty="0">
+                <a:solidFill>
+                  <a:srgbClr val="9CDCFE"/>
+                </a:solidFill>
+                <a:latin typeface="Courier New" pitchFamily="34" charset="0"/>
+                <a:ea typeface="Courier New" pitchFamily="34" charset="-122"/>
+                <a:cs typeface="Courier New" pitchFamily="34" charset="-120"/>
+              </a:rPr>
+              <a:t>metodoPagamento</a:t>
+            </a:r>
+            <a:pPr indent="0" marL="0">
+              <a:buNone/>
+            </a:pPr>
+            <a:r>
+              <a:rPr lang="en-US" sz="1300" dirty="0">
+                <a:solidFill>
+                  <a:srgbClr val="CCCCCC"/>
+                </a:solidFill>
+                <a:latin typeface="Courier New" pitchFamily="34" charset="0"/>
+                <a:ea typeface="Courier New" pitchFamily="34" charset="-122"/>
+                <a:cs typeface="Courier New" pitchFamily="34" charset="-120"/>
+              </a:rPr>
+              <a:t> : </a:t>
+            </a:r>
+            <a:pPr indent="0" marL="0">
+              <a:buNone/>
+            </a:pPr>
+            <a:r>
+              <a:rPr lang="en-US" sz="1300" dirty="0">
+                <a:solidFill>
+                  <a:srgbClr val="4EC9B0"/>
+                </a:solidFill>
+                <a:latin typeface="Courier New" pitchFamily="34" charset="0"/>
+                <a:ea typeface="Courier New" pitchFamily="34" charset="-122"/>
+                <a:cs typeface="Courier New" pitchFamily="34" charset="-120"/>
+              </a:rPr>
+              <a:t>String</a:t>
+            </a:r>
+            <a:pPr indent="0" marL="0">
+              <a:buNone/>
+            </a:pPr>
+            <a:r>
+              <a:rPr lang="en-US" sz="1300" dirty="0">
+                <a:solidFill>
+                  <a:srgbClr val="179FFF"/>
+                </a:solidFill>
+                <a:latin typeface="Courier New" pitchFamily="34" charset="0"/>
+                <a:ea typeface="Courier New" pitchFamily="34" charset="-122"/>
+                <a:cs typeface="Courier New" pitchFamily="34" charset="-120"/>
+              </a:rPr>
+              <a:t>(</a:t>
+            </a:r>
+            <a:pPr indent="0" marL="0">
+              <a:buNone/>
+            </a:pPr>
+            <a:r>
+              <a:rPr lang="en-US" sz="1300" dirty="0">
+                <a:solidFill>
+                  <a:srgbClr val="B5CEA8"/>
+                </a:solidFill>
+                <a:latin typeface="Courier New" pitchFamily="34" charset="0"/>
+                <a:ea typeface="Courier New" pitchFamily="34" charset="-122"/>
+                <a:cs typeface="Courier New" pitchFamily="34" charset="-120"/>
+              </a:rPr>
+              <a:t>20</a:t>
+            </a:r>
+            <a:pPr indent="0" marL="0">
+              <a:buNone/>
+            </a:pPr>
+            <a:r>
+              <a:rPr lang="en-US" sz="1300" dirty="0">
+                <a:solidFill>
+                  <a:srgbClr val="179FFF"/>
+                </a:solidFill>
+                <a:latin typeface="Courier New" pitchFamily="34" charset="0"/>
+                <a:ea typeface="Courier New" pitchFamily="34" charset="-122"/>
+                <a:cs typeface="Courier New" pitchFamily="34" charset="-120"/>
+              </a:rPr>
+              <a:t>)</a:t>
+            </a:r>
+            <a:pPr indent="0" marL="0">
+              <a:buNone/>
+            </a:pPr>
+            <a:r>
+              <a:rPr lang="en-US" sz="1300" dirty="0">
+                <a:solidFill>
+                  <a:srgbClr val="CCCCCC"/>
+                </a:solidFill>
+                <a:latin typeface="Courier New" pitchFamily="34" charset="0"/>
+                <a:ea typeface="Courier New" pitchFamily="34" charset="-122"/>
+                <a:cs typeface="Courier New" pitchFamily="34" charset="-120"/>
+              </a:rPr>
+              <a:t>,</a:t>
             </a:r>
             <a:endParaRPr lang="en-US" sz="1300" dirty="0"/>
           </a:p>
@@ -12944,13 +16105,139 @@
             <a:r>
               <a:rPr lang="en-US" sz="1300" dirty="0">
                 <a:solidFill>
-                  <a:srgbClr val="89D1FF"/>
-                </a:solidFill>
-                <a:latin typeface="Courier New" pitchFamily="34" charset="0"/>
-                <a:ea typeface="Courier New" pitchFamily="34" charset="-122"/>
-                <a:cs typeface="Courier New" pitchFamily="34" charset="-120"/>
-              </a:rPr>
-              <a:t>    @mandatory numeroCartao    : String(19),</a:t>
+                  <a:srgbClr val="CCCCCC"/>
+                </a:solidFill>
+                <a:latin typeface="Courier New" pitchFamily="34" charset="0"/>
+                <a:ea typeface="Courier New" pitchFamily="34" charset="-122"/>
+                <a:cs typeface="Courier New" pitchFamily="34" charset="-120"/>
+              </a:rPr>
+              <a:t>    </a:t>
+            </a:r>
+            <a:pPr indent="0" marL="0">
+              <a:buNone/>
+            </a:pPr>
+            <a:r>
+              <a:rPr lang="en-US" sz="1300" dirty="0">
+                <a:solidFill>
+                  <a:srgbClr val="DCDCAA"/>
+                </a:solidFill>
+                <a:latin typeface="Courier New" pitchFamily="34" charset="0"/>
+                <a:ea typeface="Courier New" pitchFamily="34" charset="-122"/>
+                <a:cs typeface="Courier New" pitchFamily="34" charset="-120"/>
+              </a:rPr>
+              <a:t>@mandatory</a:t>
+            </a:r>
+            <a:pPr indent="0" marL="0">
+              <a:buNone/>
+            </a:pPr>
+            <a:r>
+              <a:rPr lang="en-US" sz="1300" dirty="0">
+                <a:solidFill>
+                  <a:srgbClr val="CCCCCC"/>
+                </a:solidFill>
+                <a:latin typeface="Courier New" pitchFamily="34" charset="0"/>
+                <a:ea typeface="Courier New" pitchFamily="34" charset="-122"/>
+                <a:cs typeface="Courier New" pitchFamily="34" charset="-120"/>
+              </a:rPr>
+              <a:t> </a:t>
+            </a:r>
+            <a:pPr indent="0" marL="0">
+              <a:buNone/>
+            </a:pPr>
+            <a:r>
+              <a:rPr lang="en-US" sz="1300" dirty="0">
+                <a:solidFill>
+                  <a:srgbClr val="9CDCFE"/>
+                </a:solidFill>
+                <a:latin typeface="Courier New" pitchFamily="34" charset="0"/>
+                <a:ea typeface="Courier New" pitchFamily="34" charset="-122"/>
+                <a:cs typeface="Courier New" pitchFamily="34" charset="-120"/>
+              </a:rPr>
+              <a:t>numeroCartao</a:t>
+            </a:r>
+            <a:pPr indent="0" marL="0">
+              <a:buNone/>
+            </a:pPr>
+            <a:r>
+              <a:rPr lang="en-US" sz="1300" dirty="0">
+                <a:solidFill>
+                  <a:srgbClr val="CCCCCC"/>
+                </a:solidFill>
+                <a:latin typeface="Courier New" pitchFamily="34" charset="0"/>
+                <a:ea typeface="Courier New" pitchFamily="34" charset="-122"/>
+                <a:cs typeface="Courier New" pitchFamily="34" charset="-120"/>
+              </a:rPr>
+              <a:t>    : </a:t>
+            </a:r>
+            <a:pPr indent="0" marL="0">
+              <a:buNone/>
+            </a:pPr>
+            <a:r>
+              <a:rPr lang="en-US" sz="1300" dirty="0">
+                <a:solidFill>
+                  <a:srgbClr val="4EC9B0"/>
+                </a:solidFill>
+                <a:latin typeface="Courier New" pitchFamily="34" charset="0"/>
+                <a:ea typeface="Courier New" pitchFamily="34" charset="-122"/>
+                <a:cs typeface="Courier New" pitchFamily="34" charset="-120"/>
+              </a:rPr>
+              <a:t>String</a:t>
+            </a:r>
+            <a:pPr indent="0" marL="0">
+              <a:buNone/>
+            </a:pPr>
+            <a:r>
+              <a:rPr lang="en-US" sz="1300" dirty="0">
+                <a:solidFill>
+                  <a:srgbClr val="179FFF"/>
+                </a:solidFill>
+                <a:latin typeface="Courier New" pitchFamily="34" charset="0"/>
+                <a:ea typeface="Courier New" pitchFamily="34" charset="-122"/>
+                <a:cs typeface="Courier New" pitchFamily="34" charset="-120"/>
+              </a:rPr>
+              <a:t>(</a:t>
+            </a:r>
+            <a:pPr indent="0" marL="0">
+              <a:buNone/>
+            </a:pPr>
+            <a:r>
+              <a:rPr lang="en-US" sz="1300" dirty="0">
+                <a:solidFill>
+                  <a:srgbClr val="B5CEA8"/>
+                </a:solidFill>
+                <a:latin typeface="Courier New" pitchFamily="34" charset="0"/>
+                <a:ea typeface="Courier New" pitchFamily="34" charset="-122"/>
+                <a:cs typeface="Courier New" pitchFamily="34" charset="-120"/>
+              </a:rPr>
+              <a:t>19</a:t>
+            </a:r>
+            <a:pPr indent="0" marL="0">
+              <a:buNone/>
+            </a:pPr>
+            <a:r>
+              <a:rPr lang="en-US" sz="1300" dirty="0">
+                <a:solidFill>
+                  <a:srgbClr val="179FFF"/>
+                </a:solidFill>
+                <a:latin typeface="Courier New" pitchFamily="34" charset="0"/>
+                <a:ea typeface="Courier New" pitchFamily="34" charset="-122"/>
+                <a:cs typeface="Courier New" pitchFamily="34" charset="-120"/>
+              </a:rPr>
+              <a:t>)</a:t>
+            </a:r>
+            <a:pPr indent="0" marL="0">
+              <a:buNone/>
+            </a:pPr>
+            <a:r>
+              <a:rPr lang="en-US" sz="1300" dirty="0">
+                <a:solidFill>
+                  <a:srgbClr val="CCCCCC"/>
+                </a:solidFill>
+                <a:latin typeface="Courier New" pitchFamily="34" charset="0"/>
+                <a:ea typeface="Courier New" pitchFamily="34" charset="-122"/>
+                <a:cs typeface="Courier New" pitchFamily="34" charset="-120"/>
+              </a:rPr>
+              <a:t>,</a:t>
             </a:r>
             <a:endParaRPr lang="en-US" sz="1300" dirty="0"/>
           </a:p>
@@ -12961,13 +16248,139 @@
             <a:r>
               <a:rPr lang="en-US" sz="1300" dirty="0">
                 <a:solidFill>
-                  <a:srgbClr val="89D1FF"/>
-                </a:solidFill>
-                <a:latin typeface="Courier New" pitchFamily="34" charset="0"/>
-                <a:ea typeface="Courier New" pitchFamily="34" charset="-122"/>
-                <a:cs typeface="Courier New" pitchFamily="34" charset="-120"/>
-              </a:rPr>
-              <a:t>    @mandatory validade        : String(5),</a:t>
+                  <a:srgbClr val="CCCCCC"/>
+                </a:solidFill>
+                <a:latin typeface="Courier New" pitchFamily="34" charset="0"/>
+                <a:ea typeface="Courier New" pitchFamily="34" charset="-122"/>
+                <a:cs typeface="Courier New" pitchFamily="34" charset="-120"/>
+              </a:rPr>
+              <a:t>    </a:t>
+            </a:r>
+            <a:pPr indent="0" marL="0">
+              <a:buNone/>
+            </a:pPr>
+            <a:r>
+              <a:rPr lang="en-US" sz="1300" dirty="0">
+                <a:solidFill>
+                  <a:srgbClr val="DCDCAA"/>
+                </a:solidFill>
+                <a:latin typeface="Courier New" pitchFamily="34" charset="0"/>
+                <a:ea typeface="Courier New" pitchFamily="34" charset="-122"/>
+                <a:cs typeface="Courier New" pitchFamily="34" charset="-120"/>
+              </a:rPr>
+              <a:t>@mandatory</a:t>
+            </a:r>
+            <a:pPr indent="0" marL="0">
+              <a:buNone/>
+            </a:pPr>
+            <a:r>
+              <a:rPr lang="en-US" sz="1300" dirty="0">
+                <a:solidFill>
+                  <a:srgbClr val="CCCCCC"/>
+                </a:solidFill>
+                <a:latin typeface="Courier New" pitchFamily="34" charset="0"/>
+                <a:ea typeface="Courier New" pitchFamily="34" charset="-122"/>
+                <a:cs typeface="Courier New" pitchFamily="34" charset="-120"/>
+              </a:rPr>
+              <a:t> </a:t>
+            </a:r>
+            <a:pPr indent="0" marL="0">
+              <a:buNone/>
+            </a:pPr>
+            <a:r>
+              <a:rPr lang="en-US" sz="1300" dirty="0">
+                <a:solidFill>
+                  <a:srgbClr val="9CDCFE"/>
+                </a:solidFill>
+                <a:latin typeface="Courier New" pitchFamily="34" charset="0"/>
+                <a:ea typeface="Courier New" pitchFamily="34" charset="-122"/>
+                <a:cs typeface="Courier New" pitchFamily="34" charset="-120"/>
+              </a:rPr>
+              <a:t>validade</a:t>
+            </a:r>
+            <a:pPr indent="0" marL="0">
+              <a:buNone/>
+            </a:pPr>
+            <a:r>
+              <a:rPr lang="en-US" sz="1300" dirty="0">
+                <a:solidFill>
+                  <a:srgbClr val="CCCCCC"/>
+                </a:solidFill>
+                <a:latin typeface="Courier New" pitchFamily="34" charset="0"/>
+                <a:ea typeface="Courier New" pitchFamily="34" charset="-122"/>
+                <a:cs typeface="Courier New" pitchFamily="34" charset="-120"/>
+              </a:rPr>
+              <a:t>        : </a:t>
+            </a:r>
+            <a:pPr indent="0" marL="0">
+              <a:buNone/>
+            </a:pPr>
+            <a:r>
+              <a:rPr lang="en-US" sz="1300" dirty="0">
+                <a:solidFill>
+                  <a:srgbClr val="4EC9B0"/>
+                </a:solidFill>
+                <a:latin typeface="Courier New" pitchFamily="34" charset="0"/>
+                <a:ea typeface="Courier New" pitchFamily="34" charset="-122"/>
+                <a:cs typeface="Courier New" pitchFamily="34" charset="-120"/>
+              </a:rPr>
+              <a:t>String</a:t>
+            </a:r>
+            <a:pPr indent="0" marL="0">
+              <a:buNone/>
+            </a:pPr>
+            <a:r>
+              <a:rPr lang="en-US" sz="1300" dirty="0">
+                <a:solidFill>
+                  <a:srgbClr val="179FFF"/>
+                </a:solidFill>
+                <a:latin typeface="Courier New" pitchFamily="34" charset="0"/>
+                <a:ea typeface="Courier New" pitchFamily="34" charset="-122"/>
+                <a:cs typeface="Courier New" pitchFamily="34" charset="-120"/>
+              </a:rPr>
+              <a:t>(</a:t>
+            </a:r>
+            <a:pPr indent="0" marL="0">
+              <a:buNone/>
+            </a:pPr>
+            <a:r>
+              <a:rPr lang="en-US" sz="1300" dirty="0">
+                <a:solidFill>
+                  <a:srgbClr val="B5CEA8"/>
+                </a:solidFill>
+                <a:latin typeface="Courier New" pitchFamily="34" charset="0"/>
+                <a:ea typeface="Courier New" pitchFamily="34" charset="-122"/>
+                <a:cs typeface="Courier New" pitchFamily="34" charset="-120"/>
+              </a:rPr>
+              <a:t>5</a:t>
+            </a:r>
+            <a:pPr indent="0" marL="0">
+              <a:buNone/>
+            </a:pPr>
+            <a:r>
+              <a:rPr lang="en-US" sz="1300" dirty="0">
+                <a:solidFill>
+                  <a:srgbClr val="179FFF"/>
+                </a:solidFill>
+                <a:latin typeface="Courier New" pitchFamily="34" charset="0"/>
+                <a:ea typeface="Courier New" pitchFamily="34" charset="-122"/>
+                <a:cs typeface="Courier New" pitchFamily="34" charset="-120"/>
+              </a:rPr>
+              <a:t>)</a:t>
+            </a:r>
+            <a:pPr indent="0" marL="0">
+              <a:buNone/>
+            </a:pPr>
+            <a:r>
+              <a:rPr lang="en-US" sz="1300" dirty="0">
+                <a:solidFill>
+                  <a:srgbClr val="CCCCCC"/>
+                </a:solidFill>
+                <a:latin typeface="Courier New" pitchFamily="34" charset="0"/>
+                <a:ea typeface="Courier New" pitchFamily="34" charset="-122"/>
+                <a:cs typeface="Courier New" pitchFamily="34" charset="-120"/>
+              </a:rPr>
+              <a:t>,</a:t>
             </a:r>
             <a:endParaRPr lang="en-US" sz="1300" dirty="0"/>
           </a:p>
@@ -12978,13 +16391,125 @@
             <a:r>
               <a:rPr lang="en-US" sz="1300" dirty="0">
                 <a:solidFill>
-                  <a:srgbClr val="89D1FF"/>
-                </a:solidFill>
-                <a:latin typeface="Courier New" pitchFamily="34" charset="0"/>
-                <a:ea typeface="Courier New" pitchFamily="34" charset="-122"/>
-                <a:cs typeface="Courier New" pitchFamily="34" charset="-120"/>
-              </a:rPr>
-              <a:t>    @mandatory cvv             : String(4)</a:t>
+                  <a:srgbClr val="CCCCCC"/>
+                </a:solidFill>
+                <a:latin typeface="Courier New" pitchFamily="34" charset="0"/>
+                <a:ea typeface="Courier New" pitchFamily="34" charset="-122"/>
+                <a:cs typeface="Courier New" pitchFamily="34" charset="-120"/>
+              </a:rPr>
+              <a:t>    </a:t>
+            </a:r>
+            <a:pPr indent="0" marL="0">
+              <a:buNone/>
+            </a:pPr>
+            <a:r>
+              <a:rPr lang="en-US" sz="1300" dirty="0">
+                <a:solidFill>
+                  <a:srgbClr val="DCDCAA"/>
+                </a:solidFill>
+                <a:latin typeface="Courier New" pitchFamily="34" charset="0"/>
+                <a:ea typeface="Courier New" pitchFamily="34" charset="-122"/>
+                <a:cs typeface="Courier New" pitchFamily="34" charset="-120"/>
+              </a:rPr>
+              <a:t>@mandatory</a:t>
+            </a:r>
+            <a:pPr indent="0" marL="0">
+              <a:buNone/>
+            </a:pPr>
+            <a:r>
+              <a:rPr lang="en-US" sz="1300" dirty="0">
+                <a:solidFill>
+                  <a:srgbClr val="CCCCCC"/>
+                </a:solidFill>
+                <a:latin typeface="Courier New" pitchFamily="34" charset="0"/>
+                <a:ea typeface="Courier New" pitchFamily="34" charset="-122"/>
+                <a:cs typeface="Courier New" pitchFamily="34" charset="-120"/>
+              </a:rPr>
+              <a:t> </a:t>
+            </a:r>
+            <a:pPr indent="0" marL="0">
+              <a:buNone/>
+            </a:pPr>
+            <a:r>
+              <a:rPr lang="en-US" sz="1300" dirty="0">
+                <a:solidFill>
+                  <a:srgbClr val="9CDCFE"/>
+                </a:solidFill>
+                <a:latin typeface="Courier New" pitchFamily="34" charset="0"/>
+                <a:ea typeface="Courier New" pitchFamily="34" charset="-122"/>
+                <a:cs typeface="Courier New" pitchFamily="34" charset="-120"/>
+              </a:rPr>
+              <a:t>cvv</a:t>
+            </a:r>
+            <a:pPr indent="0" marL="0">
+              <a:buNone/>
+            </a:pPr>
+            <a:r>
+              <a:rPr lang="en-US" sz="1300" dirty="0">
+                <a:solidFill>
+                  <a:srgbClr val="CCCCCC"/>
+                </a:solidFill>
+                <a:latin typeface="Courier New" pitchFamily="34" charset="0"/>
+                <a:ea typeface="Courier New" pitchFamily="34" charset="-122"/>
+                <a:cs typeface="Courier New" pitchFamily="34" charset="-120"/>
+              </a:rPr>
+              <a:t>             : </a:t>
+            </a:r>
+            <a:pPr indent="0" marL="0">
+              <a:buNone/>
+            </a:pPr>
+            <a:r>
+              <a:rPr lang="en-US" sz="1300" dirty="0">
+                <a:solidFill>
+                  <a:srgbClr val="4EC9B0"/>
+                </a:solidFill>
+                <a:latin typeface="Courier New" pitchFamily="34" charset="0"/>
+                <a:ea typeface="Courier New" pitchFamily="34" charset="-122"/>
+                <a:cs typeface="Courier New" pitchFamily="34" charset="-120"/>
+              </a:rPr>
+              <a:t>String</a:t>
+            </a:r>
+            <a:pPr indent="0" marL="0">
+              <a:buNone/>
+            </a:pPr>
+            <a:r>
+              <a:rPr lang="en-US" sz="1300" dirty="0">
+                <a:solidFill>
+                  <a:srgbClr val="179FFF"/>
+                </a:solidFill>
+                <a:latin typeface="Courier New" pitchFamily="34" charset="0"/>
+                <a:ea typeface="Courier New" pitchFamily="34" charset="-122"/>
+                <a:cs typeface="Courier New" pitchFamily="34" charset="-120"/>
+              </a:rPr>
+              <a:t>(</a:t>
+            </a:r>
+            <a:pPr indent="0" marL="0">
+              <a:buNone/>
+            </a:pPr>
+            <a:r>
+              <a:rPr lang="en-US" sz="1300" dirty="0">
+                <a:solidFill>
+                  <a:srgbClr val="B5CEA8"/>
+                </a:solidFill>
+                <a:latin typeface="Courier New" pitchFamily="34" charset="0"/>
+                <a:ea typeface="Courier New" pitchFamily="34" charset="-122"/>
+                <a:cs typeface="Courier New" pitchFamily="34" charset="-120"/>
+              </a:rPr>
+              <a:t>4</a:t>
+            </a:r>
+            <a:pPr indent="0" marL="0">
+              <a:buNone/>
+            </a:pPr>
+            <a:r>
+              <a:rPr lang="en-US" sz="1300" dirty="0">
+                <a:solidFill>
+                  <a:srgbClr val="179FFF"/>
+                </a:solidFill>
+                <a:latin typeface="Courier New" pitchFamily="34" charset="0"/>
+                <a:ea typeface="Courier New" pitchFamily="34" charset="-122"/>
+                <a:cs typeface="Courier New" pitchFamily="34" charset="-120"/>
+              </a:rPr>
+              <a:t>)</a:t>
             </a:r>
             <a:endParaRPr lang="en-US" sz="1300" dirty="0"/>
           </a:p>
@@ -12995,13 +16520,97 @@
             <a:r>
               <a:rPr lang="en-US" sz="1300" dirty="0">
                 <a:solidFill>
-                  <a:srgbClr val="EAECEE"/>
-                </a:solidFill>
-                <a:latin typeface="Courier New" pitchFamily="34" charset="0"/>
-                <a:ea typeface="Courier New" pitchFamily="34" charset="-122"/>
-                <a:cs typeface="Courier New" pitchFamily="34" charset="-120"/>
-              </a:rPr>
-              <a:t>  ) returns Pedidos;</a:t>
+                  <a:srgbClr val="CCCCCC"/>
+                </a:solidFill>
+                <a:latin typeface="Courier New" pitchFamily="34" charset="0"/>
+                <a:ea typeface="Courier New" pitchFamily="34" charset="-122"/>
+                <a:cs typeface="Courier New" pitchFamily="34" charset="-120"/>
+              </a:rPr>
+              <a:t>  </a:t>
+            </a:r>
+            <a:pPr indent="0" marL="0">
+              <a:buNone/>
+            </a:pPr>
+            <a:r>
+              <a:rPr lang="en-US" sz="1300" dirty="0">
+                <a:solidFill>
+                  <a:srgbClr val="DA70D6"/>
+                </a:solidFill>
+                <a:latin typeface="Courier New" pitchFamily="34" charset="0"/>
+                <a:ea typeface="Courier New" pitchFamily="34" charset="-122"/>
+                <a:cs typeface="Courier New" pitchFamily="34" charset="-120"/>
+              </a:rPr>
+              <a:t>)</a:t>
+            </a:r>
+            <a:pPr indent="0" marL="0">
+              <a:buNone/>
+            </a:pPr>
+            <a:r>
+              <a:rPr lang="en-US" sz="1300" dirty="0">
+                <a:solidFill>
+                  <a:srgbClr val="CCCCCC"/>
+                </a:solidFill>
+                <a:latin typeface="Courier New" pitchFamily="34" charset="0"/>
+                <a:ea typeface="Courier New" pitchFamily="34" charset="-122"/>
+                <a:cs typeface="Courier New" pitchFamily="34" charset="-120"/>
+              </a:rPr>
+              <a:t> </a:t>
+            </a:r>
+            <a:pPr indent="0" marL="0">
+              <a:buNone/>
+            </a:pPr>
+            <a:r>
+              <a:rPr lang="en-US" sz="1300" dirty="0">
+                <a:solidFill>
+                  <a:srgbClr val="569CD6"/>
+                </a:solidFill>
+                <a:latin typeface="Courier New" pitchFamily="34" charset="0"/>
+                <a:ea typeface="Courier New" pitchFamily="34" charset="-122"/>
+                <a:cs typeface="Courier New" pitchFamily="34" charset="-120"/>
+              </a:rPr>
+              <a:t>returns</a:t>
+            </a:r>
+            <a:pPr indent="0" marL="0">
+              <a:buNone/>
+            </a:pPr>
+            <a:r>
+              <a:rPr lang="en-US" sz="1300" dirty="0">
+                <a:solidFill>
+                  <a:srgbClr val="CCCCCC"/>
+                </a:solidFill>
+                <a:latin typeface="Courier New" pitchFamily="34" charset="0"/>
+                <a:ea typeface="Courier New" pitchFamily="34" charset="-122"/>
+                <a:cs typeface="Courier New" pitchFamily="34" charset="-120"/>
+              </a:rPr>
+              <a:t> </a:t>
+            </a:r>
+            <a:pPr indent="0" marL="0">
+              <a:buNone/>
+            </a:pPr>
+            <a:r>
+              <a:rPr lang="en-US" sz="1300" dirty="0">
+                <a:solidFill>
+                  <a:srgbClr val="4EC9B0"/>
+                </a:solidFill>
+                <a:latin typeface="Courier New" pitchFamily="34" charset="0"/>
+                <a:ea typeface="Courier New" pitchFamily="34" charset="-122"/>
+                <a:cs typeface="Courier New" pitchFamily="34" charset="-120"/>
+              </a:rPr>
+              <a:t>Pedidos</a:t>
+            </a:r>
+            <a:pPr indent="0" marL="0">
+              <a:buNone/>
+            </a:pPr>
+            <a:r>
+              <a:rPr lang="en-US" sz="1300" dirty="0">
+                <a:solidFill>
+                  <a:srgbClr val="CCCCCC"/>
+                </a:solidFill>
+                <a:latin typeface="Courier New" pitchFamily="34" charset="0"/>
+                <a:ea typeface="Courier New" pitchFamily="34" charset="-122"/>
+                <a:cs typeface="Courier New" pitchFamily="34" charset="-120"/>
+              </a:rPr>
+              <a:t>;</a:t>
             </a:r>
             <a:endParaRPr lang="en-US" sz="1300" dirty="0"/>
           </a:p>
@@ -13012,7 +16621,7 @@
             <a:r>
               <a:rPr lang="en-US" sz="1300" dirty="0">
                 <a:solidFill>
-                  <a:srgbClr val="EAECEE"/>
+                  <a:srgbClr val="CCCCCC"/>
                 </a:solidFill>
                 <a:latin typeface="Courier New" pitchFamily="34" charset="0"/>
                 <a:ea typeface="Courier New" pitchFamily="34" charset="-122"/>
@@ -13029,13 +16638,139 @@
             <a:r>
               <a:rPr lang="en-US" sz="1300" dirty="0">
                 <a:solidFill>
-                  <a:srgbClr val="EAECEE"/>
-                </a:solidFill>
-                <a:latin typeface="Courier New" pitchFamily="34" charset="0"/>
-                <a:ea typeface="Courier New" pitchFamily="34" charset="-122"/>
-                <a:cs typeface="Courier New" pitchFamily="34" charset="-120"/>
-              </a:rPr>
-              <a:t>  action aprovarPedido() returns Pedidos;</a:t>
+                  <a:srgbClr val="CCCCCC"/>
+                </a:solidFill>
+                <a:latin typeface="Courier New" pitchFamily="34" charset="0"/>
+                <a:ea typeface="Courier New" pitchFamily="34" charset="-122"/>
+                <a:cs typeface="Courier New" pitchFamily="34" charset="-120"/>
+              </a:rPr>
+              <a:t>  </a:t>
+            </a:r>
+            <a:pPr indent="0" marL="0">
+              <a:buNone/>
+            </a:pPr>
+            <a:r>
+              <a:rPr lang="en-US" sz="1300" dirty="0">
+                <a:solidFill>
+                  <a:srgbClr val="569CD6"/>
+                </a:solidFill>
+                <a:latin typeface="Courier New" pitchFamily="34" charset="0"/>
+                <a:ea typeface="Courier New" pitchFamily="34" charset="-122"/>
+                <a:cs typeface="Courier New" pitchFamily="34" charset="-120"/>
+              </a:rPr>
+              <a:t>action</a:t>
+            </a:r>
+            <a:pPr indent="0" marL="0">
+              <a:buNone/>
+            </a:pPr>
+            <a:r>
+              <a:rPr lang="en-US" sz="1300" dirty="0">
+                <a:solidFill>
+                  <a:srgbClr val="CCCCCC"/>
+                </a:solidFill>
+                <a:latin typeface="Courier New" pitchFamily="34" charset="0"/>
+                <a:ea typeface="Courier New" pitchFamily="34" charset="-122"/>
+                <a:cs typeface="Courier New" pitchFamily="34" charset="-120"/>
+              </a:rPr>
+              <a:t> </a:t>
+            </a:r>
+            <a:pPr indent="0" marL="0">
+              <a:buNone/>
+            </a:pPr>
+            <a:r>
+              <a:rPr lang="en-US" sz="1300" dirty="0">
+                <a:solidFill>
+                  <a:srgbClr val="DCDCAA"/>
+                </a:solidFill>
+                <a:latin typeface="Courier New" pitchFamily="34" charset="0"/>
+                <a:ea typeface="Courier New" pitchFamily="34" charset="-122"/>
+                <a:cs typeface="Courier New" pitchFamily="34" charset="-120"/>
+              </a:rPr>
+              <a:t>aprovarPedido</a:t>
+            </a:r>
+            <a:pPr indent="0" marL="0">
+              <a:buNone/>
+            </a:pPr>
+            <a:r>
+              <a:rPr lang="en-US" sz="1300" dirty="0">
+                <a:solidFill>
+                  <a:srgbClr val="DA70D6"/>
+                </a:solidFill>
+                <a:latin typeface="Courier New" pitchFamily="34" charset="0"/>
+                <a:ea typeface="Courier New" pitchFamily="34" charset="-122"/>
+                <a:cs typeface="Courier New" pitchFamily="34" charset="-120"/>
+              </a:rPr>
+              <a:t>()</a:t>
+            </a:r>
+            <a:pPr indent="0" marL="0">
+              <a:buNone/>
+            </a:pPr>
+            <a:r>
+              <a:rPr lang="en-US" sz="1300" dirty="0">
+                <a:solidFill>
+                  <a:srgbClr val="CCCCCC"/>
+                </a:solidFill>
+                <a:latin typeface="Courier New" pitchFamily="34" charset="0"/>
+                <a:ea typeface="Courier New" pitchFamily="34" charset="-122"/>
+                <a:cs typeface="Courier New" pitchFamily="34" charset="-120"/>
+              </a:rPr>
+              <a:t> </a:t>
+            </a:r>
+            <a:pPr indent="0" marL="0">
+              <a:buNone/>
+            </a:pPr>
+            <a:r>
+              <a:rPr lang="en-US" sz="1300" dirty="0">
+                <a:solidFill>
+                  <a:srgbClr val="569CD6"/>
+                </a:solidFill>
+                <a:latin typeface="Courier New" pitchFamily="34" charset="0"/>
+                <a:ea typeface="Courier New" pitchFamily="34" charset="-122"/>
+                <a:cs typeface="Courier New" pitchFamily="34" charset="-120"/>
+              </a:rPr>
+              <a:t>returns</a:t>
+            </a:r>
+            <a:pPr indent="0" marL="0">
+              <a:buNone/>
+            </a:pPr>
+            <a:r>
+              <a:rPr lang="en-US" sz="1300" dirty="0">
+                <a:solidFill>
+                  <a:srgbClr val="CCCCCC"/>
+                </a:solidFill>
+                <a:latin typeface="Courier New" pitchFamily="34" charset="0"/>
+                <a:ea typeface="Courier New" pitchFamily="34" charset="-122"/>
+                <a:cs typeface="Courier New" pitchFamily="34" charset="-120"/>
+              </a:rPr>
+              <a:t> </a:t>
+            </a:r>
+            <a:pPr indent="0" marL="0">
+              <a:buNone/>
+            </a:pPr>
+            <a:r>
+              <a:rPr lang="en-US" sz="1300" dirty="0">
+                <a:solidFill>
+                  <a:srgbClr val="4EC9B0"/>
+                </a:solidFill>
+                <a:latin typeface="Courier New" pitchFamily="34" charset="0"/>
+                <a:ea typeface="Courier New" pitchFamily="34" charset="-122"/>
+                <a:cs typeface="Courier New" pitchFamily="34" charset="-120"/>
+              </a:rPr>
+              <a:t>Pedidos</a:t>
+            </a:r>
+            <a:pPr indent="0" marL="0">
+              <a:buNone/>
+            </a:pPr>
+            <a:r>
+              <a:rPr lang="en-US" sz="1300" dirty="0">
+                <a:solidFill>
+                  <a:srgbClr val="CCCCCC"/>
+                </a:solidFill>
+                <a:latin typeface="Courier New" pitchFamily="34" charset="0"/>
+                <a:ea typeface="Courier New" pitchFamily="34" charset="-122"/>
+                <a:cs typeface="Courier New" pitchFamily="34" charset="-120"/>
+              </a:rPr>
+              <a:t>;</a:t>
             </a:r>
             <a:endParaRPr lang="en-US" sz="1300" dirty="0"/>
           </a:p>
@@ -13046,13 +16781,69 @@
             <a:r>
               <a:rPr lang="en-US" sz="1300" dirty="0">
                 <a:solidFill>
-                  <a:srgbClr val="EAECEE"/>
-                </a:solidFill>
-                <a:latin typeface="Courier New" pitchFamily="34" charset="0"/>
-                <a:ea typeface="Courier New" pitchFamily="34" charset="-122"/>
-                <a:cs typeface="Courier New" pitchFamily="34" charset="-120"/>
-              </a:rPr>
-              <a:t>  action cancelarPedido(</a:t>
+                  <a:srgbClr val="CCCCCC"/>
+                </a:solidFill>
+                <a:latin typeface="Courier New" pitchFamily="34" charset="0"/>
+                <a:ea typeface="Courier New" pitchFamily="34" charset="-122"/>
+                <a:cs typeface="Courier New" pitchFamily="34" charset="-120"/>
+              </a:rPr>
+              <a:t>  </a:t>
+            </a:r>
+            <a:pPr indent="0" marL="0">
+              <a:buNone/>
+            </a:pPr>
+            <a:r>
+              <a:rPr lang="en-US" sz="1300" dirty="0">
+                <a:solidFill>
+                  <a:srgbClr val="569CD6"/>
+                </a:solidFill>
+                <a:latin typeface="Courier New" pitchFamily="34" charset="0"/>
+                <a:ea typeface="Courier New" pitchFamily="34" charset="-122"/>
+                <a:cs typeface="Courier New" pitchFamily="34" charset="-120"/>
+              </a:rPr>
+              <a:t>action</a:t>
+            </a:r>
+            <a:pPr indent="0" marL="0">
+              <a:buNone/>
+            </a:pPr>
+            <a:r>
+              <a:rPr lang="en-US" sz="1300" dirty="0">
+                <a:solidFill>
+                  <a:srgbClr val="CCCCCC"/>
+                </a:solidFill>
+                <a:latin typeface="Courier New" pitchFamily="34" charset="0"/>
+                <a:ea typeface="Courier New" pitchFamily="34" charset="-122"/>
+                <a:cs typeface="Courier New" pitchFamily="34" charset="-120"/>
+              </a:rPr>
+              <a:t> </a:t>
+            </a:r>
+            <a:pPr indent="0" marL="0">
+              <a:buNone/>
+            </a:pPr>
+            <a:r>
+              <a:rPr lang="en-US" sz="1300" dirty="0">
+                <a:solidFill>
+                  <a:srgbClr val="DCDCAA"/>
+                </a:solidFill>
+                <a:latin typeface="Courier New" pitchFamily="34" charset="0"/>
+                <a:ea typeface="Courier New" pitchFamily="34" charset="-122"/>
+                <a:cs typeface="Courier New" pitchFamily="34" charset="-120"/>
+              </a:rPr>
+              <a:t>cancelarPedido</a:t>
+            </a:r>
+            <a:pPr indent="0" marL="0">
+              <a:buNone/>
+            </a:pPr>
+            <a:r>
+              <a:rPr lang="en-US" sz="1300" dirty="0">
+                <a:solidFill>
+                  <a:srgbClr val="DA70D6"/>
+                </a:solidFill>
+                <a:latin typeface="Courier New" pitchFamily="34" charset="0"/>
+                <a:ea typeface="Courier New" pitchFamily="34" charset="-122"/>
+                <a:cs typeface="Courier New" pitchFamily="34" charset="-120"/>
+              </a:rPr>
+              <a:t>(</a:t>
             </a:r>
             <a:endParaRPr lang="en-US" sz="1300" dirty="0"/>
           </a:p>
@@ -13063,13 +16854,125 @@
             <a:r>
               <a:rPr lang="en-US" sz="1300" dirty="0">
                 <a:solidFill>
-                  <a:srgbClr val="89D1FF"/>
-                </a:solidFill>
-                <a:latin typeface="Courier New" pitchFamily="34" charset="0"/>
-                <a:ea typeface="Courier New" pitchFamily="34" charset="-122"/>
-                <a:cs typeface="Courier New" pitchFamily="34" charset="-120"/>
-              </a:rPr>
-              <a:t>    @mandatory motivoCancelamento : String(500)</a:t>
+                  <a:srgbClr val="CCCCCC"/>
+                </a:solidFill>
+                <a:latin typeface="Courier New" pitchFamily="34" charset="0"/>
+                <a:ea typeface="Courier New" pitchFamily="34" charset="-122"/>
+                <a:cs typeface="Courier New" pitchFamily="34" charset="-120"/>
+              </a:rPr>
+              <a:t>    </a:t>
+            </a:r>
+            <a:pPr indent="0" marL="0">
+              <a:buNone/>
+            </a:pPr>
+            <a:r>
+              <a:rPr lang="en-US" sz="1300" dirty="0">
+                <a:solidFill>
+                  <a:srgbClr val="DCDCAA"/>
+                </a:solidFill>
+                <a:latin typeface="Courier New" pitchFamily="34" charset="0"/>
+                <a:ea typeface="Courier New" pitchFamily="34" charset="-122"/>
+                <a:cs typeface="Courier New" pitchFamily="34" charset="-120"/>
+              </a:rPr>
+              <a:t>@mandatory</a:t>
+            </a:r>
+            <a:pPr indent="0" marL="0">
+              <a:buNone/>
+            </a:pPr>
+            <a:r>
+              <a:rPr lang="en-US" sz="1300" dirty="0">
+                <a:solidFill>
+                  <a:srgbClr val="CCCCCC"/>
+                </a:solidFill>
+                <a:latin typeface="Courier New" pitchFamily="34" charset="0"/>
+                <a:ea typeface="Courier New" pitchFamily="34" charset="-122"/>
+                <a:cs typeface="Courier New" pitchFamily="34" charset="-120"/>
+              </a:rPr>
+              <a:t> </a:t>
+            </a:r>
+            <a:pPr indent="0" marL="0">
+              <a:buNone/>
+            </a:pPr>
+            <a:r>
+              <a:rPr lang="en-US" sz="1300" dirty="0">
+                <a:solidFill>
+                  <a:srgbClr val="9CDCFE"/>
+                </a:solidFill>
+                <a:latin typeface="Courier New" pitchFamily="34" charset="0"/>
+                <a:ea typeface="Courier New" pitchFamily="34" charset="-122"/>
+                <a:cs typeface="Courier New" pitchFamily="34" charset="-120"/>
+              </a:rPr>
+              <a:t>motivoCancelamento</a:t>
+            </a:r>
+            <a:pPr indent="0" marL="0">
+              <a:buNone/>
+            </a:pPr>
+            <a:r>
+              <a:rPr lang="en-US" sz="1300" dirty="0">
+                <a:solidFill>
+                  <a:srgbClr val="CCCCCC"/>
+                </a:solidFill>
+                <a:latin typeface="Courier New" pitchFamily="34" charset="0"/>
+                <a:ea typeface="Courier New" pitchFamily="34" charset="-122"/>
+                <a:cs typeface="Courier New" pitchFamily="34" charset="-120"/>
+              </a:rPr>
+              <a:t> : </a:t>
+            </a:r>
+            <a:pPr indent="0" marL="0">
+              <a:buNone/>
+            </a:pPr>
+            <a:r>
+              <a:rPr lang="en-US" sz="1300" dirty="0">
+                <a:solidFill>
+                  <a:srgbClr val="4EC9B0"/>
+                </a:solidFill>
+                <a:latin typeface="Courier New" pitchFamily="34" charset="0"/>
+                <a:ea typeface="Courier New" pitchFamily="34" charset="-122"/>
+                <a:cs typeface="Courier New" pitchFamily="34" charset="-120"/>
+              </a:rPr>
+              <a:t>String</a:t>
+            </a:r>
+            <a:pPr indent="0" marL="0">
+              <a:buNone/>
+            </a:pPr>
+            <a:r>
+              <a:rPr lang="en-US" sz="1300" dirty="0">
+                <a:solidFill>
+                  <a:srgbClr val="179FFF"/>
+                </a:solidFill>
+                <a:latin typeface="Courier New" pitchFamily="34" charset="0"/>
+                <a:ea typeface="Courier New" pitchFamily="34" charset="-122"/>
+                <a:cs typeface="Courier New" pitchFamily="34" charset="-120"/>
+              </a:rPr>
+              <a:t>(</a:t>
+            </a:r>
+            <a:pPr indent="0" marL="0">
+              <a:buNone/>
+            </a:pPr>
+            <a:r>
+              <a:rPr lang="en-US" sz="1300" dirty="0">
+                <a:solidFill>
+                  <a:srgbClr val="B5CEA8"/>
+                </a:solidFill>
+                <a:latin typeface="Courier New" pitchFamily="34" charset="0"/>
+                <a:ea typeface="Courier New" pitchFamily="34" charset="-122"/>
+                <a:cs typeface="Courier New" pitchFamily="34" charset="-120"/>
+              </a:rPr>
+              <a:t>500</a:t>
+            </a:r>
+            <a:pPr indent="0" marL="0">
+              <a:buNone/>
+            </a:pPr>
+            <a:r>
+              <a:rPr lang="en-US" sz="1300" dirty="0">
+                <a:solidFill>
+                  <a:srgbClr val="179FFF"/>
+                </a:solidFill>
+                <a:latin typeface="Courier New" pitchFamily="34" charset="0"/>
+                <a:ea typeface="Courier New" pitchFamily="34" charset="-122"/>
+                <a:cs typeface="Courier New" pitchFamily="34" charset="-120"/>
+              </a:rPr>
+              <a:t>)</a:t>
             </a:r>
             <a:endParaRPr lang="en-US" sz="1300" dirty="0"/>
           </a:p>
@@ -13080,13 +16983,97 @@
             <a:r>
               <a:rPr lang="en-US" sz="1300" dirty="0">
                 <a:solidFill>
-                  <a:srgbClr val="EAECEE"/>
-                </a:solidFill>
-                <a:latin typeface="Courier New" pitchFamily="34" charset="0"/>
-                <a:ea typeface="Courier New" pitchFamily="34" charset="-122"/>
-                <a:cs typeface="Courier New" pitchFamily="34" charset="-120"/>
-              </a:rPr>
-              <a:t>  ) returns Pedidos;</a:t>
+                  <a:srgbClr val="CCCCCC"/>
+                </a:solidFill>
+                <a:latin typeface="Courier New" pitchFamily="34" charset="0"/>
+                <a:ea typeface="Courier New" pitchFamily="34" charset="-122"/>
+                <a:cs typeface="Courier New" pitchFamily="34" charset="-120"/>
+              </a:rPr>
+              <a:t>  </a:t>
+            </a:r>
+            <a:pPr indent="0" marL="0">
+              <a:buNone/>
+            </a:pPr>
+            <a:r>
+              <a:rPr lang="en-US" sz="1300" dirty="0">
+                <a:solidFill>
+                  <a:srgbClr val="DA70D6"/>
+                </a:solidFill>
+                <a:latin typeface="Courier New" pitchFamily="34" charset="0"/>
+                <a:ea typeface="Courier New" pitchFamily="34" charset="-122"/>
+                <a:cs typeface="Courier New" pitchFamily="34" charset="-120"/>
+              </a:rPr>
+              <a:t>)</a:t>
+            </a:r>
+            <a:pPr indent="0" marL="0">
+              <a:buNone/>
+            </a:pPr>
+            <a:r>
+              <a:rPr lang="en-US" sz="1300" dirty="0">
+                <a:solidFill>
+                  <a:srgbClr val="CCCCCC"/>
+                </a:solidFill>
+                <a:latin typeface="Courier New" pitchFamily="34" charset="0"/>
+                <a:ea typeface="Courier New" pitchFamily="34" charset="-122"/>
+                <a:cs typeface="Courier New" pitchFamily="34" charset="-120"/>
+              </a:rPr>
+              <a:t> </a:t>
+            </a:r>
+            <a:pPr indent="0" marL="0">
+              <a:buNone/>
+            </a:pPr>
+            <a:r>
+              <a:rPr lang="en-US" sz="1300" dirty="0">
+                <a:solidFill>
+                  <a:srgbClr val="569CD6"/>
+                </a:solidFill>
+                <a:latin typeface="Courier New" pitchFamily="34" charset="0"/>
+                <a:ea typeface="Courier New" pitchFamily="34" charset="-122"/>
+                <a:cs typeface="Courier New" pitchFamily="34" charset="-120"/>
+              </a:rPr>
+              <a:t>returns</a:t>
+            </a:r>
+            <a:pPr indent="0" marL="0">
+              <a:buNone/>
+            </a:pPr>
+            <a:r>
+              <a:rPr lang="en-US" sz="1300" dirty="0">
+                <a:solidFill>
+                  <a:srgbClr val="CCCCCC"/>
+                </a:solidFill>
+                <a:latin typeface="Courier New" pitchFamily="34" charset="0"/>
+                <a:ea typeface="Courier New" pitchFamily="34" charset="-122"/>
+                <a:cs typeface="Courier New" pitchFamily="34" charset="-120"/>
+              </a:rPr>
+              <a:t> </a:t>
+            </a:r>
+            <a:pPr indent="0" marL="0">
+              <a:buNone/>
+            </a:pPr>
+            <a:r>
+              <a:rPr lang="en-US" sz="1300" dirty="0">
+                <a:solidFill>
+                  <a:srgbClr val="4EC9B0"/>
+                </a:solidFill>
+                <a:latin typeface="Courier New" pitchFamily="34" charset="0"/>
+                <a:ea typeface="Courier New" pitchFamily="34" charset="-122"/>
+                <a:cs typeface="Courier New" pitchFamily="34" charset="-120"/>
+              </a:rPr>
+              <a:t>Pedidos</a:t>
+            </a:r>
+            <a:pPr indent="0" marL="0">
+              <a:buNone/>
+            </a:pPr>
+            <a:r>
+              <a:rPr lang="en-US" sz="1300" dirty="0">
+                <a:solidFill>
+                  <a:srgbClr val="CCCCCC"/>
+                </a:solidFill>
+                <a:latin typeface="Courier New" pitchFamily="34" charset="0"/>
+                <a:ea typeface="Courier New" pitchFamily="34" charset="-122"/>
+                <a:cs typeface="Courier New" pitchFamily="34" charset="-120"/>
+              </a:rPr>
+              <a:t>;</a:t>
             </a:r>
             <a:endParaRPr lang="en-US" sz="1300" dirty="0"/>
           </a:p>
@@ -13097,7 +17084,7 @@
             <a:r>
               <a:rPr lang="en-US" sz="1300" dirty="0">
                 <a:solidFill>
-                  <a:srgbClr val="EAECEE"/>
+                  <a:srgbClr val="FFD700"/>
                 </a:solidFill>
                 <a:latin typeface="Courier New" pitchFamily="34" charset="0"/>
                 <a:ea typeface="Courier New" pitchFamily="34" charset="-122"/>

--- a/docs/apresentacoes/02-servicos-odata.pptx
+++ b/docs/apresentacoes/02-servicos-odata.pptx
@@ -35867,8 +35867,8 @@
         </p:nvSpPr>
         <p:spPr>
           <a:xfrm>
-            <a:off x="990758" y="1463040"/>
-            <a:ext cx="6065204" cy="4800600"/>
+            <a:off x="548640" y="2030431"/>
+            <a:ext cx="6949440" cy="3665817"/>
           </a:xfrm>
           <a:prstGeom prst="roundRect">
             <a:avLst>
@@ -35909,8 +35909,8 @@
         </p:blipFill>
         <p:spPr>
           <a:xfrm>
-            <a:off x="1082198" y="1554480"/>
-            <a:ext cx="5882324" cy="4617720"/>
+            <a:off x="640080" y="2121871"/>
+            <a:ext cx="6766560" cy="3482937"/>
           </a:xfrm>
           <a:prstGeom prst="rect">
             <a:avLst/>
@@ -51650,8 +51650,8 @@
         </p:nvSpPr>
         <p:spPr>
           <a:xfrm>
-            <a:off x="1490950" y="1463040"/>
-            <a:ext cx="9207052" cy="4800600"/>
+            <a:off x="1821980" y="1463040"/>
+            <a:ext cx="8544992" cy="4800600"/>
           </a:xfrm>
           <a:prstGeom prst="roundRect">
             <a:avLst>
@@ -51692,8 +51692,8 @@
         </p:blipFill>
         <p:spPr>
           <a:xfrm>
-            <a:off x="1582390" y="1554480"/>
-            <a:ext cx="9024172" cy="4617720"/>
+            <a:off x="1913420" y="1554480"/>
+            <a:ext cx="8362112" cy="4617720"/>
           </a:xfrm>
           <a:prstGeom prst="rect">
             <a:avLst/>
